--- a/backend-engineering/slides/03_Auth_Deploy_Ship.pptx
+++ b/backend-engineering/slides/03_Auth_Deploy_Ship.pptx
@@ -29,6 +29,10 @@
     <p:sldId id="274" r:id="rId22"/>
     <p:sldId id="275" r:id="rId23"/>
     <p:sldId id="276" r:id="rId24"/>
+    <p:sldId id="277" r:id="rId25"/>
+    <p:sldId id="278" r:id="rId26"/>
+    <p:sldId id="279" r:id="rId27"/>
+    <p:sldId id="280" r:id="rId28"/>
   </p:sldIdLst>
   <p:sldSz cx="12192000" cy="6858000"/>
   <p:notesSz cx="6858000" cy="12192000"/>
@@ -384,7 +388,7 @@
             <a:pPr indent="0" algn="r">
               <a:buNone/>
             </a:pPr>
-            <a:fld id="{C6EA3885-E8CE-4C72-8E8F-70BD58681F77}" type="slidenum">
+            <a:fld id="{71BA9ACB-4930-40FC-AAA6-C2ED3ABF06AA}" type="slidenum">
               <a:rPr lang="en-IN" sz="1400" b="0" u="none" strike="noStrike">
                 <a:solidFill>
                   <a:srgbClr val="000000"/>
@@ -431,7 +435,7 @@
       </p:grpSpPr>
       <p:sp>
         <p:nvSpPr>
-          <p:cNvPr id="304" name="PlaceHolder 1"/>
+          <p:cNvPr id="364" name="PlaceHolder 1"/>
           <p:cNvSpPr>
             <a:spLocks noGrp="1"/>
           </p:cNvSpPr>
@@ -454,7 +458,7 @@
       </p:sp>
       <p:sp>
         <p:nvSpPr>
-          <p:cNvPr id="305" name="PlaceHolder 2"/>
+          <p:cNvPr id="365" name="PlaceHolder 2"/>
           <p:cNvSpPr>
             <a:spLocks noGrp="1"/>
           </p:cNvSpPr>
@@ -510,7 +514,7 @@
       </p:sp>
       <p:sp>
         <p:nvSpPr>
-          <p:cNvPr id="306" name="PlaceHolder 3"/>
+          <p:cNvPr id="366" name="PlaceHolder 3"/>
           <p:cNvSpPr>
             <a:spLocks noGrp="1"/>
           </p:cNvSpPr>
@@ -559,7 +563,7 @@
               </a:lnSpc>
               <a:buNone/>
             </a:pPr>
-            <a:fld id="{B497F496-0B7B-46AD-9494-6C08396AFE3F}" type="slidenum">
+            <a:fld id="{28325697-E1EA-467A-8FCC-068A11CA1557}" type="slidenum">
               <a:rPr lang="en-US" sz="1200" b="0" u="none" strike="noStrike">
                 <a:solidFill>
                   <a:schemeClr val="dk1"/>
@@ -606,7 +610,7 @@
       </p:grpSpPr>
       <p:sp>
         <p:nvSpPr>
-          <p:cNvPr id="331" name="PlaceHolder 1"/>
+          <p:cNvPr id="391" name="PlaceHolder 1"/>
           <p:cNvSpPr>
             <a:spLocks noGrp="1"/>
           </p:cNvSpPr>
@@ -629,7 +633,7 @@
       </p:sp>
       <p:sp>
         <p:nvSpPr>
-          <p:cNvPr id="332" name="PlaceHolder 2"/>
+          <p:cNvPr id="392" name="PlaceHolder 2"/>
           <p:cNvSpPr>
             <a:spLocks noGrp="1"/>
           </p:cNvSpPr>
@@ -685,7 +689,7 @@
       </p:sp>
       <p:sp>
         <p:nvSpPr>
-          <p:cNvPr id="333" name="PlaceHolder 3"/>
+          <p:cNvPr id="393" name="PlaceHolder 3"/>
           <p:cNvSpPr>
             <a:spLocks noGrp="1"/>
           </p:cNvSpPr>
@@ -734,7 +738,7 @@
               </a:lnSpc>
               <a:buNone/>
             </a:pPr>
-            <a:fld id="{22D2BE3D-0010-46B5-88A5-74E491E95A9C}" type="slidenum">
+            <a:fld id="{5EEEB553-DDB7-43D7-A197-88781313ADF1}" type="slidenum">
               <a:rPr lang="en-US" sz="1200" b="0" u="none" strike="noStrike">
                 <a:solidFill>
                   <a:schemeClr val="dk1"/>
@@ -781,7 +785,7 @@
       </p:grpSpPr>
       <p:sp>
         <p:nvSpPr>
-          <p:cNvPr id="334" name="PlaceHolder 1"/>
+          <p:cNvPr id="394" name="PlaceHolder 1"/>
           <p:cNvSpPr>
             <a:spLocks noGrp="1"/>
           </p:cNvSpPr>
@@ -804,7 +808,7 @@
       </p:sp>
       <p:sp>
         <p:nvSpPr>
-          <p:cNvPr id="335" name="PlaceHolder 2"/>
+          <p:cNvPr id="395" name="PlaceHolder 2"/>
           <p:cNvSpPr>
             <a:spLocks noGrp="1"/>
           </p:cNvSpPr>
@@ -860,7 +864,7 @@
       </p:sp>
       <p:sp>
         <p:nvSpPr>
-          <p:cNvPr id="336" name="PlaceHolder 3"/>
+          <p:cNvPr id="396" name="PlaceHolder 3"/>
           <p:cNvSpPr>
             <a:spLocks noGrp="1"/>
           </p:cNvSpPr>
@@ -909,7 +913,7 @@
               </a:lnSpc>
               <a:buNone/>
             </a:pPr>
-            <a:fld id="{2BEA62F0-70EB-4953-A2F2-42368F4DD12B}" type="slidenum">
+            <a:fld id="{B724ADAA-FB55-42D5-8F63-A1778B292E8D}" type="slidenum">
               <a:rPr lang="en-US" sz="1200" b="0" u="none" strike="noStrike">
                 <a:solidFill>
                   <a:schemeClr val="dk1"/>
@@ -956,7 +960,7 @@
       </p:grpSpPr>
       <p:sp>
         <p:nvSpPr>
-          <p:cNvPr id="337" name="PlaceHolder 1"/>
+          <p:cNvPr id="397" name="PlaceHolder 1"/>
           <p:cNvSpPr>
             <a:spLocks noGrp="1"/>
           </p:cNvSpPr>
@@ -979,7 +983,7 @@
       </p:sp>
       <p:sp>
         <p:nvSpPr>
-          <p:cNvPr id="338" name="PlaceHolder 2"/>
+          <p:cNvPr id="398" name="PlaceHolder 2"/>
           <p:cNvSpPr>
             <a:spLocks noGrp="1"/>
           </p:cNvSpPr>
@@ -1035,7 +1039,7 @@
       </p:sp>
       <p:sp>
         <p:nvSpPr>
-          <p:cNvPr id="339" name="PlaceHolder 3"/>
+          <p:cNvPr id="399" name="PlaceHolder 3"/>
           <p:cNvSpPr>
             <a:spLocks noGrp="1"/>
           </p:cNvSpPr>
@@ -1084,7 +1088,7 @@
               </a:lnSpc>
               <a:buNone/>
             </a:pPr>
-            <a:fld id="{7E734850-835E-449E-BFEF-EAD0AD06FD49}" type="slidenum">
+            <a:fld id="{68A5A955-34A6-4E6B-B424-1DDF4622E57E}" type="slidenum">
               <a:rPr lang="en-US" sz="1200" b="0" u="none" strike="noStrike">
                 <a:solidFill>
                   <a:schemeClr val="dk1"/>
@@ -1131,7 +1135,7 @@
       </p:grpSpPr>
       <p:sp>
         <p:nvSpPr>
-          <p:cNvPr id="340" name="PlaceHolder 1"/>
+          <p:cNvPr id="400" name="PlaceHolder 1"/>
           <p:cNvSpPr>
             <a:spLocks noGrp="1"/>
           </p:cNvSpPr>
@@ -1154,7 +1158,7 @@
       </p:sp>
       <p:sp>
         <p:nvSpPr>
-          <p:cNvPr id="341" name="PlaceHolder 2"/>
+          <p:cNvPr id="401" name="PlaceHolder 2"/>
           <p:cNvSpPr>
             <a:spLocks noGrp="1"/>
           </p:cNvSpPr>
@@ -1210,7 +1214,7 @@
       </p:sp>
       <p:sp>
         <p:nvSpPr>
-          <p:cNvPr id="342" name="PlaceHolder 3"/>
+          <p:cNvPr id="402" name="PlaceHolder 3"/>
           <p:cNvSpPr>
             <a:spLocks noGrp="1"/>
           </p:cNvSpPr>
@@ -1259,7 +1263,7 @@
               </a:lnSpc>
               <a:buNone/>
             </a:pPr>
-            <a:fld id="{CB18C8E9-01E5-46CE-ABE2-65F19D0D6D1B}" type="slidenum">
+            <a:fld id="{D61AA3EE-B3F8-40DF-9AC1-AF42F5F7B370}" type="slidenum">
               <a:rPr lang="en-US" sz="1200" b="0" u="none" strike="noStrike">
                 <a:solidFill>
                   <a:schemeClr val="dk1"/>
@@ -1306,7 +1310,7 @@
       </p:grpSpPr>
       <p:sp>
         <p:nvSpPr>
-          <p:cNvPr id="343" name="PlaceHolder 1"/>
+          <p:cNvPr id="403" name="PlaceHolder 1"/>
           <p:cNvSpPr>
             <a:spLocks noGrp="1"/>
           </p:cNvSpPr>
@@ -1329,7 +1333,7 @@
       </p:sp>
       <p:sp>
         <p:nvSpPr>
-          <p:cNvPr id="344" name="PlaceHolder 2"/>
+          <p:cNvPr id="404" name="PlaceHolder 2"/>
           <p:cNvSpPr>
             <a:spLocks noGrp="1"/>
           </p:cNvSpPr>
@@ -1385,7 +1389,7 @@
       </p:sp>
       <p:sp>
         <p:nvSpPr>
-          <p:cNvPr id="345" name="PlaceHolder 3"/>
+          <p:cNvPr id="405" name="PlaceHolder 3"/>
           <p:cNvSpPr>
             <a:spLocks noGrp="1"/>
           </p:cNvSpPr>
@@ -1434,7 +1438,7 @@
               </a:lnSpc>
               <a:buNone/>
             </a:pPr>
-            <a:fld id="{849F9560-D390-4444-8E64-9789861F1474}" type="slidenum">
+            <a:fld id="{BDE2E19E-A364-4F70-BD16-E07788D67776}" type="slidenum">
               <a:rPr lang="en-US" sz="1200" b="0" u="none" strike="noStrike">
                 <a:solidFill>
                   <a:schemeClr val="dk1"/>
@@ -1481,7 +1485,7 @@
       </p:grpSpPr>
       <p:sp>
         <p:nvSpPr>
-          <p:cNvPr id="346" name="PlaceHolder 1"/>
+          <p:cNvPr id="406" name="PlaceHolder 1"/>
           <p:cNvSpPr>
             <a:spLocks noGrp="1"/>
           </p:cNvSpPr>
@@ -1504,7 +1508,7 @@
       </p:sp>
       <p:sp>
         <p:nvSpPr>
-          <p:cNvPr id="347" name="PlaceHolder 2"/>
+          <p:cNvPr id="407" name="PlaceHolder 2"/>
           <p:cNvSpPr>
             <a:spLocks noGrp="1"/>
           </p:cNvSpPr>
@@ -1560,7 +1564,7 @@
       </p:sp>
       <p:sp>
         <p:nvSpPr>
-          <p:cNvPr id="348" name="PlaceHolder 3"/>
+          <p:cNvPr id="408" name="PlaceHolder 3"/>
           <p:cNvSpPr>
             <a:spLocks noGrp="1"/>
           </p:cNvSpPr>
@@ -1609,7 +1613,7 @@
               </a:lnSpc>
               <a:buNone/>
             </a:pPr>
-            <a:fld id="{E256540D-7009-4E2A-82AE-05CEE810FF0E}" type="slidenum">
+            <a:fld id="{54E4640E-4F5E-449B-9A98-07C20AC909D8}" type="slidenum">
               <a:rPr lang="en-US" sz="1200" b="0" u="none" strike="noStrike">
                 <a:solidFill>
                   <a:schemeClr val="dk1"/>
@@ -1656,7 +1660,7 @@
       </p:grpSpPr>
       <p:sp>
         <p:nvSpPr>
-          <p:cNvPr id="349" name="PlaceHolder 1"/>
+          <p:cNvPr id="409" name="PlaceHolder 1"/>
           <p:cNvSpPr>
             <a:spLocks noGrp="1"/>
           </p:cNvSpPr>
@@ -1679,7 +1683,7 @@
       </p:sp>
       <p:sp>
         <p:nvSpPr>
-          <p:cNvPr id="350" name="PlaceHolder 2"/>
+          <p:cNvPr id="410" name="PlaceHolder 2"/>
           <p:cNvSpPr>
             <a:spLocks noGrp="1"/>
           </p:cNvSpPr>
@@ -1735,7 +1739,7 @@
       </p:sp>
       <p:sp>
         <p:nvSpPr>
-          <p:cNvPr id="351" name="PlaceHolder 3"/>
+          <p:cNvPr id="411" name="PlaceHolder 3"/>
           <p:cNvSpPr>
             <a:spLocks noGrp="1"/>
           </p:cNvSpPr>
@@ -1784,7 +1788,7 @@
               </a:lnSpc>
               <a:buNone/>
             </a:pPr>
-            <a:fld id="{8C7F131C-A255-4D56-AC5B-5DFDAF7DC76D}" type="slidenum">
+            <a:fld id="{D146E4E9-D769-48F8-961A-82E689BED263}" type="slidenum">
               <a:rPr lang="en-US" sz="1200" b="0" u="none" strike="noStrike">
                 <a:solidFill>
                   <a:schemeClr val="dk1"/>
@@ -1831,7 +1835,7 @@
       </p:grpSpPr>
       <p:sp>
         <p:nvSpPr>
-          <p:cNvPr id="352" name="PlaceHolder 1"/>
+          <p:cNvPr id="412" name="PlaceHolder 1"/>
           <p:cNvSpPr>
             <a:spLocks noGrp="1"/>
           </p:cNvSpPr>
@@ -1854,7 +1858,7 @@
       </p:sp>
       <p:sp>
         <p:nvSpPr>
-          <p:cNvPr id="353" name="PlaceHolder 2"/>
+          <p:cNvPr id="413" name="PlaceHolder 2"/>
           <p:cNvSpPr>
             <a:spLocks noGrp="1"/>
           </p:cNvSpPr>
@@ -1910,7 +1914,7 @@
       </p:sp>
       <p:sp>
         <p:nvSpPr>
-          <p:cNvPr id="354" name="PlaceHolder 3"/>
+          <p:cNvPr id="414" name="PlaceHolder 3"/>
           <p:cNvSpPr>
             <a:spLocks noGrp="1"/>
           </p:cNvSpPr>
@@ -1959,7 +1963,7 @@
               </a:lnSpc>
               <a:buNone/>
             </a:pPr>
-            <a:fld id="{1A994473-25ED-4EE6-81C1-E51DD02F88FC}" type="slidenum">
+            <a:fld id="{E5D0CF90-0BDD-4234-B022-358679F22E6D}" type="slidenum">
               <a:rPr lang="en-US" sz="1200" b="0" u="none" strike="noStrike">
                 <a:solidFill>
                   <a:schemeClr val="dk1"/>
@@ -2006,7 +2010,7 @@
       </p:grpSpPr>
       <p:sp>
         <p:nvSpPr>
-          <p:cNvPr id="355" name="PlaceHolder 1"/>
+          <p:cNvPr id="415" name="PlaceHolder 1"/>
           <p:cNvSpPr>
             <a:spLocks noGrp="1"/>
           </p:cNvSpPr>
@@ -2029,7 +2033,7 @@
       </p:sp>
       <p:sp>
         <p:nvSpPr>
-          <p:cNvPr id="356" name="PlaceHolder 2"/>
+          <p:cNvPr id="416" name="PlaceHolder 2"/>
           <p:cNvSpPr>
             <a:spLocks noGrp="1"/>
           </p:cNvSpPr>
@@ -2085,7 +2089,7 @@
       </p:sp>
       <p:sp>
         <p:nvSpPr>
-          <p:cNvPr id="357" name="PlaceHolder 3"/>
+          <p:cNvPr id="417" name="PlaceHolder 3"/>
           <p:cNvSpPr>
             <a:spLocks noGrp="1"/>
           </p:cNvSpPr>
@@ -2134,7 +2138,7 @@
               </a:lnSpc>
               <a:buNone/>
             </a:pPr>
-            <a:fld id="{3A433DBC-A066-4305-87A3-51BCEB78FDD3}" type="slidenum">
+            <a:fld id="{DF1D419E-36D7-4278-8250-1A1A3CB0DFEE}" type="slidenum">
               <a:rPr lang="en-US" sz="1200" b="0" u="none" strike="noStrike">
                 <a:solidFill>
                   <a:schemeClr val="dk1"/>
@@ -2181,7 +2185,7 @@
       </p:grpSpPr>
       <p:sp>
         <p:nvSpPr>
-          <p:cNvPr id="358" name="PlaceHolder 1"/>
+          <p:cNvPr id="418" name="PlaceHolder 1"/>
           <p:cNvSpPr>
             <a:spLocks noGrp="1"/>
           </p:cNvSpPr>
@@ -2204,7 +2208,7 @@
       </p:sp>
       <p:sp>
         <p:nvSpPr>
-          <p:cNvPr id="359" name="PlaceHolder 2"/>
+          <p:cNvPr id="419" name="PlaceHolder 2"/>
           <p:cNvSpPr>
             <a:spLocks noGrp="1"/>
           </p:cNvSpPr>
@@ -2260,7 +2264,7 @@
       </p:sp>
       <p:sp>
         <p:nvSpPr>
-          <p:cNvPr id="360" name="PlaceHolder 3"/>
+          <p:cNvPr id="420" name="PlaceHolder 3"/>
           <p:cNvSpPr>
             <a:spLocks noGrp="1"/>
           </p:cNvSpPr>
@@ -2309,7 +2313,7 @@
               </a:lnSpc>
               <a:buNone/>
             </a:pPr>
-            <a:fld id="{0F674AA9-2BA3-44A5-A144-FBDD8DE62EEE}" type="slidenum">
+            <a:fld id="{FC8577EC-36C8-42B4-8EFF-18678F8C88DD}" type="slidenum">
               <a:rPr lang="en-US" sz="1200" b="0" u="none" strike="noStrike">
                 <a:solidFill>
                   <a:schemeClr val="dk1"/>
@@ -2356,7 +2360,7 @@
       </p:grpSpPr>
       <p:sp>
         <p:nvSpPr>
-          <p:cNvPr id="307" name="PlaceHolder 1"/>
+          <p:cNvPr id="367" name="PlaceHolder 1"/>
           <p:cNvSpPr>
             <a:spLocks noGrp="1"/>
           </p:cNvSpPr>
@@ -2379,7 +2383,7 @@
       </p:sp>
       <p:sp>
         <p:nvSpPr>
-          <p:cNvPr id="308" name="PlaceHolder 2"/>
+          <p:cNvPr id="368" name="PlaceHolder 2"/>
           <p:cNvSpPr>
             <a:spLocks noGrp="1"/>
           </p:cNvSpPr>
@@ -2435,7 +2439,7 @@
       </p:sp>
       <p:sp>
         <p:nvSpPr>
-          <p:cNvPr id="309" name="PlaceHolder 3"/>
+          <p:cNvPr id="369" name="PlaceHolder 3"/>
           <p:cNvSpPr>
             <a:spLocks noGrp="1"/>
           </p:cNvSpPr>
@@ -2484,7 +2488,7 @@
               </a:lnSpc>
               <a:buNone/>
             </a:pPr>
-            <a:fld id="{CADF239A-34EF-4CDD-B60A-9407742ED8D9}" type="slidenum">
+            <a:fld id="{65A7ADD7-5F42-4033-9421-33A6120CAD9D}" type="slidenum">
               <a:rPr lang="en-US" sz="1200" b="0" u="none" strike="noStrike">
                 <a:solidFill>
                   <a:schemeClr val="dk1"/>
@@ -2531,7 +2535,7 @@
       </p:grpSpPr>
       <p:sp>
         <p:nvSpPr>
-          <p:cNvPr id="361" name="PlaceHolder 1"/>
+          <p:cNvPr id="421" name="PlaceHolder 1"/>
           <p:cNvSpPr>
             <a:spLocks noGrp="1"/>
           </p:cNvSpPr>
@@ -2554,7 +2558,7 @@
       </p:sp>
       <p:sp>
         <p:nvSpPr>
-          <p:cNvPr id="362" name="PlaceHolder 2"/>
+          <p:cNvPr id="422" name="PlaceHolder 2"/>
           <p:cNvSpPr>
             <a:spLocks noGrp="1"/>
           </p:cNvSpPr>
@@ -2595,7 +2599,7 @@
                 <a:uFillTx/>
                 <a:latin typeface="Arial"/>
               </a:rPr>
-              <a:t>Deliberately underwhelming, and say so: 'you were probably expecting this to be harder'. Everything they learned in Week 2 still applies - same Depends, same schema, same padlock, same status codes. The only new thing is where the context comes from. This reframes the whole capstone: the AI is the small part, and the boring backend around it is what makes it a product rather than a notebook.</a:t>
+              <a:t>Six minutes, slide-led. CI/CD was a bullet on a curriculum for years; these three slides make it real without costing you a demo. If you are behind, show only the first one - the loop picture is the whole idea, the other two are reference they can read in the tutorial file.</a:t>
             </a:r>
             <a:endParaRPr lang="en-IN" sz="2000" b="0" u="none" strike="noStrike">
               <a:solidFill>
@@ -2610,7 +2614,7 @@
       </p:sp>
       <p:sp>
         <p:nvSpPr>
-          <p:cNvPr id="363" name="PlaceHolder 3"/>
+          <p:cNvPr id="423" name="PlaceHolder 3"/>
           <p:cNvSpPr>
             <a:spLocks noGrp="1"/>
           </p:cNvSpPr>
@@ -2659,7 +2663,7 @@
               </a:lnSpc>
               <a:buNone/>
             </a:pPr>
-            <a:fld id="{90EF22C6-6F09-49ED-AF34-C0E8776836CA}" type="slidenum">
+            <a:fld id="{6A8B245D-C7A3-4327-B2A1-06276C40BC64}" type="slidenum">
               <a:rPr lang="en-US" sz="1200" b="0" u="none" strike="noStrike">
                 <a:solidFill>
                   <a:schemeClr val="dk1"/>
@@ -2706,7 +2710,7 @@
       </p:grpSpPr>
       <p:sp>
         <p:nvSpPr>
-          <p:cNvPr id="364" name="PlaceHolder 1"/>
+          <p:cNvPr id="424" name="PlaceHolder 1"/>
           <p:cNvSpPr>
             <a:spLocks noGrp="1"/>
           </p:cNvSpPr>
@@ -2729,7 +2733,7 @@
       </p:sp>
       <p:sp>
         <p:nvSpPr>
-          <p:cNvPr id="365" name="PlaceHolder 2"/>
+          <p:cNvPr id="425" name="PlaceHolder 2"/>
           <p:cNvSpPr>
             <a:spLocks noGrp="1"/>
           </p:cNvSpPr>
@@ -2770,7 +2774,7 @@
                 <a:uFillTx/>
                 <a:latin typeface="Arial"/>
               </a:rPr>
-              <a:t>Read the list out loud as a checklist - naming what they can now do is what makes two dense sessions feel like progress instead of a blur. Then the capstone brief: they have every piece, and the capstone is those pieces pointed at a problem they care about. Remind them the final test is TAKE-HOME with a closing date, and that DEPLOY.md is the homework that matters most - a public URL is the single most valuable thing they leave this course with.</a:t>
+              <a:t>Open with the question, not the definition: 'who on your team is going to remember to run the checks before every merge?' Nobody. That is the whole pitch. The four boxes are the entire mental model - push, rented machine, your steps, green or red. The green banner is the bit worth slowing on: it is a FRESH machine, so the thing that is only on your laptop is exactly what CI finds. Tie CI vs CD back to Render: they already have the CD half from slide 19, they just did not have a name for it.</a:t>
             </a:r>
             <a:endParaRPr lang="en-IN" sz="2000" b="0" u="none" strike="noStrike">
               <a:solidFill>
@@ -2785,7 +2789,7 @@
       </p:sp>
       <p:sp>
         <p:nvSpPr>
-          <p:cNvPr id="366" name="PlaceHolder 3"/>
+          <p:cNvPr id="426" name="PlaceHolder 3"/>
           <p:cNvSpPr>
             <a:spLocks noGrp="1"/>
           </p:cNvSpPr>
@@ -2834,7 +2838,707 @@
               </a:lnSpc>
               <a:buNone/>
             </a:pPr>
-            <a:fld id="{9BB32936-4014-4C72-91CA-CAE49612EB03}" type="slidenum">
+            <a:fld id="{90842DC5-C6FA-48F2-A20B-71DCEA51926A}" type="slidenum">
+              <a:rPr lang="en-US" sz="1200" b="0" u="none" strike="noStrike">
+                <a:solidFill>
+                  <a:schemeClr val="dk1"/>
+                </a:solidFill>
+                <a:effectLst/>
+                <a:uFillTx/>
+                <a:latin typeface="+mn-lt"/>
+                <a:ea typeface="+mn-ea"/>
+              </a:rPr>
+              <a:t>&lt;number&gt;</a:t>
+            </a:fld>
+            <a:endParaRPr lang="en-IN" sz="1200" b="0" u="none" strike="noStrike">
+              <a:solidFill>
+                <a:srgbClr val="000000"/>
+              </a:solidFill>
+              <a:effectLst/>
+              <a:uFillTx/>
+              <a:latin typeface="Times New Roman"/>
+            </a:endParaRPr>
+          </a:p>
+        </p:txBody>
+      </p:sp>
+    </p:spTree>
+  </p:cSld>
+</p:notes>
+</file>
+
+<file path=ppt/notesSlides/notesSlide22.xml><?xml version="1.0" encoding="utf-8"?>
+<p:notes xmlns:a="http://schemas.openxmlformats.org/drawingml/2006/main" xmlns:p="http://schemas.openxmlformats.org/presentationml/2006/main" xmlns:r="http://schemas.openxmlformats.org/officeDocument/2006/relationships" xmlns:p14="http://schemas.microsoft.com/office/powerpoint/2010/main" xmlns:p15="http://schemas.microsoft.com/office/powerpoint/2012/main" xmlns:mc="http://schemas.openxmlformats.org/markup-compatibility/2006">
+  <p:cSld>
+    <p:spTree>
+      <p:nvGrpSpPr>
+        <p:cNvPr id="1" name=""/>
+        <p:cNvGrpSpPr/>
+        <p:nvPr/>
+      </p:nvGrpSpPr>
+      <p:grpSpPr>
+        <a:xfrm>
+          <a:off x="0" y="0"/>
+          <a:ext cx="0" cy="0"/>
+          <a:chOff x="0" y="0"/>
+          <a:chExt cx="0" cy="0"/>
+        </a:xfrm>
+      </p:grpSpPr>
+      <p:sp>
+        <p:nvSpPr>
+          <p:cNvPr id="427" name="PlaceHolder 1"/>
+          <p:cNvSpPr>
+            <a:spLocks noGrp="1"/>
+          </p:cNvSpPr>
+          <p:nvPr>
+            <p:ph type="sldImg"/>
+          </p:nvPr>
+        </p:nvSpPr>
+        <p:spPr>
+          <a:xfrm>
+            <a:off x="685800" y="1143000"/>
+            <a:ext cx="5486040" cy="3085920"/>
+          </a:xfrm>
+          <a:prstGeom prst="rect">
+            <a:avLst/>
+          </a:prstGeom>
+          <a:ln w="0">
+            <a:noFill/>
+          </a:ln>
+        </p:spPr>
+      </p:sp>
+      <p:sp>
+        <p:nvSpPr>
+          <p:cNvPr id="428" name="PlaceHolder 2"/>
+          <p:cNvSpPr>
+            <a:spLocks noGrp="1"/>
+          </p:cNvSpPr>
+          <p:nvPr>
+            <p:ph type="body"/>
+          </p:nvPr>
+        </p:nvSpPr>
+        <p:spPr>
+          <a:xfrm>
+            <a:off x="685800" y="4400640"/>
+            <a:ext cx="5486040" cy="3600000"/>
+          </a:xfrm>
+          <a:prstGeom prst="rect">
+            <a:avLst/>
+          </a:prstGeom>
+          <a:noFill/>
+          <a:ln w="0">
+            <a:noFill/>
+          </a:ln>
+        </p:spPr>
+        <p:txBody>
+          <a:bodyPr lIns="91440" tIns="45720" rIns="91440" bIns="45720" anchor="t">
+            <a:noAutofit/>
+          </a:bodyPr>
+          <a:p>
+            <a:pPr indent="0" algn="l">
+              <a:lnSpc>
+                <a:spcPct val="100000"/>
+              </a:lnSpc>
+              <a:buNone/>
+            </a:pPr>
+            <a:r>
+              <a:rPr lang="en-US" sz="2000" b="0" u="none" strike="noStrike">
+                <a:solidFill>
+                  <a:srgbClr val="000000"/>
+                </a:solidFill>
+                <a:effectLst/>
+                <a:uFillTx/>
+                <a:latin typeface="Arial"/>
+              </a:rPr>
+              <a:t>Do not read the YAML aloud. Point at the three comments - WHEN, WHERE, WHAT - and say that is the whole shape. The uses-vs-run card is the distinction people get wrong first. The amber banner is the one that actually costs them an evening: two jobs are two machines, so job 2 cannot see the file job 1 made. And the bottom line is worth reading out - all four are things every single person does once. The full commented file is r1_github_actions_ci.yml in their pack; tell them it is written to be read, not just copied.</a:t>
+            </a:r>
+            <a:endParaRPr lang="en-IN" sz="2000" b="0" u="none" strike="noStrike">
+              <a:solidFill>
+                <a:srgbClr val="000000"/>
+              </a:solidFill>
+              <a:effectLst/>
+              <a:uFillTx/>
+              <a:latin typeface="Arial"/>
+            </a:endParaRPr>
+          </a:p>
+        </p:txBody>
+      </p:sp>
+      <p:sp>
+        <p:nvSpPr>
+          <p:cNvPr id="429" name="PlaceHolder 3"/>
+          <p:cNvSpPr>
+            <a:spLocks noGrp="1"/>
+          </p:cNvSpPr>
+          <p:nvPr>
+            <p:ph type="sldNum" idx="25"/>
+          </p:nvPr>
+        </p:nvSpPr>
+        <p:spPr>
+          <a:xfrm>
+            <a:off x="3884760" y="8685360"/>
+            <a:ext cx="2971440" cy="458280"/>
+          </a:xfrm>
+          <a:prstGeom prst="rect">
+            <a:avLst/>
+          </a:prstGeom>
+          <a:noFill/>
+          <a:ln w="0">
+            <a:noFill/>
+          </a:ln>
+        </p:spPr>
+        <p:txBody>
+          <a:bodyPr lIns="91440" tIns="45720" rIns="91440" bIns="45720" anchor="b">
+            <a:noAutofit/>
+          </a:bodyPr>
+          <a:lstStyle>
+            <a:lvl1pPr indent="0" algn="r" defTabSz="914400">
+              <a:lnSpc>
+                <a:spcPct val="100000"/>
+              </a:lnSpc>
+              <a:buNone/>
+              <a:defRPr lang="en-US" sz="1200" b="0" u="none" strike="noStrike">
+                <a:solidFill>
+                  <a:schemeClr val="dk1"/>
+                </a:solidFill>
+                <a:effectLst/>
+                <a:uFillTx/>
+                <a:latin typeface="+mn-lt"/>
+                <a:ea typeface="+mn-ea"/>
+              </a:defRPr>
+            </a:lvl1pPr>
+          </a:lstStyle>
+          <a:p>
+            <a:pPr indent="0" algn="r" defTabSz="914400">
+              <a:lnSpc>
+                <a:spcPct val="100000"/>
+              </a:lnSpc>
+              <a:buNone/>
+            </a:pPr>
+            <a:fld id="{4C32C653-6C36-4BFF-B6D1-5A35AE8F5978}" type="slidenum">
+              <a:rPr lang="en-US" sz="1200" b="0" u="none" strike="noStrike">
+                <a:solidFill>
+                  <a:schemeClr val="dk1"/>
+                </a:solidFill>
+                <a:effectLst/>
+                <a:uFillTx/>
+                <a:latin typeface="+mn-lt"/>
+                <a:ea typeface="+mn-ea"/>
+              </a:rPr>
+              <a:t>&lt;number&gt;</a:t>
+            </a:fld>
+            <a:endParaRPr lang="en-IN" sz="1200" b="0" u="none" strike="noStrike">
+              <a:solidFill>
+                <a:srgbClr val="000000"/>
+              </a:solidFill>
+              <a:effectLst/>
+              <a:uFillTx/>
+              <a:latin typeface="Times New Roman"/>
+            </a:endParaRPr>
+          </a:p>
+        </p:txBody>
+      </p:sp>
+    </p:spTree>
+  </p:cSld>
+</p:notes>
+</file>
+
+<file path=ppt/notesSlides/notesSlide23.xml><?xml version="1.0" encoding="utf-8"?>
+<p:notes xmlns:a="http://schemas.openxmlformats.org/drawingml/2006/main" xmlns:p="http://schemas.openxmlformats.org/presentationml/2006/main" xmlns:r="http://schemas.openxmlformats.org/officeDocument/2006/relationships" xmlns:p14="http://schemas.microsoft.com/office/powerpoint/2010/main" xmlns:p15="http://schemas.microsoft.com/office/powerpoint/2012/main" xmlns:mc="http://schemas.openxmlformats.org/markup-compatibility/2006">
+  <p:cSld>
+    <p:spTree>
+      <p:nvGrpSpPr>
+        <p:cNvPr id="1" name=""/>
+        <p:cNvGrpSpPr/>
+        <p:nvPr/>
+      </p:nvGrpSpPr>
+      <p:grpSpPr>
+        <a:xfrm>
+          <a:off x="0" y="0"/>
+          <a:ext cx="0" cy="0"/>
+          <a:chOff x="0" y="0"/>
+          <a:chExt cx="0" cy="0"/>
+        </a:xfrm>
+      </p:grpSpPr>
+      <p:sp>
+        <p:nvSpPr>
+          <p:cNvPr id="430" name="PlaceHolder 1"/>
+          <p:cNvSpPr>
+            <a:spLocks noGrp="1"/>
+          </p:cNvSpPr>
+          <p:nvPr>
+            <p:ph type="sldImg"/>
+          </p:nvPr>
+        </p:nvSpPr>
+        <p:spPr>
+          <a:xfrm>
+            <a:off x="685800" y="1143000"/>
+            <a:ext cx="5486040" cy="3085920"/>
+          </a:xfrm>
+          <a:prstGeom prst="rect">
+            <a:avLst/>
+          </a:prstGeom>
+          <a:ln w="0">
+            <a:noFill/>
+          </a:ln>
+        </p:spPr>
+      </p:sp>
+      <p:sp>
+        <p:nvSpPr>
+          <p:cNvPr id="431" name="PlaceHolder 2"/>
+          <p:cNvSpPr>
+            <a:spLocks noGrp="1"/>
+          </p:cNvSpPr>
+          <p:nvPr>
+            <p:ph type="body"/>
+          </p:nvPr>
+        </p:nvSpPr>
+        <p:spPr>
+          <a:xfrm>
+            <a:off x="685800" y="4400640"/>
+            <a:ext cx="5486040" cy="3600000"/>
+          </a:xfrm>
+          <a:prstGeom prst="rect">
+            <a:avLst/>
+          </a:prstGeom>
+          <a:noFill/>
+          <a:ln w="0">
+            <a:noFill/>
+          </a:ln>
+        </p:spPr>
+        <p:txBody>
+          <a:bodyPr lIns="91440" tIns="45720" rIns="91440" bIns="45720" anchor="t">
+            <a:noAutofit/>
+          </a:bodyPr>
+          <a:p>
+            <a:pPr indent="0" algn="l">
+              <a:lnSpc>
+                <a:spcPct val="100000"/>
+              </a:lnSpc>
+              <a:buNone/>
+            </a:pPr>
+            <a:r>
+              <a:rPr lang="en-US" sz="2000" b="0" u="none" strike="noStrike">
+                <a:solidFill>
+                  <a:srgbClr val="000000"/>
+                </a:solidFill>
+                <a:effectLst/>
+                <a:uFillTx/>
+                <a:latin typeface="Arial"/>
+              </a:rPr>
+              <a:t>This is the slide that makes them look competent in a code review, so do not rush it. Ask first: 'what does @v7 actually point at?' Most will say version 7. It points at whatever the owner last pushed there - and that code runs inside your CI with your secrets. Name tj-actions; it is recent, real, and it is why astral-sh/setup-uv now publishes immutable releases only, so @v9 does not even resolve and you must write @v9.0.0. Almost every tutorial online still teaches the moving-tag form, so they will see the wrong thing everywhere. The secrets banner: the fork rule surprises people and it is a good closing question - why can a fork not read them?</a:t>
+            </a:r>
+            <a:endParaRPr lang="en-IN" sz="2000" b="0" u="none" strike="noStrike">
+              <a:solidFill>
+                <a:srgbClr val="000000"/>
+              </a:solidFill>
+              <a:effectLst/>
+              <a:uFillTx/>
+              <a:latin typeface="Arial"/>
+            </a:endParaRPr>
+          </a:p>
+        </p:txBody>
+      </p:sp>
+      <p:sp>
+        <p:nvSpPr>
+          <p:cNvPr id="432" name="PlaceHolder 3"/>
+          <p:cNvSpPr>
+            <a:spLocks noGrp="1"/>
+          </p:cNvSpPr>
+          <p:nvPr>
+            <p:ph type="sldNum" idx="26"/>
+          </p:nvPr>
+        </p:nvSpPr>
+        <p:spPr>
+          <a:xfrm>
+            <a:off x="3884760" y="8685360"/>
+            <a:ext cx="2971440" cy="458280"/>
+          </a:xfrm>
+          <a:prstGeom prst="rect">
+            <a:avLst/>
+          </a:prstGeom>
+          <a:noFill/>
+          <a:ln w="0">
+            <a:noFill/>
+          </a:ln>
+        </p:spPr>
+        <p:txBody>
+          <a:bodyPr lIns="91440" tIns="45720" rIns="91440" bIns="45720" anchor="b">
+            <a:noAutofit/>
+          </a:bodyPr>
+          <a:lstStyle>
+            <a:lvl1pPr indent="0" algn="r" defTabSz="914400">
+              <a:lnSpc>
+                <a:spcPct val="100000"/>
+              </a:lnSpc>
+              <a:buNone/>
+              <a:defRPr lang="en-US" sz="1200" b="0" u="none" strike="noStrike">
+                <a:solidFill>
+                  <a:schemeClr val="dk1"/>
+                </a:solidFill>
+                <a:effectLst/>
+                <a:uFillTx/>
+                <a:latin typeface="+mn-lt"/>
+                <a:ea typeface="+mn-ea"/>
+              </a:defRPr>
+            </a:lvl1pPr>
+          </a:lstStyle>
+          <a:p>
+            <a:pPr indent="0" algn="r" defTabSz="914400">
+              <a:lnSpc>
+                <a:spcPct val="100000"/>
+              </a:lnSpc>
+              <a:buNone/>
+            </a:pPr>
+            <a:fld id="{7C627FAE-5157-460A-97C6-5AAB328E653D}" type="slidenum">
+              <a:rPr lang="en-US" sz="1200" b="0" u="none" strike="noStrike">
+                <a:solidFill>
+                  <a:schemeClr val="dk1"/>
+                </a:solidFill>
+                <a:effectLst/>
+                <a:uFillTx/>
+                <a:latin typeface="+mn-lt"/>
+                <a:ea typeface="+mn-ea"/>
+              </a:rPr>
+              <a:t>&lt;number&gt;</a:t>
+            </a:fld>
+            <a:endParaRPr lang="en-IN" sz="1200" b="0" u="none" strike="noStrike">
+              <a:solidFill>
+                <a:srgbClr val="000000"/>
+              </a:solidFill>
+              <a:effectLst/>
+              <a:uFillTx/>
+              <a:latin typeface="Times New Roman"/>
+            </a:endParaRPr>
+          </a:p>
+        </p:txBody>
+      </p:sp>
+    </p:spTree>
+  </p:cSld>
+</p:notes>
+</file>
+
+<file path=ppt/notesSlides/notesSlide24.xml><?xml version="1.0" encoding="utf-8"?>
+<p:notes xmlns:a="http://schemas.openxmlformats.org/drawingml/2006/main" xmlns:p="http://schemas.openxmlformats.org/presentationml/2006/main" xmlns:r="http://schemas.openxmlformats.org/officeDocument/2006/relationships" xmlns:p14="http://schemas.microsoft.com/office/powerpoint/2010/main" xmlns:p15="http://schemas.microsoft.com/office/powerpoint/2012/main" xmlns:mc="http://schemas.openxmlformats.org/markup-compatibility/2006">
+  <p:cSld>
+    <p:spTree>
+      <p:nvGrpSpPr>
+        <p:cNvPr id="1" name=""/>
+        <p:cNvGrpSpPr/>
+        <p:nvPr/>
+      </p:nvGrpSpPr>
+      <p:grpSpPr>
+        <a:xfrm>
+          <a:off x="0" y="0"/>
+          <a:ext cx="0" cy="0"/>
+          <a:chOff x="0" y="0"/>
+          <a:chExt cx="0" cy="0"/>
+        </a:xfrm>
+      </p:grpSpPr>
+      <p:sp>
+        <p:nvSpPr>
+          <p:cNvPr id="433" name="PlaceHolder 1"/>
+          <p:cNvSpPr>
+            <a:spLocks noGrp="1"/>
+          </p:cNvSpPr>
+          <p:nvPr>
+            <p:ph type="sldImg"/>
+          </p:nvPr>
+        </p:nvSpPr>
+        <p:spPr>
+          <a:xfrm>
+            <a:off x="685800" y="1143000"/>
+            <a:ext cx="5486040" cy="3085920"/>
+          </a:xfrm>
+          <a:prstGeom prst="rect">
+            <a:avLst/>
+          </a:prstGeom>
+          <a:ln w="0">
+            <a:noFill/>
+          </a:ln>
+        </p:spPr>
+      </p:sp>
+      <p:sp>
+        <p:nvSpPr>
+          <p:cNvPr id="434" name="PlaceHolder 2"/>
+          <p:cNvSpPr>
+            <a:spLocks noGrp="1"/>
+          </p:cNvSpPr>
+          <p:nvPr>
+            <p:ph type="body"/>
+          </p:nvPr>
+        </p:nvSpPr>
+        <p:spPr>
+          <a:xfrm>
+            <a:off x="685800" y="4400640"/>
+            <a:ext cx="5486040" cy="3600000"/>
+          </a:xfrm>
+          <a:prstGeom prst="rect">
+            <a:avLst/>
+          </a:prstGeom>
+          <a:noFill/>
+          <a:ln w="0">
+            <a:noFill/>
+          </a:ln>
+        </p:spPr>
+        <p:txBody>
+          <a:bodyPr lIns="91440" tIns="45720" rIns="91440" bIns="45720" anchor="t">
+            <a:noAutofit/>
+          </a:bodyPr>
+          <a:p>
+            <a:pPr indent="0" algn="l">
+              <a:lnSpc>
+                <a:spcPct val="100000"/>
+              </a:lnSpc>
+              <a:buNone/>
+            </a:pPr>
+            <a:r>
+              <a:rPr lang="en-US" sz="2000" b="0" u="none" strike="noStrike">
+                <a:solidFill>
+                  <a:srgbClr val="000000"/>
+                </a:solidFill>
+                <a:effectLst/>
+                <a:uFillTx/>
+                <a:latin typeface="Arial"/>
+              </a:rPr>
+              <a:t>Deliberately underwhelming, and say so: 'you were probably expecting this to be harder'. Everything they learned in Week 2 still applies - same Depends, same schema, same padlock, same status codes. The only new thing is where the context comes from. This reframes the whole capstone: the AI is the small part, and the boring backend around it is what makes it a product rather than a notebook.</a:t>
+            </a:r>
+            <a:endParaRPr lang="en-IN" sz="2000" b="0" u="none" strike="noStrike">
+              <a:solidFill>
+                <a:srgbClr val="000000"/>
+              </a:solidFill>
+              <a:effectLst/>
+              <a:uFillTx/>
+              <a:latin typeface="Arial"/>
+            </a:endParaRPr>
+          </a:p>
+        </p:txBody>
+      </p:sp>
+      <p:sp>
+        <p:nvSpPr>
+          <p:cNvPr id="435" name="PlaceHolder 3"/>
+          <p:cNvSpPr>
+            <a:spLocks noGrp="1"/>
+          </p:cNvSpPr>
+          <p:nvPr>
+            <p:ph type="sldNum" idx="27"/>
+          </p:nvPr>
+        </p:nvSpPr>
+        <p:spPr>
+          <a:xfrm>
+            <a:off x="3884760" y="8685360"/>
+            <a:ext cx="2971440" cy="458280"/>
+          </a:xfrm>
+          <a:prstGeom prst="rect">
+            <a:avLst/>
+          </a:prstGeom>
+          <a:noFill/>
+          <a:ln w="0">
+            <a:noFill/>
+          </a:ln>
+        </p:spPr>
+        <p:txBody>
+          <a:bodyPr lIns="91440" tIns="45720" rIns="91440" bIns="45720" anchor="b">
+            <a:noAutofit/>
+          </a:bodyPr>
+          <a:lstStyle>
+            <a:lvl1pPr indent="0" algn="r" defTabSz="914400">
+              <a:lnSpc>
+                <a:spcPct val="100000"/>
+              </a:lnSpc>
+              <a:buNone/>
+              <a:defRPr lang="en-US" sz="1200" b="0" u="none" strike="noStrike">
+                <a:solidFill>
+                  <a:schemeClr val="dk1"/>
+                </a:solidFill>
+                <a:effectLst/>
+                <a:uFillTx/>
+                <a:latin typeface="+mn-lt"/>
+                <a:ea typeface="+mn-ea"/>
+              </a:defRPr>
+            </a:lvl1pPr>
+          </a:lstStyle>
+          <a:p>
+            <a:pPr indent="0" algn="r" defTabSz="914400">
+              <a:lnSpc>
+                <a:spcPct val="100000"/>
+              </a:lnSpc>
+              <a:buNone/>
+            </a:pPr>
+            <a:fld id="{DB30AD3A-8A75-419C-BEA0-58402BA2B4BC}" type="slidenum">
+              <a:rPr lang="en-US" sz="1200" b="0" u="none" strike="noStrike">
+                <a:solidFill>
+                  <a:schemeClr val="dk1"/>
+                </a:solidFill>
+                <a:effectLst/>
+                <a:uFillTx/>
+                <a:latin typeface="+mn-lt"/>
+                <a:ea typeface="+mn-ea"/>
+              </a:rPr>
+              <a:t>&lt;number&gt;</a:t>
+            </a:fld>
+            <a:endParaRPr lang="en-IN" sz="1200" b="0" u="none" strike="noStrike">
+              <a:solidFill>
+                <a:srgbClr val="000000"/>
+              </a:solidFill>
+              <a:effectLst/>
+              <a:uFillTx/>
+              <a:latin typeface="Times New Roman"/>
+            </a:endParaRPr>
+          </a:p>
+        </p:txBody>
+      </p:sp>
+    </p:spTree>
+  </p:cSld>
+</p:notes>
+</file>
+
+<file path=ppt/notesSlides/notesSlide25.xml><?xml version="1.0" encoding="utf-8"?>
+<p:notes xmlns:a="http://schemas.openxmlformats.org/drawingml/2006/main" xmlns:p="http://schemas.openxmlformats.org/presentationml/2006/main" xmlns:r="http://schemas.openxmlformats.org/officeDocument/2006/relationships" xmlns:p14="http://schemas.microsoft.com/office/powerpoint/2010/main" xmlns:p15="http://schemas.microsoft.com/office/powerpoint/2012/main" xmlns:mc="http://schemas.openxmlformats.org/markup-compatibility/2006">
+  <p:cSld>
+    <p:spTree>
+      <p:nvGrpSpPr>
+        <p:cNvPr id="1" name=""/>
+        <p:cNvGrpSpPr/>
+        <p:nvPr/>
+      </p:nvGrpSpPr>
+      <p:grpSpPr>
+        <a:xfrm>
+          <a:off x="0" y="0"/>
+          <a:ext cx="0" cy="0"/>
+          <a:chOff x="0" y="0"/>
+          <a:chExt cx="0" cy="0"/>
+        </a:xfrm>
+      </p:grpSpPr>
+      <p:sp>
+        <p:nvSpPr>
+          <p:cNvPr id="436" name="PlaceHolder 1"/>
+          <p:cNvSpPr>
+            <a:spLocks noGrp="1"/>
+          </p:cNvSpPr>
+          <p:nvPr>
+            <p:ph type="sldImg"/>
+          </p:nvPr>
+        </p:nvSpPr>
+        <p:spPr>
+          <a:xfrm>
+            <a:off x="685800" y="1143000"/>
+            <a:ext cx="5486040" cy="3085920"/>
+          </a:xfrm>
+          <a:prstGeom prst="rect">
+            <a:avLst/>
+          </a:prstGeom>
+          <a:ln w="0">
+            <a:noFill/>
+          </a:ln>
+        </p:spPr>
+      </p:sp>
+      <p:sp>
+        <p:nvSpPr>
+          <p:cNvPr id="437" name="PlaceHolder 2"/>
+          <p:cNvSpPr>
+            <a:spLocks noGrp="1"/>
+          </p:cNvSpPr>
+          <p:nvPr>
+            <p:ph type="body"/>
+          </p:nvPr>
+        </p:nvSpPr>
+        <p:spPr>
+          <a:xfrm>
+            <a:off x="685800" y="4400640"/>
+            <a:ext cx="5486040" cy="3600000"/>
+          </a:xfrm>
+          <a:prstGeom prst="rect">
+            <a:avLst/>
+          </a:prstGeom>
+          <a:noFill/>
+          <a:ln w="0">
+            <a:noFill/>
+          </a:ln>
+        </p:spPr>
+        <p:txBody>
+          <a:bodyPr lIns="91440" tIns="45720" rIns="91440" bIns="45720" anchor="t">
+            <a:noAutofit/>
+          </a:bodyPr>
+          <a:p>
+            <a:pPr indent="0" algn="l">
+              <a:lnSpc>
+                <a:spcPct val="100000"/>
+              </a:lnSpc>
+              <a:buNone/>
+            </a:pPr>
+            <a:r>
+              <a:rPr lang="en-US" sz="2000" b="0" u="none" strike="noStrike">
+                <a:solidFill>
+                  <a:srgbClr val="000000"/>
+                </a:solidFill>
+                <a:effectLst/>
+                <a:uFillTx/>
+                <a:latin typeface="Arial"/>
+              </a:rPr>
+              <a:t>Read the list out loud as a checklist - naming what they can now do is what makes two dense sessions feel like progress instead of a blur. Then the capstone brief: they have every piece, and the capstone is those pieces pointed at a problem they care about. Remind them the final test is TAKE-HOME with a closing date, and that DEPLOY.md is the homework that matters most - a public URL is the single most valuable thing they leave this course with.</a:t>
+            </a:r>
+            <a:endParaRPr lang="en-IN" sz="2000" b="0" u="none" strike="noStrike">
+              <a:solidFill>
+                <a:srgbClr val="000000"/>
+              </a:solidFill>
+              <a:effectLst/>
+              <a:uFillTx/>
+              <a:latin typeface="Arial"/>
+            </a:endParaRPr>
+          </a:p>
+        </p:txBody>
+      </p:sp>
+      <p:sp>
+        <p:nvSpPr>
+          <p:cNvPr id="438" name="PlaceHolder 3"/>
+          <p:cNvSpPr>
+            <a:spLocks noGrp="1"/>
+          </p:cNvSpPr>
+          <p:nvPr>
+            <p:ph type="sldNum" idx="28"/>
+          </p:nvPr>
+        </p:nvSpPr>
+        <p:spPr>
+          <a:xfrm>
+            <a:off x="3884760" y="8685360"/>
+            <a:ext cx="2971440" cy="458280"/>
+          </a:xfrm>
+          <a:prstGeom prst="rect">
+            <a:avLst/>
+          </a:prstGeom>
+          <a:noFill/>
+          <a:ln w="0">
+            <a:noFill/>
+          </a:ln>
+        </p:spPr>
+        <p:txBody>
+          <a:bodyPr lIns="91440" tIns="45720" rIns="91440" bIns="45720" anchor="b">
+            <a:noAutofit/>
+          </a:bodyPr>
+          <a:lstStyle>
+            <a:lvl1pPr indent="0" algn="r" defTabSz="914400">
+              <a:lnSpc>
+                <a:spcPct val="100000"/>
+              </a:lnSpc>
+              <a:buNone/>
+              <a:defRPr lang="en-US" sz="1200" b="0" u="none" strike="noStrike">
+                <a:solidFill>
+                  <a:schemeClr val="dk1"/>
+                </a:solidFill>
+                <a:effectLst/>
+                <a:uFillTx/>
+                <a:latin typeface="+mn-lt"/>
+                <a:ea typeface="+mn-ea"/>
+              </a:defRPr>
+            </a:lvl1pPr>
+          </a:lstStyle>
+          <a:p>
+            <a:pPr indent="0" algn="r" defTabSz="914400">
+              <a:lnSpc>
+                <a:spcPct val="100000"/>
+              </a:lnSpc>
+              <a:buNone/>
+            </a:pPr>
+            <a:fld id="{A7228895-E4A9-455C-837D-FF6C34F2DE7D}" type="slidenum">
               <a:rPr lang="en-US" sz="1200" b="0" u="none" strike="noStrike">
                 <a:solidFill>
                   <a:schemeClr val="dk1"/>
@@ -2881,7 +3585,7 @@
       </p:grpSpPr>
       <p:sp>
         <p:nvSpPr>
-          <p:cNvPr id="310" name="PlaceHolder 1"/>
+          <p:cNvPr id="370" name="PlaceHolder 1"/>
           <p:cNvSpPr>
             <a:spLocks noGrp="1"/>
           </p:cNvSpPr>
@@ -2904,7 +3608,7 @@
       </p:sp>
       <p:sp>
         <p:nvSpPr>
-          <p:cNvPr id="311" name="PlaceHolder 2"/>
+          <p:cNvPr id="371" name="PlaceHolder 2"/>
           <p:cNvSpPr>
             <a:spLocks noGrp="1"/>
           </p:cNvSpPr>
@@ -2960,7 +3664,7 @@
       </p:sp>
       <p:sp>
         <p:nvSpPr>
-          <p:cNvPr id="312" name="PlaceHolder 3"/>
+          <p:cNvPr id="372" name="PlaceHolder 3"/>
           <p:cNvSpPr>
             <a:spLocks noGrp="1"/>
           </p:cNvSpPr>
@@ -3009,7 +3713,7 @@
               </a:lnSpc>
               <a:buNone/>
             </a:pPr>
-            <a:fld id="{62854CAF-6F66-4AAF-BEAD-C99947DC5E96}" type="slidenum">
+            <a:fld id="{6412A088-4B97-485C-8720-62DD22E96F3B}" type="slidenum">
               <a:rPr lang="en-US" sz="1200" b="0" u="none" strike="noStrike">
                 <a:solidFill>
                   <a:schemeClr val="dk1"/>
@@ -3056,7 +3760,7 @@
       </p:grpSpPr>
       <p:sp>
         <p:nvSpPr>
-          <p:cNvPr id="313" name="PlaceHolder 1"/>
+          <p:cNvPr id="373" name="PlaceHolder 1"/>
           <p:cNvSpPr>
             <a:spLocks noGrp="1"/>
           </p:cNvSpPr>
@@ -3079,7 +3783,7 @@
       </p:sp>
       <p:sp>
         <p:nvSpPr>
-          <p:cNvPr id="314" name="PlaceHolder 2"/>
+          <p:cNvPr id="374" name="PlaceHolder 2"/>
           <p:cNvSpPr>
             <a:spLocks noGrp="1"/>
           </p:cNvSpPr>
@@ -3135,7 +3839,7 @@
       </p:sp>
       <p:sp>
         <p:nvSpPr>
-          <p:cNvPr id="315" name="PlaceHolder 3"/>
+          <p:cNvPr id="375" name="PlaceHolder 3"/>
           <p:cNvSpPr>
             <a:spLocks noGrp="1"/>
           </p:cNvSpPr>
@@ -3184,7 +3888,7 @@
               </a:lnSpc>
               <a:buNone/>
             </a:pPr>
-            <a:fld id="{49E3AF68-FC3E-4E10-B7ED-E3BE271BE7E9}" type="slidenum">
+            <a:fld id="{68296460-DC5F-426E-AB62-537592921C9B}" type="slidenum">
               <a:rPr lang="en-US" sz="1200" b="0" u="none" strike="noStrike">
                 <a:solidFill>
                   <a:schemeClr val="dk1"/>
@@ -3231,7 +3935,7 @@
       </p:grpSpPr>
       <p:sp>
         <p:nvSpPr>
-          <p:cNvPr id="316" name="PlaceHolder 1"/>
+          <p:cNvPr id="376" name="PlaceHolder 1"/>
           <p:cNvSpPr>
             <a:spLocks noGrp="1"/>
           </p:cNvSpPr>
@@ -3254,7 +3958,7 @@
       </p:sp>
       <p:sp>
         <p:nvSpPr>
-          <p:cNvPr id="317" name="PlaceHolder 2"/>
+          <p:cNvPr id="377" name="PlaceHolder 2"/>
           <p:cNvSpPr>
             <a:spLocks noGrp="1"/>
           </p:cNvSpPr>
@@ -3310,7 +4014,7 @@
       </p:sp>
       <p:sp>
         <p:nvSpPr>
-          <p:cNvPr id="318" name="PlaceHolder 3"/>
+          <p:cNvPr id="378" name="PlaceHolder 3"/>
           <p:cNvSpPr>
             <a:spLocks noGrp="1"/>
           </p:cNvSpPr>
@@ -3359,7 +4063,7 @@
               </a:lnSpc>
               <a:buNone/>
             </a:pPr>
-            <a:fld id="{F035FB00-40F7-4A1C-AF39-119D2499348B}" type="slidenum">
+            <a:fld id="{75ED3A15-3C3A-4A45-B086-A64D9FF9B24B}" type="slidenum">
               <a:rPr lang="en-US" sz="1200" b="0" u="none" strike="noStrike">
                 <a:solidFill>
                   <a:schemeClr val="dk1"/>
@@ -3406,7 +4110,7 @@
       </p:grpSpPr>
       <p:sp>
         <p:nvSpPr>
-          <p:cNvPr id="319" name="PlaceHolder 1"/>
+          <p:cNvPr id="379" name="PlaceHolder 1"/>
           <p:cNvSpPr>
             <a:spLocks noGrp="1"/>
           </p:cNvSpPr>
@@ -3429,7 +4133,7 @@
       </p:sp>
       <p:sp>
         <p:nvSpPr>
-          <p:cNvPr id="320" name="PlaceHolder 2"/>
+          <p:cNvPr id="380" name="PlaceHolder 2"/>
           <p:cNvSpPr>
             <a:spLocks noGrp="1"/>
           </p:cNvSpPr>
@@ -3485,7 +4189,7 @@
       </p:sp>
       <p:sp>
         <p:nvSpPr>
-          <p:cNvPr id="321" name="PlaceHolder 3"/>
+          <p:cNvPr id="381" name="PlaceHolder 3"/>
           <p:cNvSpPr>
             <a:spLocks noGrp="1"/>
           </p:cNvSpPr>
@@ -3534,7 +4238,7 @@
               </a:lnSpc>
               <a:buNone/>
             </a:pPr>
-            <a:fld id="{00AC262D-81E3-413F-AFBF-EF13D9396A64}" type="slidenum">
+            <a:fld id="{3B8BDEEC-A1C1-4C89-A2AF-A1DBFEF057AC}" type="slidenum">
               <a:rPr lang="en-US" sz="1200" b="0" u="none" strike="noStrike">
                 <a:solidFill>
                   <a:schemeClr val="dk1"/>
@@ -3581,7 +4285,7 @@
       </p:grpSpPr>
       <p:sp>
         <p:nvSpPr>
-          <p:cNvPr id="322" name="PlaceHolder 1"/>
+          <p:cNvPr id="382" name="PlaceHolder 1"/>
           <p:cNvSpPr>
             <a:spLocks noGrp="1"/>
           </p:cNvSpPr>
@@ -3604,7 +4308,7 @@
       </p:sp>
       <p:sp>
         <p:nvSpPr>
-          <p:cNvPr id="323" name="PlaceHolder 2"/>
+          <p:cNvPr id="383" name="PlaceHolder 2"/>
           <p:cNvSpPr>
             <a:spLocks noGrp="1"/>
           </p:cNvSpPr>
@@ -3660,7 +4364,7 @@
       </p:sp>
       <p:sp>
         <p:nvSpPr>
-          <p:cNvPr id="324" name="PlaceHolder 3"/>
+          <p:cNvPr id="384" name="PlaceHolder 3"/>
           <p:cNvSpPr>
             <a:spLocks noGrp="1"/>
           </p:cNvSpPr>
@@ -3709,7 +4413,7 @@
               </a:lnSpc>
               <a:buNone/>
             </a:pPr>
-            <a:fld id="{A934009B-1627-4CA2-9E22-50C203DF30EB}" type="slidenum">
+            <a:fld id="{C8BC15D4-C297-4E0A-AE75-2A7249B4FC56}" type="slidenum">
               <a:rPr lang="en-US" sz="1200" b="0" u="none" strike="noStrike">
                 <a:solidFill>
                   <a:schemeClr val="dk1"/>
@@ -3756,7 +4460,7 @@
       </p:grpSpPr>
       <p:sp>
         <p:nvSpPr>
-          <p:cNvPr id="325" name="PlaceHolder 1"/>
+          <p:cNvPr id="385" name="PlaceHolder 1"/>
           <p:cNvSpPr>
             <a:spLocks noGrp="1"/>
           </p:cNvSpPr>
@@ -3779,7 +4483,7 @@
       </p:sp>
       <p:sp>
         <p:nvSpPr>
-          <p:cNvPr id="326" name="PlaceHolder 2"/>
+          <p:cNvPr id="386" name="PlaceHolder 2"/>
           <p:cNvSpPr>
             <a:spLocks noGrp="1"/>
           </p:cNvSpPr>
@@ -3835,7 +4539,7 @@
       </p:sp>
       <p:sp>
         <p:nvSpPr>
-          <p:cNvPr id="327" name="PlaceHolder 3"/>
+          <p:cNvPr id="387" name="PlaceHolder 3"/>
           <p:cNvSpPr>
             <a:spLocks noGrp="1"/>
           </p:cNvSpPr>
@@ -3884,7 +4588,7 @@
               </a:lnSpc>
               <a:buNone/>
             </a:pPr>
-            <a:fld id="{B96964FA-EA73-429F-922F-1C37F2FB4014}" type="slidenum">
+            <a:fld id="{8431F200-15EE-40B4-A9C7-4CAB0C6CFD54}" type="slidenum">
               <a:rPr lang="en-US" sz="1200" b="0" u="none" strike="noStrike">
                 <a:solidFill>
                   <a:schemeClr val="dk1"/>
@@ -3931,7 +4635,7 @@
       </p:grpSpPr>
       <p:sp>
         <p:nvSpPr>
-          <p:cNvPr id="328" name="PlaceHolder 1"/>
+          <p:cNvPr id="388" name="PlaceHolder 1"/>
           <p:cNvSpPr>
             <a:spLocks noGrp="1"/>
           </p:cNvSpPr>
@@ -3954,7 +4658,7 @@
       </p:sp>
       <p:sp>
         <p:nvSpPr>
-          <p:cNvPr id="329" name="PlaceHolder 2"/>
+          <p:cNvPr id="389" name="PlaceHolder 2"/>
           <p:cNvSpPr>
             <a:spLocks noGrp="1"/>
           </p:cNvSpPr>
@@ -4010,7 +4714,7 @@
       </p:sp>
       <p:sp>
         <p:nvSpPr>
-          <p:cNvPr id="330" name="PlaceHolder 3"/>
+          <p:cNvPr id="390" name="PlaceHolder 3"/>
           <p:cNvSpPr>
             <a:spLocks noGrp="1"/>
           </p:cNvSpPr>
@@ -4059,7 +4763,7 @@
               </a:lnSpc>
               <a:buNone/>
             </a:pPr>
-            <a:fld id="{561871BD-0FC9-422F-BFEA-50529DD9C5DA}" type="slidenum">
+            <a:fld id="{1BB052E6-C73E-4B6B-8C69-460E7C41B5EE}" type="slidenum">
               <a:rPr lang="en-US" sz="1200" b="0" u="none" strike="noStrike">
                 <a:solidFill>
                   <a:schemeClr val="dk1"/>
@@ -13867,6 +14571,13 @@
 <file path=ppt/slides/slide20.xml><?xml version="1.0" encoding="utf-8"?>
 <p:sld xmlns:a="http://schemas.openxmlformats.org/drawingml/2006/main" xmlns:p="http://schemas.openxmlformats.org/presentationml/2006/main" xmlns:r="http://schemas.openxmlformats.org/officeDocument/2006/relationships" xmlns:p14="http://schemas.microsoft.com/office/powerpoint/2010/main" xmlns:p15="http://schemas.microsoft.com/office/powerpoint/2012/main" xmlns:mc="http://schemas.openxmlformats.org/markup-compatibility/2006">
   <p:cSld>
+    <p:bg>
+      <p:bgPr>
+        <a:solidFill>
+          <a:srgbClr val="EEF0FF"/>
+        </a:solidFill>
+      </p:bgPr>
+    </p:bg>
     <p:spTree>
       <p:nvGrpSpPr>
         <p:cNvPr id="1" name=""/>
@@ -13889,8 +14600,8 @@
         </p:nvSpPr>
         <p:spPr>
           <a:xfrm>
-            <a:off x="548640" y="457200"/>
-            <a:ext cx="11091240" cy="731160"/>
+            <a:off x="548640" y="1828800"/>
+            <a:ext cx="3657240" cy="1737000"/>
           </a:xfrm>
           <a:prstGeom prst="rect">
             <a:avLst/>
@@ -13920,1000 +14631,79 @@
               </a:tabLst>
             </a:pPr>
             <a:r>
-              <a:rPr lang="en-US" sz="3000" b="1" u="none" strike="noStrike">
-                <a:solidFill>
-                  <a:srgbClr val="1E293B"/>
+              <a:rPr lang="en-US" sz="9600" b="1" u="none" strike="noStrike">
+                <a:solidFill>
+                  <a:srgbClr val="6366F1"/>
                 </a:solidFill>
                 <a:effectLst/>
                 <a:uFillTx/>
                 <a:latin typeface="Calibri"/>
                 <a:ea typeface="Calibri"/>
               </a:rPr>
-              <a:t>Week 1 meets Week 2, and it is an anticlimax</a:t>
-            </a:r>
-            <a:endParaRPr lang="en-IN" sz="3000" b="0" u="none" strike="noStrike">
-              <a:solidFill>
-                <a:srgbClr val="000000"/>
-              </a:solidFill>
-              <a:effectLst/>
-              <a:uFillTx/>
-              <a:latin typeface="Arial"/>
-            </a:endParaRPr>
-          </a:p>
-        </p:txBody>
-      </p:sp>
-      <p:sp>
-        <p:nvSpPr>
-          <p:cNvPr id="267" name="Shape 1"/>
-          <p:cNvSpPr/>
-          <p:nvPr/>
-        </p:nvSpPr>
-        <p:spPr>
-          <a:xfrm>
-            <a:off x="548640" y="1554480"/>
-            <a:ext cx="11091240" cy="1737000"/>
-          </a:xfrm>
-          <a:prstGeom prst="roundRect">
-            <a:avLst>
-              <a:gd name="adj" fmla="val 3158"/>
-            </a:avLst>
-          </a:prstGeom>
-          <a:solidFill>
-            <a:srgbClr val="F3F4F6"/>
-          </a:solidFill>
-          <a:ln w="12700">
-            <a:solidFill>
-              <a:srgbClr val="E2E8F0"/>
-            </a:solidFill>
-            <a:round/>
-          </a:ln>
-        </p:spPr>
-        <p:style>
-          <a:lnRef idx="0"/>
-          <a:fillRef idx="0"/>
-          <a:effectRef idx="0"/>
-          <a:fontRef idx="minor"/>
-        </p:style>
-        <p:txBody>
-          <a:bodyPr lIns="90000" tIns="45000" rIns="90000" bIns="45000" anchor="t">
-            <a:noAutofit/>
-          </a:bodyPr>
-          <a:p>
-            <a:endParaRPr lang="en-IN" sz="1800" b="0" u="none" strike="noStrike">
-              <a:solidFill>
-                <a:srgbClr val="000000"/>
-              </a:solidFill>
-              <a:effectLst/>
-              <a:uFillTx/>
-              <a:latin typeface="Arial"/>
-            </a:endParaRPr>
-          </a:p>
-        </p:txBody>
-      </p:sp>
-      <p:sp>
-        <p:nvSpPr>
-          <p:cNvPr id="268" name="Text 2"/>
-          <p:cNvSpPr/>
-          <p:nvPr/>
-        </p:nvSpPr>
-        <p:spPr>
-          <a:xfrm>
-            <a:off x="804600" y="1737360"/>
-            <a:ext cx="10579320" cy="1371240"/>
-          </a:xfrm>
-          <a:prstGeom prst="rect">
-            <a:avLst/>
-          </a:prstGeom>
-          <a:noFill/>
-          <a:ln w="0">
-            <a:noFill/>
-          </a:ln>
-        </p:spPr>
-        <p:style>
-          <a:lnRef idx="0"/>
-          <a:fillRef idx="0"/>
-          <a:effectRef idx="0"/>
-          <a:fontRef idx="minor"/>
-        </p:style>
-        <p:txBody>
-          <a:bodyPr lIns="0" tIns="0" rIns="0" bIns="0" anchor="t">
+              <a:t>13</a:t>
+            </a:r>
+            <a:endParaRPr lang="en-IN" sz="9600" b="0" u="none" strike="noStrike">
+              <a:solidFill>
+                <a:srgbClr val="000000"/>
+              </a:solidFill>
+              <a:effectLst/>
+              <a:uFillTx/>
+              <a:latin typeface="Arial"/>
+            </a:endParaRPr>
+          </a:p>
+        </p:txBody>
+      </p:sp>
+      <p:sp>
+        <p:nvSpPr>
+          <p:cNvPr id="267" name="Text 1"/>
+          <p:cNvSpPr/>
+          <p:nvPr/>
+        </p:nvSpPr>
+        <p:spPr>
+          <a:xfrm>
+            <a:off x="603360" y="3657600"/>
+            <a:ext cx="10606680" cy="914040"/>
+          </a:xfrm>
+          <a:prstGeom prst="rect">
+            <a:avLst/>
+          </a:prstGeom>
+          <a:noFill/>
+          <a:ln w="0">
+            <a:noFill/>
+          </a:ln>
+        </p:spPr>
+        <p:style>
+          <a:lnRef idx="0"/>
+          <a:fillRef idx="0"/>
+          <a:effectRef idx="0"/>
+          <a:fontRef idx="minor"/>
+        </p:style>
+        <p:txBody>
+          <a:bodyPr lIns="0" tIns="0" rIns="0" bIns="0" anchor="ctr">
             <a:noAutofit/>
           </a:bodyPr>
           <a:p>
             <a:pPr defTabSz="914400">
               <a:lnSpc>
-                <a:spcPct val="115000"/>
-              </a:lnSpc>
-              <a:tabLst>
-                <a:tab pos="0" algn="l"/>
-              </a:tabLst>
-            </a:pPr>
-            <a:r>
-              <a:rPr lang="en-US" sz="1150" b="0" u="none" strike="noStrike">
+                <a:spcPct val="100000"/>
+              </a:lnSpc>
+              <a:tabLst>
+                <a:tab pos="0" algn="l"/>
+              </a:tabLst>
+            </a:pPr>
+            <a:r>
+              <a:rPr lang="en-US" sz="3400" b="1" u="none" strike="noStrike">
                 <a:solidFill>
                   <a:srgbClr val="1E293B"/>
-                </a:solidFill>
-                <a:effectLst/>
-                <a:uFillTx/>
-                <a:latin typeface="Courier New"/>
-                <a:ea typeface="Courier New"/>
-              </a:rPr>
-              <a:t>@router.post("/ask")</a:t>
-            </a:r>
-            <a:endParaRPr lang="en-IN" sz="1150" b="0" u="none" strike="noStrike">
-              <a:solidFill>
-                <a:srgbClr val="000000"/>
-              </a:solidFill>
-              <a:effectLst/>
-              <a:uFillTx/>
-              <a:latin typeface="Arial"/>
-            </a:endParaRPr>
-          </a:p>
-          <a:p>
-            <a:pPr defTabSz="914400">
-              <a:lnSpc>
-                <a:spcPct val="115000"/>
-              </a:lnSpc>
-              <a:tabLst>
-                <a:tab pos="0" algn="l"/>
-              </a:tabLst>
-            </a:pPr>
-            <a:r>
-              <a:rPr lang="en-US" sz="1150" b="0" u="none" strike="noStrike">
-                <a:solidFill>
-                  <a:srgbClr val="1E293B"/>
-                </a:solidFill>
-                <a:effectLst/>
-                <a:uFillTx/>
-                <a:latin typeface="Courier New"/>
-                <a:ea typeface="Courier New"/>
-              </a:rPr>
-              <a:t>def ask(incoming: AskIn, db: Session = Depends(get_db),</a:t>
-            </a:r>
-            <a:endParaRPr lang="en-IN" sz="1150" b="0" u="none" strike="noStrike">
-              <a:solidFill>
-                <a:srgbClr val="000000"/>
-              </a:solidFill>
-              <a:effectLst/>
-              <a:uFillTx/>
-              <a:latin typeface="Arial"/>
-            </a:endParaRPr>
-          </a:p>
-          <a:p>
-            <a:pPr defTabSz="914400">
-              <a:lnSpc>
-                <a:spcPct val="115000"/>
-              </a:lnSpc>
-              <a:tabLst>
-                <a:tab pos="0" algn="l"/>
-              </a:tabLst>
-            </a:pPr>
-            <a:r>
-              <a:rPr lang="en-US" sz="1150" b="0" u="none" strike="noStrike">
-                <a:solidFill>
-                  <a:srgbClr val="1E293B"/>
-                </a:solidFill>
-                <a:effectLst/>
-                <a:uFillTx/>
-                <a:latin typeface="Courier New"/>
-                <a:ea typeface="Courier New"/>
-              </a:rPr>
-              <a:t>        user: User = Depends(get_current_user)):        # the SAME padlock</a:t>
-            </a:r>
-            <a:endParaRPr lang="en-IN" sz="1150" b="0" u="none" strike="noStrike">
-              <a:solidFill>
-                <a:srgbClr val="000000"/>
-              </a:solidFill>
-              <a:effectLst/>
-              <a:uFillTx/>
-              <a:latin typeface="Arial"/>
-            </a:endParaRPr>
-          </a:p>
-          <a:p>
-            <a:pPr defTabSz="914400">
-              <a:lnSpc>
-                <a:spcPct val="115000"/>
-              </a:lnSpc>
-              <a:tabLst>
-                <a:tab pos="0" algn="l"/>
-              </a:tabLst>
-            </a:pPr>
-            <a:r>
-              <a:rPr lang="en-US" sz="1150" b="0" u="none" strike="noStrike">
-                <a:solidFill>
-                  <a:srgbClr val="1E293B"/>
-                </a:solidFill>
-                <a:effectLst/>
-                <a:uFillTx/>
-                <a:latin typeface="Courier New"/>
-                <a:ea typeface="Courier New"/>
-              </a:rPr>
-              <a:t>    context = "\n".join(f"- {c.code}: {c.title}" for c in db.scalars(select(Course)).all())</a:t>
-            </a:r>
-            <a:endParaRPr lang="en-IN" sz="1150" b="0" u="none" strike="noStrike">
-              <a:solidFill>
-                <a:srgbClr val="000000"/>
-              </a:solidFill>
-              <a:effectLst/>
-              <a:uFillTx/>
-              <a:latin typeface="Arial"/>
-            </a:endParaRPr>
-          </a:p>
-          <a:p>
-            <a:pPr defTabSz="914400">
-              <a:lnSpc>
-                <a:spcPct val="115000"/>
-              </a:lnSpc>
-              <a:tabLst>
-                <a:tab pos="0" algn="l"/>
-              </a:tabLst>
-            </a:pPr>
-            <a:r>
-              <a:rPr lang="en-US" sz="1150" b="0" u="none" strike="noStrike">
-                <a:solidFill>
-                  <a:srgbClr val="1E293B"/>
-                </a:solidFill>
-                <a:effectLst/>
-                <a:uFillTx/>
-                <a:latin typeface="Courier New"/>
-                <a:ea typeface="Courier New"/>
-              </a:rPr>
-              <a:t>    prompt = f"Answer using ONLY this list.\n\n{context}\n\nQuestion: {incoming.question}"</a:t>
-            </a:r>
-            <a:endParaRPr lang="en-IN" sz="1150" b="0" u="none" strike="noStrike">
-              <a:solidFill>
-                <a:srgbClr val="000000"/>
-              </a:solidFill>
-              <a:effectLst/>
-              <a:uFillTx/>
-              <a:latin typeface="Arial"/>
-            </a:endParaRPr>
-          </a:p>
-        </p:txBody>
-      </p:sp>
-      <p:sp>
-        <p:nvSpPr>
-          <p:cNvPr id="269" name="Shape 3"/>
-          <p:cNvSpPr/>
-          <p:nvPr/>
-        </p:nvSpPr>
-        <p:spPr>
-          <a:xfrm>
-            <a:off x="548640" y="3474720"/>
-            <a:ext cx="11091240" cy="529920"/>
-          </a:xfrm>
-          <a:prstGeom prst="roundRect">
-            <a:avLst>
-              <a:gd name="adj" fmla="val 17241"/>
-            </a:avLst>
-          </a:prstGeom>
-          <a:solidFill>
-            <a:srgbClr val="F8FAFC"/>
-          </a:solidFill>
-          <a:ln w="12700">
-            <a:solidFill>
-              <a:srgbClr val="E2E8F0"/>
-            </a:solidFill>
-            <a:round/>
-          </a:ln>
-        </p:spPr>
-        <p:style>
-          <a:lnRef idx="0"/>
-          <a:fillRef idx="0"/>
-          <a:effectRef idx="0"/>
-          <a:fontRef idx="minor"/>
-        </p:style>
-        <p:txBody>
-          <a:bodyPr lIns="90000" tIns="45000" rIns="90000" bIns="45000" anchor="t">
-            <a:noAutofit/>
-          </a:bodyPr>
-          <a:p>
-            <a:endParaRPr lang="en-IN" sz="1800" b="0" u="none" strike="noStrike">
-              <a:solidFill>
-                <a:srgbClr val="000000"/>
-              </a:solidFill>
-              <a:effectLst/>
-              <a:uFillTx/>
-              <a:latin typeface="Arial"/>
-            </a:endParaRPr>
-          </a:p>
-        </p:txBody>
-      </p:sp>
-      <p:sp>
-        <p:nvSpPr>
-          <p:cNvPr id="270" name="Text 4"/>
-          <p:cNvSpPr/>
-          <p:nvPr/>
-        </p:nvSpPr>
-        <p:spPr>
-          <a:xfrm>
-            <a:off x="822960" y="3474720"/>
-            <a:ext cx="1645560" cy="529920"/>
-          </a:xfrm>
-          <a:prstGeom prst="rect">
-            <a:avLst/>
-          </a:prstGeom>
-          <a:noFill/>
-          <a:ln w="0">
-            <a:noFill/>
-          </a:ln>
-        </p:spPr>
-        <p:style>
-          <a:lnRef idx="0"/>
-          <a:fillRef idx="0"/>
-          <a:effectRef idx="0"/>
-          <a:fontRef idx="minor"/>
-        </p:style>
-        <p:txBody>
-          <a:bodyPr lIns="0" tIns="0" rIns="0" bIns="0" anchor="ctr">
-            <a:noAutofit/>
-          </a:bodyPr>
-          <a:p>
-            <a:pPr defTabSz="914400">
-              <a:lnSpc>
-                <a:spcPct val="100000"/>
-              </a:lnSpc>
-              <a:tabLst>
-                <a:tab pos="0" algn="l"/>
-              </a:tabLst>
-            </a:pPr>
-            <a:r>
-              <a:rPr lang="en-US" sz="1500" b="1" u="none" strike="noStrike">
-                <a:solidFill>
-                  <a:srgbClr val="6366F1"/>
                 </a:solidFill>
                 <a:effectLst/>
                 <a:uFillTx/>
                 <a:latin typeface="Calibri"/>
                 <a:ea typeface="Calibri"/>
               </a:rPr>
-              <a:t>Retrieve</a:t>
-            </a:r>
-            <a:endParaRPr lang="en-IN" sz="1500" b="0" u="none" strike="noStrike">
-              <a:solidFill>
-                <a:srgbClr val="000000"/>
-              </a:solidFill>
-              <a:effectLst/>
-              <a:uFillTx/>
-              <a:latin typeface="Arial"/>
-            </a:endParaRPr>
-          </a:p>
-        </p:txBody>
-      </p:sp>
-      <p:sp>
-        <p:nvSpPr>
-          <p:cNvPr id="271" name="Text 5"/>
-          <p:cNvSpPr/>
-          <p:nvPr/>
-        </p:nvSpPr>
-        <p:spPr>
-          <a:xfrm>
-            <a:off x="2560320" y="3474720"/>
-            <a:ext cx="8869320" cy="529920"/>
-          </a:xfrm>
-          <a:prstGeom prst="rect">
-            <a:avLst/>
-          </a:prstGeom>
-          <a:noFill/>
-          <a:ln w="0">
-            <a:noFill/>
-          </a:ln>
-        </p:spPr>
-        <p:style>
-          <a:lnRef idx="0"/>
-          <a:fillRef idx="0"/>
-          <a:effectRef idx="0"/>
-          <a:fontRef idx="minor"/>
-        </p:style>
-        <p:txBody>
-          <a:bodyPr lIns="0" tIns="0" rIns="0" bIns="0" anchor="ctr">
-            <a:noAutofit/>
-          </a:bodyPr>
-          <a:p>
-            <a:pPr defTabSz="914400">
-              <a:lnSpc>
-                <a:spcPct val="100000"/>
-              </a:lnSpc>
-              <a:tabLst>
-                <a:tab pos="0" algn="l"/>
-              </a:tabLst>
-            </a:pPr>
-            <a:r>
-              <a:rPr lang="en-US" sz="1350" b="0" u="none" strike="noStrike">
-                <a:solidFill>
-                  <a:srgbClr val="1E293B"/>
-                </a:solidFill>
-                <a:effectLst/>
-                <a:uFillTx/>
-                <a:latin typeface="Calibri"/>
-                <a:ea typeface="Calibri"/>
-              </a:rPr>
-              <a:t>from your own database, instead of a vector store</a:t>
-            </a:r>
-            <a:endParaRPr lang="en-IN" sz="1350" b="0" u="none" strike="noStrike">
-              <a:solidFill>
-                <a:srgbClr val="000000"/>
-              </a:solidFill>
-              <a:effectLst/>
-              <a:uFillTx/>
-              <a:latin typeface="Arial"/>
-            </a:endParaRPr>
-          </a:p>
-        </p:txBody>
-      </p:sp>
-      <p:sp>
-        <p:nvSpPr>
-          <p:cNvPr id="272" name="Shape 6"/>
-          <p:cNvSpPr/>
-          <p:nvPr/>
-        </p:nvSpPr>
-        <p:spPr>
-          <a:xfrm>
-            <a:off x="548640" y="4078080"/>
-            <a:ext cx="11091240" cy="529920"/>
-          </a:xfrm>
-          <a:prstGeom prst="roundRect">
-            <a:avLst>
-              <a:gd name="adj" fmla="val 17241"/>
-            </a:avLst>
-          </a:prstGeom>
-          <a:solidFill>
-            <a:srgbClr val="F8FAFC"/>
-          </a:solidFill>
-          <a:ln w="12700">
-            <a:solidFill>
-              <a:srgbClr val="E2E8F0"/>
-            </a:solidFill>
-            <a:round/>
-          </a:ln>
-        </p:spPr>
-        <p:style>
-          <a:lnRef idx="0"/>
-          <a:fillRef idx="0"/>
-          <a:effectRef idx="0"/>
-          <a:fontRef idx="minor"/>
-        </p:style>
-        <p:txBody>
-          <a:bodyPr lIns="90000" tIns="45000" rIns="90000" bIns="45000" anchor="t">
-            <a:noAutofit/>
-          </a:bodyPr>
-          <a:p>
-            <a:endParaRPr lang="en-IN" sz="1800" b="0" u="none" strike="noStrike">
-              <a:solidFill>
-                <a:srgbClr val="000000"/>
-              </a:solidFill>
-              <a:effectLst/>
-              <a:uFillTx/>
-              <a:latin typeface="Arial"/>
-            </a:endParaRPr>
-          </a:p>
-        </p:txBody>
-      </p:sp>
-      <p:sp>
-        <p:nvSpPr>
-          <p:cNvPr id="273" name="Text 7"/>
-          <p:cNvSpPr/>
-          <p:nvPr/>
-        </p:nvSpPr>
-        <p:spPr>
-          <a:xfrm>
-            <a:off x="822960" y="4078080"/>
-            <a:ext cx="1645560" cy="529920"/>
-          </a:xfrm>
-          <a:prstGeom prst="rect">
-            <a:avLst/>
-          </a:prstGeom>
-          <a:noFill/>
-          <a:ln w="0">
-            <a:noFill/>
-          </a:ln>
-        </p:spPr>
-        <p:style>
-          <a:lnRef idx="0"/>
-          <a:fillRef idx="0"/>
-          <a:effectRef idx="0"/>
-          <a:fontRef idx="minor"/>
-        </p:style>
-        <p:txBody>
-          <a:bodyPr lIns="0" tIns="0" rIns="0" bIns="0" anchor="ctr">
-            <a:noAutofit/>
-          </a:bodyPr>
-          <a:p>
-            <a:pPr defTabSz="914400">
-              <a:lnSpc>
-                <a:spcPct val="100000"/>
-              </a:lnSpc>
-              <a:tabLst>
-                <a:tab pos="0" algn="l"/>
-              </a:tabLst>
-            </a:pPr>
-            <a:r>
-              <a:rPr lang="en-US" sz="1500" b="1" u="none" strike="noStrike">
-                <a:solidFill>
-                  <a:srgbClr val="0891B2"/>
-                </a:solidFill>
-                <a:effectLst/>
-                <a:uFillTx/>
-                <a:latin typeface="Calibri"/>
-                <a:ea typeface="Calibri"/>
-              </a:rPr>
-              <a:t>Augment</a:t>
-            </a:r>
-            <a:endParaRPr lang="en-IN" sz="1500" b="0" u="none" strike="noStrike">
-              <a:solidFill>
-                <a:srgbClr val="000000"/>
-              </a:solidFill>
-              <a:effectLst/>
-              <a:uFillTx/>
-              <a:latin typeface="Arial"/>
-            </a:endParaRPr>
-          </a:p>
-        </p:txBody>
-      </p:sp>
-      <p:sp>
-        <p:nvSpPr>
-          <p:cNvPr id="274" name="Text 8"/>
-          <p:cNvSpPr/>
-          <p:nvPr/>
-        </p:nvSpPr>
-        <p:spPr>
-          <a:xfrm>
-            <a:off x="2560320" y="4078080"/>
-            <a:ext cx="8869320" cy="529920"/>
-          </a:xfrm>
-          <a:prstGeom prst="rect">
-            <a:avLst/>
-          </a:prstGeom>
-          <a:noFill/>
-          <a:ln w="0">
-            <a:noFill/>
-          </a:ln>
-        </p:spPr>
-        <p:style>
-          <a:lnRef idx="0"/>
-          <a:fillRef idx="0"/>
-          <a:effectRef idx="0"/>
-          <a:fontRef idx="minor"/>
-        </p:style>
-        <p:txBody>
-          <a:bodyPr lIns="0" tIns="0" rIns="0" bIns="0" anchor="ctr">
-            <a:noAutofit/>
-          </a:bodyPr>
-          <a:p>
-            <a:pPr defTabSz="914400">
-              <a:lnSpc>
-                <a:spcPct val="100000"/>
-              </a:lnSpc>
-              <a:tabLst>
-                <a:tab pos="0" algn="l"/>
-              </a:tabLst>
-            </a:pPr>
-            <a:r>
-              <a:rPr lang="en-US" sz="1350" b="0" u="none" strike="noStrike">
-                <a:solidFill>
-                  <a:srgbClr val="1E293B"/>
-                </a:solidFill>
-                <a:effectLst/>
-                <a:uFillTx/>
-                <a:latin typeface="Calibri"/>
-                <a:ea typeface="Calibri"/>
-              </a:rPr>
-              <a:t>the context goes into the prompt</a:t>
-            </a:r>
-            <a:endParaRPr lang="en-IN" sz="1350" b="0" u="none" strike="noStrike">
-              <a:solidFill>
-                <a:srgbClr val="000000"/>
-              </a:solidFill>
-              <a:effectLst/>
-              <a:uFillTx/>
-              <a:latin typeface="Arial"/>
-            </a:endParaRPr>
-          </a:p>
-        </p:txBody>
-      </p:sp>
-      <p:sp>
-        <p:nvSpPr>
-          <p:cNvPr id="275" name="Shape 9"/>
-          <p:cNvSpPr/>
-          <p:nvPr/>
-        </p:nvSpPr>
-        <p:spPr>
-          <a:xfrm>
-            <a:off x="548640" y="4681800"/>
-            <a:ext cx="11091240" cy="529920"/>
-          </a:xfrm>
-          <a:prstGeom prst="roundRect">
-            <a:avLst>
-              <a:gd name="adj" fmla="val 17241"/>
-            </a:avLst>
-          </a:prstGeom>
-          <a:solidFill>
-            <a:srgbClr val="F8FAFC"/>
-          </a:solidFill>
-          <a:ln w="12700">
-            <a:solidFill>
-              <a:srgbClr val="E2E8F0"/>
-            </a:solidFill>
-            <a:round/>
-          </a:ln>
-        </p:spPr>
-        <p:style>
-          <a:lnRef idx="0"/>
-          <a:fillRef idx="0"/>
-          <a:effectRef idx="0"/>
-          <a:fontRef idx="minor"/>
-        </p:style>
-        <p:txBody>
-          <a:bodyPr lIns="90000" tIns="45000" rIns="90000" bIns="45000" anchor="t">
-            <a:noAutofit/>
-          </a:bodyPr>
-          <a:p>
-            <a:endParaRPr lang="en-IN" sz="1800" b="0" u="none" strike="noStrike">
-              <a:solidFill>
-                <a:srgbClr val="000000"/>
-              </a:solidFill>
-              <a:effectLst/>
-              <a:uFillTx/>
-              <a:latin typeface="Arial"/>
-            </a:endParaRPr>
-          </a:p>
-        </p:txBody>
-      </p:sp>
-      <p:sp>
-        <p:nvSpPr>
-          <p:cNvPr id="276" name="Text 10"/>
-          <p:cNvSpPr/>
-          <p:nvPr/>
-        </p:nvSpPr>
-        <p:spPr>
-          <a:xfrm>
-            <a:off x="822960" y="4681800"/>
-            <a:ext cx="1645560" cy="529920"/>
-          </a:xfrm>
-          <a:prstGeom prst="rect">
-            <a:avLst/>
-          </a:prstGeom>
-          <a:noFill/>
-          <a:ln w="0">
-            <a:noFill/>
-          </a:ln>
-        </p:spPr>
-        <p:style>
-          <a:lnRef idx="0"/>
-          <a:fillRef idx="0"/>
-          <a:effectRef idx="0"/>
-          <a:fontRef idx="minor"/>
-        </p:style>
-        <p:txBody>
-          <a:bodyPr lIns="0" tIns="0" rIns="0" bIns="0" anchor="ctr">
-            <a:noAutofit/>
-          </a:bodyPr>
-          <a:p>
-            <a:pPr defTabSz="914400">
-              <a:lnSpc>
-                <a:spcPct val="100000"/>
-              </a:lnSpc>
-              <a:tabLst>
-                <a:tab pos="0" algn="l"/>
-              </a:tabLst>
-            </a:pPr>
-            <a:r>
-              <a:rPr lang="en-US" sz="1500" b="1" u="none" strike="noStrike">
-                <a:solidFill>
-                  <a:srgbClr val="15803D"/>
-                </a:solidFill>
-                <a:effectLst/>
-                <a:uFillTx/>
-                <a:latin typeface="Calibri"/>
-                <a:ea typeface="Calibri"/>
-              </a:rPr>
-              <a:t>Generate</a:t>
-            </a:r>
-            <a:endParaRPr lang="en-IN" sz="1500" b="0" u="none" strike="noStrike">
-              <a:solidFill>
-                <a:srgbClr val="000000"/>
-              </a:solidFill>
-              <a:effectLst/>
-              <a:uFillTx/>
-              <a:latin typeface="Arial"/>
-            </a:endParaRPr>
-          </a:p>
-        </p:txBody>
-      </p:sp>
-      <p:sp>
-        <p:nvSpPr>
-          <p:cNvPr id="277" name="Text 11"/>
-          <p:cNvSpPr/>
-          <p:nvPr/>
-        </p:nvSpPr>
-        <p:spPr>
-          <a:xfrm>
-            <a:off x="2560320" y="4681800"/>
-            <a:ext cx="8869320" cy="529920"/>
-          </a:xfrm>
-          <a:prstGeom prst="rect">
-            <a:avLst/>
-          </a:prstGeom>
-          <a:noFill/>
-          <a:ln w="0">
-            <a:noFill/>
-          </a:ln>
-        </p:spPr>
-        <p:style>
-          <a:lnRef idx="0"/>
-          <a:fillRef idx="0"/>
-          <a:effectRef idx="0"/>
-          <a:fontRef idx="minor"/>
-        </p:style>
-        <p:txBody>
-          <a:bodyPr lIns="0" tIns="0" rIns="0" bIns="0" anchor="ctr">
-            <a:noAutofit/>
-          </a:bodyPr>
-          <a:p>
-            <a:pPr defTabSz="914400">
-              <a:lnSpc>
-                <a:spcPct val="100000"/>
-              </a:lnSpc>
-              <a:tabLst>
-                <a:tab pos="0" algn="l"/>
-              </a:tabLst>
-            </a:pPr>
-            <a:r>
-              <a:rPr lang="en-US" sz="1350" b="0" u="none" strike="noStrike">
-                <a:solidFill>
-                  <a:srgbClr val="1E293B"/>
-                </a:solidFill>
-                <a:effectLst/>
-                <a:uFillTx/>
-                <a:latin typeface="Calibri"/>
-                <a:ea typeface="Calibri"/>
-              </a:rPr>
-              <a:t>and the model answers from YOUR data, not its memory</a:t>
-            </a:r>
-            <a:endParaRPr lang="en-IN" sz="1350" b="0" u="none" strike="noStrike">
-              <a:solidFill>
-                <a:srgbClr val="000000"/>
-              </a:solidFill>
-              <a:effectLst/>
-              <a:uFillTx/>
-              <a:latin typeface="Arial"/>
-            </a:endParaRPr>
-          </a:p>
-        </p:txBody>
-      </p:sp>
-      <p:sp>
-        <p:nvSpPr>
-          <p:cNvPr id="278" name="Shape 12"/>
-          <p:cNvSpPr/>
-          <p:nvPr/>
-        </p:nvSpPr>
-        <p:spPr>
-          <a:xfrm>
-            <a:off x="548640" y="5394960"/>
-            <a:ext cx="11091240" cy="731160"/>
-          </a:xfrm>
-          <a:prstGeom prst="roundRect">
-            <a:avLst>
-              <a:gd name="adj" fmla="val 12500"/>
-            </a:avLst>
-          </a:prstGeom>
-          <a:solidFill>
-            <a:srgbClr val="EEF0FF"/>
-          </a:solidFill>
-          <a:ln w="12700">
-            <a:solidFill>
-              <a:srgbClr val="6366F1"/>
-            </a:solidFill>
-            <a:round/>
-          </a:ln>
-        </p:spPr>
-        <p:style>
-          <a:lnRef idx="0"/>
-          <a:fillRef idx="0"/>
-          <a:effectRef idx="0"/>
-          <a:fontRef idx="minor"/>
-        </p:style>
-        <p:txBody>
-          <a:bodyPr lIns="90000" tIns="45000" rIns="90000" bIns="45000" anchor="t">
-            <a:noAutofit/>
-          </a:bodyPr>
-          <a:p>
-            <a:endParaRPr lang="en-IN" sz="1800" b="0" u="none" strike="noStrike">
-              <a:solidFill>
-                <a:srgbClr val="000000"/>
-              </a:solidFill>
-              <a:effectLst/>
-              <a:uFillTx/>
-              <a:latin typeface="Arial"/>
-            </a:endParaRPr>
-          </a:p>
-        </p:txBody>
-      </p:sp>
-      <p:sp>
-        <p:nvSpPr>
-          <p:cNvPr id="279" name="Text 13"/>
-          <p:cNvSpPr/>
-          <p:nvPr/>
-        </p:nvSpPr>
-        <p:spPr>
-          <a:xfrm>
-            <a:off x="868680" y="5394960"/>
-            <a:ext cx="10423800" cy="731160"/>
-          </a:xfrm>
-          <a:prstGeom prst="rect">
-            <a:avLst/>
-          </a:prstGeom>
-          <a:noFill/>
-          <a:ln w="0">
-            <a:noFill/>
-          </a:ln>
-        </p:spPr>
-        <p:style>
-          <a:lnRef idx="0"/>
-          <a:fillRef idx="0"/>
-          <a:effectRef idx="0"/>
-          <a:fontRef idx="minor"/>
-        </p:style>
-        <p:txBody>
-          <a:bodyPr lIns="0" tIns="0" rIns="0" bIns="0" anchor="ctr">
-            <a:noAutofit/>
-          </a:bodyPr>
-          <a:p>
-            <a:pPr defTabSz="914400">
-              <a:lnSpc>
-                <a:spcPct val="100000"/>
-              </a:lnSpc>
-              <a:tabLst>
-                <a:tab pos="0" algn="l"/>
-              </a:tabLst>
-            </a:pPr>
-            <a:r>
-              <a:rPr lang="en-US" sz="1500" b="1" u="none" strike="noStrike">
-                <a:solidFill>
-                  <a:srgbClr val="6366F1"/>
-                </a:solidFill>
-                <a:effectLst/>
-                <a:uFillTx/>
-                <a:latin typeface="Calibri"/>
-                <a:ea typeface="Calibri"/>
-              </a:rPr>
-              <a:t>An AI feature is not a different kind of software.  </a:t>
-            </a:r>
-            <a:r>
-              <a:rPr lang="en-US" sz="1500" b="0" u="none" strike="noStrike">
-                <a:solidFill>
-                  <a:srgbClr val="1E293B"/>
-                </a:solidFill>
-                <a:effectLst/>
-                <a:uFillTx/>
-                <a:latin typeface="Calibri"/>
-                <a:ea typeface="Calibri"/>
-              </a:rPr>
-              <a:t>It is an endpoint that happens to call a model — and the AI part is ten lines of it.</a:t>
-            </a:r>
-            <a:endParaRPr lang="en-IN" sz="1500" b="0" u="none" strike="noStrike">
-              <a:solidFill>
-                <a:srgbClr val="000000"/>
-              </a:solidFill>
-              <a:effectLst/>
-              <a:uFillTx/>
-              <a:latin typeface="Arial"/>
-            </a:endParaRPr>
-          </a:p>
-        </p:txBody>
-      </p:sp>
-      <p:sp>
-        <p:nvSpPr>
-          <p:cNvPr id="280" name="Text 14"/>
-          <p:cNvSpPr/>
-          <p:nvPr/>
-        </p:nvSpPr>
-        <p:spPr>
-          <a:xfrm>
-            <a:off x="548640" y="6473880"/>
-            <a:ext cx="6857640" cy="228240"/>
-          </a:xfrm>
-          <a:prstGeom prst="rect">
-            <a:avLst/>
-          </a:prstGeom>
-          <a:noFill/>
-          <a:ln w="0">
-            <a:noFill/>
-          </a:ln>
-        </p:spPr>
-        <p:style>
-          <a:lnRef idx="0"/>
-          <a:fillRef idx="0"/>
-          <a:effectRef idx="0"/>
-          <a:fontRef idx="minor"/>
-        </p:style>
-        <p:txBody>
-          <a:bodyPr lIns="0" tIns="0" rIns="0" bIns="0" anchor="ctr">
-            <a:noAutofit/>
-          </a:bodyPr>
-          <a:p>
-            <a:pPr defTabSz="914400">
-              <a:lnSpc>
-                <a:spcPct val="100000"/>
-              </a:lnSpc>
-              <a:tabLst>
-                <a:tab pos="0" algn="l"/>
-              </a:tabLst>
-            </a:pPr>
-            <a:r>
-              <a:rPr lang="en-US" sz="900" b="0" u="none" strike="noStrike">
-                <a:solidFill>
-                  <a:srgbClr val="64748B"/>
-                </a:solidFill>
-                <a:effectLst/>
-                <a:uFillTx/>
-                <a:latin typeface="Calibri"/>
-                <a:ea typeface="Calibri"/>
-              </a:rPr>
-              <a:t>Auth, Docker &amp; Deploy  ·  hashing  ·  JWT  ·  roles  ·  Docker  ·  shipping it</a:t>
-            </a:r>
-            <a:endParaRPr lang="en-IN" sz="900" b="0" u="none" strike="noStrike">
-              <a:solidFill>
-                <a:srgbClr val="000000"/>
-              </a:solidFill>
-              <a:effectLst/>
-              <a:uFillTx/>
-              <a:latin typeface="Arial"/>
-            </a:endParaRPr>
-          </a:p>
-        </p:txBody>
-      </p:sp>
-      <p:sp>
-        <p:nvSpPr>
-          <p:cNvPr id="281" name="Text 15"/>
-          <p:cNvSpPr/>
-          <p:nvPr/>
-        </p:nvSpPr>
-        <p:spPr>
-          <a:xfrm>
-            <a:off x="11183040" y="6473880"/>
-            <a:ext cx="456840" cy="228240"/>
-          </a:xfrm>
-          <a:prstGeom prst="rect">
-            <a:avLst/>
-          </a:prstGeom>
-          <a:noFill/>
-          <a:ln w="0">
-            <a:noFill/>
-          </a:ln>
-        </p:spPr>
-        <p:style>
-          <a:lnRef idx="0"/>
-          <a:fillRef idx="0"/>
-          <a:effectRef idx="0"/>
-          <a:fontRef idx="minor"/>
-        </p:style>
-        <p:txBody>
-          <a:bodyPr lIns="0" tIns="0" rIns="0" bIns="0" anchor="ctr">
-            <a:noAutofit/>
-          </a:bodyPr>
-          <a:p>
-            <a:pPr algn="r" defTabSz="914400">
-              <a:lnSpc>
-                <a:spcPct val="100000"/>
-              </a:lnSpc>
-              <a:tabLst>
-                <a:tab pos="0" algn="l"/>
-              </a:tabLst>
-            </a:pPr>
-            <a:r>
-              <a:rPr lang="en-US" sz="900" b="0" u="none" strike="noStrike">
-                <a:solidFill>
-                  <a:srgbClr val="64748B"/>
-                </a:solidFill>
-                <a:effectLst/>
-                <a:uFillTx/>
-                <a:latin typeface="Calibri"/>
-                <a:ea typeface="Calibri"/>
-              </a:rPr>
-              <a:t>20</a:t>
-            </a:r>
-            <a:endParaRPr lang="en-IN" sz="900" b="0" u="none" strike="noStrike">
+              <a:t>And then it happens by itself</a:t>
+            </a:r>
+            <a:endParaRPr lang="en-IN" sz="3400" b="0" u="none" strike="noStrike">
               <a:solidFill>
                 <a:srgbClr val="000000"/>
               </a:solidFill>
@@ -14956,7 +14746,7 @@
       </p:grpSpPr>
       <p:sp>
         <p:nvSpPr>
-          <p:cNvPr id="282" name="Text 0"/>
+          <p:cNvPr id="268" name="Text 0"/>
           <p:cNvSpPr/>
           <p:nvPr/>
         </p:nvSpPr>
@@ -15002,7 +14792,7 @@
                 <a:latin typeface="Calibri"/>
                 <a:ea typeface="Calibri"/>
               </a:rPr>
-              <a:t>Where you started, and where you are now</a:t>
+              <a:t>Nobody remembers to run the checks</a:t>
             </a:r>
             <a:endParaRPr lang="en-IN" sz="3000" b="0" u="none" strike="noStrike">
               <a:solidFill>
@@ -15017,18 +14807,1474 @@
       </p:sp>
       <p:sp>
         <p:nvSpPr>
-          <p:cNvPr id="283" name="Shape 1"/>
-          <p:cNvSpPr/>
-          <p:nvPr/>
-        </p:nvSpPr>
-        <p:spPr>
-          <a:xfrm>
-            <a:off x="548640" y="1554480"/>
-            <a:ext cx="11091240" cy="776880"/>
+          <p:cNvPr id="269" name="Text 1"/>
+          <p:cNvSpPr/>
+          <p:nvPr/>
+        </p:nvSpPr>
+        <p:spPr>
+          <a:xfrm>
+            <a:off x="548640" y="1188720"/>
+            <a:ext cx="10972440" cy="365400"/>
+          </a:xfrm>
+          <a:prstGeom prst="rect">
+            <a:avLst/>
+          </a:prstGeom>
+          <a:noFill/>
+          <a:ln w="0">
+            <a:noFill/>
+          </a:ln>
+        </p:spPr>
+        <p:style>
+          <a:lnRef idx="0"/>
+          <a:fillRef idx="0"/>
+          <a:effectRef idx="0"/>
+          <a:fontRef idx="minor"/>
+        </p:style>
+        <p:txBody>
+          <a:bodyPr lIns="0" tIns="0" rIns="0" bIns="0" anchor="ctr">
+            <a:noAutofit/>
+          </a:bodyPr>
+          <a:p>
+            <a:pPr defTabSz="914400">
+              <a:lnSpc>
+                <a:spcPct val="100000"/>
+              </a:lnSpc>
+              <a:tabLst>
+                <a:tab pos="0" algn="l"/>
+              </a:tabLst>
+            </a:pPr>
+            <a:r>
+              <a:rPr lang="en-US" sz="1500" b="0" i="1" u="none" strike="noStrike">
+                <a:solidFill>
+                  <a:srgbClr val="64748B"/>
+                </a:solidFill>
+                <a:effectLst/>
+                <a:uFillTx/>
+                <a:latin typeface="Calibri"/>
+                <a:ea typeface="Calibri"/>
+              </a:rPr>
+              <a:t>That is the entire reason CI exists. Not discipline - automation.</a:t>
+            </a:r>
+            <a:endParaRPr lang="en-IN" sz="1500" b="0" u="none" strike="noStrike">
+              <a:solidFill>
+                <a:srgbClr val="000000"/>
+              </a:solidFill>
+              <a:effectLst/>
+              <a:uFillTx/>
+              <a:latin typeface="Arial"/>
+            </a:endParaRPr>
+          </a:p>
+        </p:txBody>
+      </p:sp>
+      <p:sp>
+        <p:nvSpPr>
+          <p:cNvPr id="270" name="Shape 2"/>
+          <p:cNvSpPr/>
+          <p:nvPr/>
+        </p:nvSpPr>
+        <p:spPr>
+          <a:xfrm>
+            <a:off x="548640" y="1828800"/>
+            <a:ext cx="2605680" cy="1371240"/>
           </a:xfrm>
           <a:prstGeom prst="roundRect">
             <a:avLst>
-              <a:gd name="adj" fmla="val 7059"/>
+              <a:gd name="adj" fmla="val 6667"/>
+            </a:avLst>
+          </a:prstGeom>
+          <a:solidFill>
+            <a:srgbClr val="EEF0FF"/>
+          </a:solidFill>
+          <a:ln w="12700">
+            <a:solidFill>
+              <a:srgbClr val="6366F1"/>
+            </a:solidFill>
+            <a:round/>
+          </a:ln>
+        </p:spPr>
+        <p:style>
+          <a:lnRef idx="0"/>
+          <a:fillRef idx="0"/>
+          <a:effectRef idx="0"/>
+          <a:fontRef idx="minor"/>
+        </p:style>
+        <p:txBody>
+          <a:bodyPr lIns="90000" tIns="45000" rIns="90000" bIns="45000" anchor="t">
+            <a:noAutofit/>
+          </a:bodyPr>
+          <a:p>
+            <a:endParaRPr lang="en-IN" sz="1800" b="0" u="none" strike="noStrike">
+              <a:solidFill>
+                <a:srgbClr val="000000"/>
+              </a:solidFill>
+              <a:effectLst/>
+              <a:uFillTx/>
+              <a:latin typeface="Arial"/>
+            </a:endParaRPr>
+          </a:p>
+        </p:txBody>
+      </p:sp>
+      <p:sp>
+        <p:nvSpPr>
+          <p:cNvPr id="271" name="Text 3"/>
+          <p:cNvSpPr/>
+          <p:nvPr/>
+        </p:nvSpPr>
+        <p:spPr>
+          <a:xfrm>
+            <a:off x="749880" y="1993320"/>
+            <a:ext cx="2239920" cy="456840"/>
+          </a:xfrm>
+          <a:prstGeom prst="rect">
+            <a:avLst/>
+          </a:prstGeom>
+          <a:noFill/>
+          <a:ln w="0">
+            <a:noFill/>
+          </a:ln>
+        </p:spPr>
+        <p:style>
+          <a:lnRef idx="0"/>
+          <a:fillRef idx="0"/>
+          <a:effectRef idx="0"/>
+          <a:fontRef idx="minor"/>
+        </p:style>
+        <p:txBody>
+          <a:bodyPr lIns="0" tIns="0" rIns="0" bIns="0" anchor="ctr">
+            <a:noAutofit/>
+          </a:bodyPr>
+          <a:p>
+            <a:pPr defTabSz="914400">
+              <a:lnSpc>
+                <a:spcPct val="100000"/>
+              </a:lnSpc>
+              <a:tabLst>
+                <a:tab pos="0" algn="l"/>
+              </a:tabLst>
+            </a:pPr>
+            <a:r>
+              <a:rPr lang="en-US" sz="1500" b="1" u="none" strike="noStrike">
+                <a:solidFill>
+                  <a:srgbClr val="6366F1"/>
+                </a:solidFill>
+                <a:effectLst/>
+                <a:uFillTx/>
+                <a:latin typeface="Calibri"/>
+                <a:ea typeface="Calibri"/>
+              </a:rPr>
+              <a:t>You push</a:t>
+            </a:r>
+            <a:endParaRPr lang="en-IN" sz="1500" b="0" u="none" strike="noStrike">
+              <a:solidFill>
+                <a:srgbClr val="000000"/>
+              </a:solidFill>
+              <a:effectLst/>
+              <a:uFillTx/>
+              <a:latin typeface="Arial"/>
+            </a:endParaRPr>
+          </a:p>
+        </p:txBody>
+      </p:sp>
+      <p:sp>
+        <p:nvSpPr>
+          <p:cNvPr id="272" name="Text 4"/>
+          <p:cNvSpPr/>
+          <p:nvPr/>
+        </p:nvSpPr>
+        <p:spPr>
+          <a:xfrm>
+            <a:off x="749880" y="2487240"/>
+            <a:ext cx="2239920" cy="594000"/>
+          </a:xfrm>
+          <a:prstGeom prst="rect">
+            <a:avLst/>
+          </a:prstGeom>
+          <a:noFill/>
+          <a:ln w="0">
+            <a:noFill/>
+          </a:ln>
+        </p:spPr>
+        <p:style>
+          <a:lnRef idx="0"/>
+          <a:fillRef idx="0"/>
+          <a:effectRef idx="0"/>
+          <a:fontRef idx="minor"/>
+        </p:style>
+        <p:txBody>
+          <a:bodyPr lIns="0" tIns="0" rIns="0" bIns="0" anchor="ctr">
+            <a:noAutofit/>
+          </a:bodyPr>
+          <a:p>
+            <a:pPr defTabSz="914400">
+              <a:lnSpc>
+                <a:spcPct val="100000"/>
+              </a:lnSpc>
+              <a:tabLst>
+                <a:tab pos="0" algn="l"/>
+              </a:tabLst>
+            </a:pPr>
+            <a:r>
+              <a:rPr lang="en-US" sz="1150" b="0" u="none" strike="noStrike">
+                <a:solidFill>
+                  <a:srgbClr val="1E293B"/>
+                </a:solidFill>
+                <a:effectLst/>
+                <a:uFillTx/>
+                <a:latin typeface="Courier New"/>
+                <a:ea typeface="Courier New"/>
+              </a:rPr>
+              <a:t>git push</a:t>
+            </a:r>
+            <a:endParaRPr lang="en-IN" sz="1150" b="0" u="none" strike="noStrike">
+              <a:solidFill>
+                <a:srgbClr val="000000"/>
+              </a:solidFill>
+              <a:effectLst/>
+              <a:uFillTx/>
+              <a:latin typeface="Arial"/>
+            </a:endParaRPr>
+          </a:p>
+        </p:txBody>
+      </p:sp>
+      <p:sp>
+        <p:nvSpPr>
+          <p:cNvPr id="273" name="Shape 5"/>
+          <p:cNvSpPr/>
+          <p:nvPr/>
+        </p:nvSpPr>
+        <p:spPr>
+          <a:xfrm>
+            <a:off x="3182040" y="2395800"/>
+            <a:ext cx="145800" cy="237240"/>
+          </a:xfrm>
+          <a:prstGeom prst="rightArrow">
+            <a:avLst>
+              <a:gd name="adj1" fmla="val 50000"/>
+              <a:gd name="adj2" fmla="val 50000"/>
+            </a:avLst>
+          </a:prstGeom>
+          <a:solidFill>
+            <a:srgbClr val="64748B"/>
+          </a:solidFill>
+          <a:ln w="0">
+            <a:noFill/>
+          </a:ln>
+        </p:spPr>
+        <p:style>
+          <a:lnRef idx="0"/>
+          <a:fillRef idx="0"/>
+          <a:effectRef idx="0"/>
+          <a:fontRef idx="minor"/>
+        </p:style>
+        <p:txBody>
+          <a:bodyPr lIns="90000" tIns="45000" rIns="90000" bIns="45000" anchor="t">
+            <a:noAutofit/>
+          </a:bodyPr>
+          <a:p>
+            <a:endParaRPr lang="en-IN" sz="1800" b="0" u="none" strike="noStrike">
+              <a:solidFill>
+                <a:srgbClr val="FFFFFF"/>
+              </a:solidFill>
+              <a:effectLst/>
+              <a:uFillTx/>
+              <a:latin typeface="Arial"/>
+            </a:endParaRPr>
+          </a:p>
+        </p:txBody>
+      </p:sp>
+      <p:sp>
+        <p:nvSpPr>
+          <p:cNvPr id="274" name="Shape 6"/>
+          <p:cNvSpPr/>
+          <p:nvPr/>
+        </p:nvSpPr>
+        <p:spPr>
+          <a:xfrm>
+            <a:off x="3355920" y="1828800"/>
+            <a:ext cx="2605680" cy="1371240"/>
+          </a:xfrm>
+          <a:prstGeom prst="roundRect">
+            <a:avLst>
+              <a:gd name="adj" fmla="val 6667"/>
+            </a:avLst>
+          </a:prstGeom>
+          <a:solidFill>
+            <a:srgbClr val="EEF0FF"/>
+          </a:solidFill>
+          <a:ln w="12700">
+            <a:solidFill>
+              <a:srgbClr val="0891B2"/>
+            </a:solidFill>
+            <a:round/>
+          </a:ln>
+        </p:spPr>
+        <p:style>
+          <a:lnRef idx="0"/>
+          <a:fillRef idx="0"/>
+          <a:effectRef idx="0"/>
+          <a:fontRef idx="minor"/>
+        </p:style>
+        <p:txBody>
+          <a:bodyPr lIns="90000" tIns="45000" rIns="90000" bIns="45000" anchor="t">
+            <a:noAutofit/>
+          </a:bodyPr>
+          <a:p>
+            <a:endParaRPr lang="en-IN" sz="1800" b="0" u="none" strike="noStrike">
+              <a:solidFill>
+                <a:srgbClr val="000000"/>
+              </a:solidFill>
+              <a:effectLst/>
+              <a:uFillTx/>
+              <a:latin typeface="Arial"/>
+            </a:endParaRPr>
+          </a:p>
+        </p:txBody>
+      </p:sp>
+      <p:sp>
+        <p:nvSpPr>
+          <p:cNvPr id="275" name="Text 7"/>
+          <p:cNvSpPr/>
+          <p:nvPr/>
+        </p:nvSpPr>
+        <p:spPr>
+          <a:xfrm>
+            <a:off x="3557160" y="1993320"/>
+            <a:ext cx="2239920" cy="456840"/>
+          </a:xfrm>
+          <a:prstGeom prst="rect">
+            <a:avLst/>
+          </a:prstGeom>
+          <a:noFill/>
+          <a:ln w="0">
+            <a:noFill/>
+          </a:ln>
+        </p:spPr>
+        <p:style>
+          <a:lnRef idx="0"/>
+          <a:fillRef idx="0"/>
+          <a:effectRef idx="0"/>
+          <a:fontRef idx="minor"/>
+        </p:style>
+        <p:txBody>
+          <a:bodyPr lIns="0" tIns="0" rIns="0" bIns="0" anchor="ctr">
+            <a:noAutofit/>
+          </a:bodyPr>
+          <a:p>
+            <a:pPr defTabSz="914400">
+              <a:lnSpc>
+                <a:spcPct val="100000"/>
+              </a:lnSpc>
+              <a:tabLst>
+                <a:tab pos="0" algn="l"/>
+              </a:tabLst>
+            </a:pPr>
+            <a:r>
+              <a:rPr lang="en-US" sz="1500" b="1" u="none" strike="noStrike">
+                <a:solidFill>
+                  <a:srgbClr val="0891B2"/>
+                </a:solidFill>
+                <a:effectLst/>
+                <a:uFillTx/>
+                <a:latin typeface="Calibri"/>
+                <a:ea typeface="Calibri"/>
+              </a:rPr>
+              <a:t>GitHub rents a machine</a:t>
+            </a:r>
+            <a:endParaRPr lang="en-IN" sz="1500" b="0" u="none" strike="noStrike">
+              <a:solidFill>
+                <a:srgbClr val="000000"/>
+              </a:solidFill>
+              <a:effectLst/>
+              <a:uFillTx/>
+              <a:latin typeface="Arial"/>
+            </a:endParaRPr>
+          </a:p>
+        </p:txBody>
+      </p:sp>
+      <p:sp>
+        <p:nvSpPr>
+          <p:cNvPr id="276" name="Text 8"/>
+          <p:cNvSpPr/>
+          <p:nvPr/>
+        </p:nvSpPr>
+        <p:spPr>
+          <a:xfrm>
+            <a:off x="3557160" y="2487240"/>
+            <a:ext cx="2239920" cy="594000"/>
+          </a:xfrm>
+          <a:prstGeom prst="rect">
+            <a:avLst/>
+          </a:prstGeom>
+          <a:noFill/>
+          <a:ln w="0">
+            <a:noFill/>
+          </a:ln>
+        </p:spPr>
+        <p:style>
+          <a:lnRef idx="0"/>
+          <a:fillRef idx="0"/>
+          <a:effectRef idx="0"/>
+          <a:fontRef idx="minor"/>
+        </p:style>
+        <p:txBody>
+          <a:bodyPr lIns="0" tIns="0" rIns="0" bIns="0" anchor="ctr">
+            <a:noAutofit/>
+          </a:bodyPr>
+          <a:p>
+            <a:pPr defTabSz="914400">
+              <a:lnSpc>
+                <a:spcPct val="100000"/>
+              </a:lnSpc>
+              <a:tabLst>
+                <a:tab pos="0" algn="l"/>
+              </a:tabLst>
+            </a:pPr>
+            <a:r>
+              <a:rPr lang="en-US" sz="1150" b="0" u="none" strike="noStrike">
+                <a:solidFill>
+                  <a:srgbClr val="1E293B"/>
+                </a:solidFill>
+                <a:effectLst/>
+                <a:uFillTx/>
+                <a:latin typeface="Courier New"/>
+                <a:ea typeface="Courier New"/>
+              </a:rPr>
+              <a:t>a fresh Ubuntu VM, free</a:t>
+            </a:r>
+            <a:endParaRPr lang="en-IN" sz="1150" b="0" u="none" strike="noStrike">
+              <a:solidFill>
+                <a:srgbClr val="000000"/>
+              </a:solidFill>
+              <a:effectLst/>
+              <a:uFillTx/>
+              <a:latin typeface="Arial"/>
+            </a:endParaRPr>
+          </a:p>
+        </p:txBody>
+      </p:sp>
+      <p:sp>
+        <p:nvSpPr>
+          <p:cNvPr id="277" name="Shape 9"/>
+          <p:cNvSpPr/>
+          <p:nvPr/>
+        </p:nvSpPr>
+        <p:spPr>
+          <a:xfrm>
+            <a:off x="5989320" y="2395800"/>
+            <a:ext cx="145800" cy="237240"/>
+          </a:xfrm>
+          <a:prstGeom prst="rightArrow">
+            <a:avLst>
+              <a:gd name="adj1" fmla="val 50000"/>
+              <a:gd name="adj2" fmla="val 50000"/>
+            </a:avLst>
+          </a:prstGeom>
+          <a:solidFill>
+            <a:srgbClr val="64748B"/>
+          </a:solidFill>
+          <a:ln w="0">
+            <a:noFill/>
+          </a:ln>
+        </p:spPr>
+        <p:style>
+          <a:lnRef idx="0"/>
+          <a:fillRef idx="0"/>
+          <a:effectRef idx="0"/>
+          <a:fontRef idx="minor"/>
+        </p:style>
+        <p:txBody>
+          <a:bodyPr lIns="90000" tIns="45000" rIns="90000" bIns="45000" anchor="t">
+            <a:noAutofit/>
+          </a:bodyPr>
+          <a:p>
+            <a:endParaRPr lang="en-IN" sz="1800" b="0" u="none" strike="noStrike">
+              <a:solidFill>
+                <a:srgbClr val="FFFFFF"/>
+              </a:solidFill>
+              <a:effectLst/>
+              <a:uFillTx/>
+              <a:latin typeface="Arial"/>
+            </a:endParaRPr>
+          </a:p>
+        </p:txBody>
+      </p:sp>
+      <p:sp>
+        <p:nvSpPr>
+          <p:cNvPr id="278" name="Shape 10"/>
+          <p:cNvSpPr/>
+          <p:nvPr/>
+        </p:nvSpPr>
+        <p:spPr>
+          <a:xfrm>
+            <a:off x="6163200" y="1828800"/>
+            <a:ext cx="2605680" cy="1371240"/>
+          </a:xfrm>
+          <a:prstGeom prst="roundRect">
+            <a:avLst>
+              <a:gd name="adj" fmla="val 6667"/>
+            </a:avLst>
+          </a:prstGeom>
+          <a:solidFill>
+            <a:srgbClr val="EEF0FF"/>
+          </a:solidFill>
+          <a:ln w="12700">
+            <a:solidFill>
+              <a:srgbClr val="6366F1"/>
+            </a:solidFill>
+            <a:round/>
+          </a:ln>
+        </p:spPr>
+        <p:style>
+          <a:lnRef idx="0"/>
+          <a:fillRef idx="0"/>
+          <a:effectRef idx="0"/>
+          <a:fontRef idx="minor"/>
+        </p:style>
+        <p:txBody>
+          <a:bodyPr lIns="90000" tIns="45000" rIns="90000" bIns="45000" anchor="t">
+            <a:noAutofit/>
+          </a:bodyPr>
+          <a:p>
+            <a:endParaRPr lang="en-IN" sz="1800" b="0" u="none" strike="noStrike">
+              <a:solidFill>
+                <a:srgbClr val="000000"/>
+              </a:solidFill>
+              <a:effectLst/>
+              <a:uFillTx/>
+              <a:latin typeface="Arial"/>
+            </a:endParaRPr>
+          </a:p>
+        </p:txBody>
+      </p:sp>
+      <p:sp>
+        <p:nvSpPr>
+          <p:cNvPr id="279" name="Text 11"/>
+          <p:cNvSpPr/>
+          <p:nvPr/>
+        </p:nvSpPr>
+        <p:spPr>
+          <a:xfrm>
+            <a:off x="6364080" y="1993320"/>
+            <a:ext cx="2239920" cy="456840"/>
+          </a:xfrm>
+          <a:prstGeom prst="rect">
+            <a:avLst/>
+          </a:prstGeom>
+          <a:noFill/>
+          <a:ln w="0">
+            <a:noFill/>
+          </a:ln>
+        </p:spPr>
+        <p:style>
+          <a:lnRef idx="0"/>
+          <a:fillRef idx="0"/>
+          <a:effectRef idx="0"/>
+          <a:fontRef idx="minor"/>
+        </p:style>
+        <p:txBody>
+          <a:bodyPr lIns="0" tIns="0" rIns="0" bIns="0" anchor="ctr">
+            <a:noAutofit/>
+          </a:bodyPr>
+          <a:p>
+            <a:pPr defTabSz="914400">
+              <a:lnSpc>
+                <a:spcPct val="100000"/>
+              </a:lnSpc>
+              <a:tabLst>
+                <a:tab pos="0" algn="l"/>
+              </a:tabLst>
+            </a:pPr>
+            <a:r>
+              <a:rPr lang="en-US" sz="1500" b="1" u="none" strike="noStrike">
+                <a:solidFill>
+                  <a:srgbClr val="6366F1"/>
+                </a:solidFill>
+                <a:effectLst/>
+                <a:uFillTx/>
+                <a:latin typeface="Calibri"/>
+                <a:ea typeface="Calibri"/>
+              </a:rPr>
+              <a:t>It runs your steps</a:t>
+            </a:r>
+            <a:endParaRPr lang="en-IN" sz="1500" b="0" u="none" strike="noStrike">
+              <a:solidFill>
+                <a:srgbClr val="000000"/>
+              </a:solidFill>
+              <a:effectLst/>
+              <a:uFillTx/>
+              <a:latin typeface="Arial"/>
+            </a:endParaRPr>
+          </a:p>
+        </p:txBody>
+      </p:sp>
+      <p:sp>
+        <p:nvSpPr>
+          <p:cNvPr id="280" name="Text 12"/>
+          <p:cNvSpPr/>
+          <p:nvPr/>
+        </p:nvSpPr>
+        <p:spPr>
+          <a:xfrm>
+            <a:off x="6364080" y="2487240"/>
+            <a:ext cx="2239920" cy="594000"/>
+          </a:xfrm>
+          <a:prstGeom prst="rect">
+            <a:avLst/>
+          </a:prstGeom>
+          <a:noFill/>
+          <a:ln w="0">
+            <a:noFill/>
+          </a:ln>
+        </p:spPr>
+        <p:style>
+          <a:lnRef idx="0"/>
+          <a:fillRef idx="0"/>
+          <a:effectRef idx="0"/>
+          <a:fontRef idx="minor"/>
+        </p:style>
+        <p:txBody>
+          <a:bodyPr lIns="0" tIns="0" rIns="0" bIns="0" anchor="ctr">
+            <a:noAutofit/>
+          </a:bodyPr>
+          <a:p>
+            <a:pPr defTabSz="914400">
+              <a:lnSpc>
+                <a:spcPct val="100000"/>
+              </a:lnSpc>
+              <a:tabLst>
+                <a:tab pos="0" algn="l"/>
+              </a:tabLst>
+            </a:pPr>
+            <a:r>
+              <a:rPr lang="en-US" sz="1150" b="0" u="none" strike="noStrike">
+                <a:solidFill>
+                  <a:srgbClr val="1E293B"/>
+                </a:solidFill>
+                <a:effectLst/>
+                <a:uFillTx/>
+                <a:latin typeface="Courier New"/>
+                <a:ea typeface="Courier New"/>
+              </a:rPr>
+              <a:t>install, check, build</a:t>
+            </a:r>
+            <a:endParaRPr lang="en-IN" sz="1150" b="0" u="none" strike="noStrike">
+              <a:solidFill>
+                <a:srgbClr val="000000"/>
+              </a:solidFill>
+              <a:effectLst/>
+              <a:uFillTx/>
+              <a:latin typeface="Arial"/>
+            </a:endParaRPr>
+          </a:p>
+        </p:txBody>
+      </p:sp>
+      <p:sp>
+        <p:nvSpPr>
+          <p:cNvPr id="281" name="Shape 13"/>
+          <p:cNvSpPr/>
+          <p:nvPr/>
+        </p:nvSpPr>
+        <p:spPr>
+          <a:xfrm>
+            <a:off x="8796600" y="2395800"/>
+            <a:ext cx="145800" cy="237240"/>
+          </a:xfrm>
+          <a:prstGeom prst="rightArrow">
+            <a:avLst>
+              <a:gd name="adj1" fmla="val 50000"/>
+              <a:gd name="adj2" fmla="val 50000"/>
+            </a:avLst>
+          </a:prstGeom>
+          <a:solidFill>
+            <a:srgbClr val="64748B"/>
+          </a:solidFill>
+          <a:ln w="0">
+            <a:noFill/>
+          </a:ln>
+        </p:spPr>
+        <p:style>
+          <a:lnRef idx="0"/>
+          <a:fillRef idx="0"/>
+          <a:effectRef idx="0"/>
+          <a:fontRef idx="minor"/>
+        </p:style>
+        <p:txBody>
+          <a:bodyPr lIns="90000" tIns="45000" rIns="90000" bIns="45000" anchor="t">
+            <a:noAutofit/>
+          </a:bodyPr>
+          <a:p>
+            <a:endParaRPr lang="en-IN" sz="1800" b="0" u="none" strike="noStrike">
+              <a:solidFill>
+                <a:srgbClr val="FFFFFF"/>
+              </a:solidFill>
+              <a:effectLst/>
+              <a:uFillTx/>
+              <a:latin typeface="Arial"/>
+            </a:endParaRPr>
+          </a:p>
+        </p:txBody>
+      </p:sp>
+      <p:sp>
+        <p:nvSpPr>
+          <p:cNvPr id="282" name="Shape 14"/>
+          <p:cNvSpPr/>
+          <p:nvPr/>
+        </p:nvSpPr>
+        <p:spPr>
+          <a:xfrm>
+            <a:off x="8970120" y="1828800"/>
+            <a:ext cx="2605680" cy="1371240"/>
+          </a:xfrm>
+          <a:prstGeom prst="roundRect">
+            <a:avLst>
+              <a:gd name="adj" fmla="val 6667"/>
+            </a:avLst>
+          </a:prstGeom>
+          <a:solidFill>
+            <a:srgbClr val="F0FDF4"/>
+          </a:solidFill>
+          <a:ln w="12700">
+            <a:solidFill>
+              <a:srgbClr val="15803D"/>
+            </a:solidFill>
+            <a:round/>
+          </a:ln>
+        </p:spPr>
+        <p:style>
+          <a:lnRef idx="0"/>
+          <a:fillRef idx="0"/>
+          <a:effectRef idx="0"/>
+          <a:fontRef idx="minor"/>
+        </p:style>
+        <p:txBody>
+          <a:bodyPr lIns="90000" tIns="45000" rIns="90000" bIns="45000" anchor="t">
+            <a:noAutofit/>
+          </a:bodyPr>
+          <a:p>
+            <a:endParaRPr lang="en-IN" sz="1800" b="0" u="none" strike="noStrike">
+              <a:solidFill>
+                <a:srgbClr val="000000"/>
+              </a:solidFill>
+              <a:effectLst/>
+              <a:uFillTx/>
+              <a:latin typeface="Arial"/>
+            </a:endParaRPr>
+          </a:p>
+        </p:txBody>
+      </p:sp>
+      <p:sp>
+        <p:nvSpPr>
+          <p:cNvPr id="283" name="Text 15"/>
+          <p:cNvSpPr/>
+          <p:nvPr/>
+        </p:nvSpPr>
+        <p:spPr>
+          <a:xfrm>
+            <a:off x="9171360" y="1993320"/>
+            <a:ext cx="2239920" cy="456840"/>
+          </a:xfrm>
+          <a:prstGeom prst="rect">
+            <a:avLst/>
+          </a:prstGeom>
+          <a:noFill/>
+          <a:ln w="0">
+            <a:noFill/>
+          </a:ln>
+        </p:spPr>
+        <p:style>
+          <a:lnRef idx="0"/>
+          <a:fillRef idx="0"/>
+          <a:effectRef idx="0"/>
+          <a:fontRef idx="minor"/>
+        </p:style>
+        <p:txBody>
+          <a:bodyPr lIns="0" tIns="0" rIns="0" bIns="0" anchor="ctr">
+            <a:noAutofit/>
+          </a:bodyPr>
+          <a:p>
+            <a:pPr defTabSz="914400">
+              <a:lnSpc>
+                <a:spcPct val="100000"/>
+              </a:lnSpc>
+              <a:tabLst>
+                <a:tab pos="0" algn="l"/>
+              </a:tabLst>
+            </a:pPr>
+            <a:r>
+              <a:rPr lang="en-US" sz="1500" b="1" u="none" strike="noStrike">
+                <a:solidFill>
+                  <a:srgbClr val="15803D"/>
+                </a:solidFill>
+                <a:effectLst/>
+                <a:uFillTx/>
+                <a:latin typeface="Calibri"/>
+                <a:ea typeface="Calibri"/>
+              </a:rPr>
+              <a:t>Green or red</a:t>
+            </a:r>
+            <a:endParaRPr lang="en-IN" sz="1500" b="0" u="none" strike="noStrike">
+              <a:solidFill>
+                <a:srgbClr val="000000"/>
+              </a:solidFill>
+              <a:effectLst/>
+              <a:uFillTx/>
+              <a:latin typeface="Arial"/>
+            </a:endParaRPr>
+          </a:p>
+        </p:txBody>
+      </p:sp>
+      <p:sp>
+        <p:nvSpPr>
+          <p:cNvPr id="284" name="Text 16"/>
+          <p:cNvSpPr/>
+          <p:nvPr/>
+        </p:nvSpPr>
+        <p:spPr>
+          <a:xfrm>
+            <a:off x="9171360" y="2487240"/>
+            <a:ext cx="2239920" cy="594000"/>
+          </a:xfrm>
+          <a:prstGeom prst="rect">
+            <a:avLst/>
+          </a:prstGeom>
+          <a:noFill/>
+          <a:ln w="0">
+            <a:noFill/>
+          </a:ln>
+        </p:spPr>
+        <p:style>
+          <a:lnRef idx="0"/>
+          <a:fillRef idx="0"/>
+          <a:effectRef idx="0"/>
+          <a:fontRef idx="minor"/>
+        </p:style>
+        <p:txBody>
+          <a:bodyPr lIns="0" tIns="0" rIns="0" bIns="0" anchor="ctr">
+            <a:noAutofit/>
+          </a:bodyPr>
+          <a:p>
+            <a:pPr defTabSz="914400">
+              <a:lnSpc>
+                <a:spcPct val="100000"/>
+              </a:lnSpc>
+              <a:tabLst>
+                <a:tab pos="0" algn="l"/>
+              </a:tabLst>
+            </a:pPr>
+            <a:r>
+              <a:rPr lang="en-US" sz="1150" b="0" u="none" strike="noStrike">
+                <a:solidFill>
+                  <a:srgbClr val="1E293B"/>
+                </a:solidFill>
+                <a:effectLst/>
+                <a:uFillTx/>
+                <a:latin typeface="Courier New"/>
+                <a:ea typeface="Courier New"/>
+              </a:rPr>
+              <a:t>on the pull request</a:t>
+            </a:r>
+            <a:endParaRPr lang="en-IN" sz="1150" b="0" u="none" strike="noStrike">
+              <a:solidFill>
+                <a:srgbClr val="000000"/>
+              </a:solidFill>
+              <a:effectLst/>
+              <a:uFillTx/>
+              <a:latin typeface="Arial"/>
+            </a:endParaRPr>
+          </a:p>
+        </p:txBody>
+      </p:sp>
+      <p:sp>
+        <p:nvSpPr>
+          <p:cNvPr id="285" name="Shape 17"/>
+          <p:cNvSpPr/>
+          <p:nvPr/>
+        </p:nvSpPr>
+        <p:spPr>
+          <a:xfrm>
+            <a:off x="548640" y="3429000"/>
+            <a:ext cx="11091240" cy="1005480"/>
+          </a:xfrm>
+          <a:prstGeom prst="roundRect">
+            <a:avLst>
+              <a:gd name="adj" fmla="val 9091"/>
+            </a:avLst>
+          </a:prstGeom>
+          <a:solidFill>
+            <a:srgbClr val="F0FDF4"/>
+          </a:solidFill>
+          <a:ln w="12700">
+            <a:solidFill>
+              <a:srgbClr val="BBF7D0"/>
+            </a:solidFill>
+            <a:round/>
+          </a:ln>
+        </p:spPr>
+        <p:style>
+          <a:lnRef idx="0"/>
+          <a:fillRef idx="0"/>
+          <a:effectRef idx="0"/>
+          <a:fontRef idx="minor"/>
+        </p:style>
+        <p:txBody>
+          <a:bodyPr lIns="90000" tIns="45000" rIns="90000" bIns="45000" anchor="t">
+            <a:noAutofit/>
+          </a:bodyPr>
+          <a:p>
+            <a:endParaRPr lang="en-IN" sz="1800" b="0" u="none" strike="noStrike">
+              <a:solidFill>
+                <a:srgbClr val="000000"/>
+              </a:solidFill>
+              <a:effectLst/>
+              <a:uFillTx/>
+              <a:latin typeface="Arial"/>
+            </a:endParaRPr>
+          </a:p>
+        </p:txBody>
+      </p:sp>
+      <p:sp>
+        <p:nvSpPr>
+          <p:cNvPr id="286" name="Text 18"/>
+          <p:cNvSpPr/>
+          <p:nvPr/>
+        </p:nvSpPr>
+        <p:spPr>
+          <a:xfrm>
+            <a:off x="868680" y="3429000"/>
+            <a:ext cx="10423800" cy="1005480"/>
+          </a:xfrm>
+          <a:prstGeom prst="rect">
+            <a:avLst/>
+          </a:prstGeom>
+          <a:noFill/>
+          <a:ln w="0">
+            <a:noFill/>
+          </a:ln>
+        </p:spPr>
+        <p:style>
+          <a:lnRef idx="0"/>
+          <a:fillRef idx="0"/>
+          <a:effectRef idx="0"/>
+          <a:fontRef idx="minor"/>
+        </p:style>
+        <p:txBody>
+          <a:bodyPr lIns="0" tIns="0" rIns="0" bIns="0" anchor="ctr">
+            <a:noAutofit/>
+          </a:bodyPr>
+          <a:p>
+            <a:pPr defTabSz="914400">
+              <a:lnSpc>
+                <a:spcPct val="100000"/>
+              </a:lnSpc>
+              <a:tabLst>
+                <a:tab pos="0" algn="l"/>
+              </a:tabLst>
+            </a:pPr>
+            <a:r>
+              <a:rPr lang="en-US" sz="1500" b="1" u="none" strike="noStrike">
+                <a:solidFill>
+                  <a:srgbClr val="15803D"/>
+                </a:solidFill>
+                <a:effectLst/>
+                <a:uFillTx/>
+                <a:latin typeface="Calibri"/>
+                <a:ea typeface="Calibri"/>
+              </a:rPr>
+              <a:t>The machine is FRESH every single time.  </a:t>
+            </a:r>
+            <a:r>
+              <a:rPr lang="en-US" sz="1500" b="0" u="none" strike="noStrike">
+                <a:solidFill>
+                  <a:srgbClr val="1E293B"/>
+                </a:solidFill>
+                <a:effectLst/>
+                <a:uFillTx/>
+                <a:latin typeface="Calibri"/>
+                <a:ea typeface="Calibri"/>
+              </a:rPr>
+              <a:t>Nothing of yours is on it - not your Python, not your packages, not that one file you forgot to commit. That is why CI catches "but it works on my machine" when Docker alone does not.</a:t>
+            </a:r>
+            <a:endParaRPr lang="en-IN" sz="1500" b="0" u="none" strike="noStrike">
+              <a:solidFill>
+                <a:srgbClr val="000000"/>
+              </a:solidFill>
+              <a:effectLst/>
+              <a:uFillTx/>
+              <a:latin typeface="Arial"/>
+            </a:endParaRPr>
+          </a:p>
+        </p:txBody>
+      </p:sp>
+      <p:sp>
+        <p:nvSpPr>
+          <p:cNvPr id="287" name="Shape 19"/>
+          <p:cNvSpPr/>
+          <p:nvPr/>
+        </p:nvSpPr>
+        <p:spPr>
+          <a:xfrm>
+            <a:off x="548640" y="4617720"/>
+            <a:ext cx="11091240" cy="914040"/>
+          </a:xfrm>
+          <a:prstGeom prst="roundRect">
+            <a:avLst>
+              <a:gd name="adj" fmla="val 10000"/>
+            </a:avLst>
+          </a:prstGeom>
+          <a:solidFill>
+            <a:srgbClr val="EEF0FF"/>
+          </a:solidFill>
+          <a:ln w="12700">
+            <a:solidFill>
+              <a:srgbClr val="6366F1"/>
+            </a:solidFill>
+            <a:round/>
+          </a:ln>
+        </p:spPr>
+        <p:style>
+          <a:lnRef idx="0"/>
+          <a:fillRef idx="0"/>
+          <a:effectRef idx="0"/>
+          <a:fontRef idx="minor"/>
+        </p:style>
+        <p:txBody>
+          <a:bodyPr lIns="90000" tIns="45000" rIns="90000" bIns="45000" anchor="t">
+            <a:noAutofit/>
+          </a:bodyPr>
+          <a:p>
+            <a:endParaRPr lang="en-IN" sz="1800" b="0" u="none" strike="noStrike">
+              <a:solidFill>
+                <a:srgbClr val="000000"/>
+              </a:solidFill>
+              <a:effectLst/>
+              <a:uFillTx/>
+              <a:latin typeface="Arial"/>
+            </a:endParaRPr>
+          </a:p>
+        </p:txBody>
+      </p:sp>
+      <p:sp>
+        <p:nvSpPr>
+          <p:cNvPr id="288" name="Text 20"/>
+          <p:cNvSpPr/>
+          <p:nvPr/>
+        </p:nvSpPr>
+        <p:spPr>
+          <a:xfrm>
+            <a:off x="868680" y="4617720"/>
+            <a:ext cx="10423800" cy="914040"/>
+          </a:xfrm>
+          <a:prstGeom prst="rect">
+            <a:avLst/>
+          </a:prstGeom>
+          <a:noFill/>
+          <a:ln w="0">
+            <a:noFill/>
+          </a:ln>
+        </p:spPr>
+        <p:style>
+          <a:lnRef idx="0"/>
+          <a:fillRef idx="0"/>
+          <a:effectRef idx="0"/>
+          <a:fontRef idx="minor"/>
+        </p:style>
+        <p:txBody>
+          <a:bodyPr lIns="0" tIns="0" rIns="0" bIns="0" anchor="ctr">
+            <a:noAutofit/>
+          </a:bodyPr>
+          <a:p>
+            <a:pPr defTabSz="914400">
+              <a:lnSpc>
+                <a:spcPct val="100000"/>
+              </a:lnSpc>
+              <a:tabLst>
+                <a:tab pos="0" algn="l"/>
+              </a:tabLst>
+            </a:pPr>
+            <a:r>
+              <a:rPr lang="en-US" sz="1500" b="1" u="none" strike="noStrike">
+                <a:solidFill>
+                  <a:srgbClr val="6366F1"/>
+                </a:solidFill>
+                <a:effectLst/>
+                <a:uFillTx/>
+                <a:latin typeface="Calibri"/>
+                <a:ea typeface="Calibri"/>
+              </a:rPr>
+              <a:t>CI vs CD.  </a:t>
+            </a:r>
+            <a:r>
+              <a:rPr lang="en-US" sz="1500" b="0" u="none" strike="noStrike">
+                <a:solidFill>
+                  <a:srgbClr val="1E293B"/>
+                </a:solidFill>
+                <a:effectLst/>
+                <a:uFillTx/>
+                <a:latin typeface="Calibri"/>
+                <a:ea typeface="Calibri"/>
+              </a:rPr>
+              <a:t>Continuous INTEGRATION = the checks run on every push. Continuous DELIVERY/DEPLOYMENT = a green run ships it. You get CI today; Render's auto-deploy on push is already the CD half.</a:t>
+            </a:r>
+            <a:endParaRPr lang="en-IN" sz="1500" b="0" u="none" strike="noStrike">
+              <a:solidFill>
+                <a:srgbClr val="000000"/>
+              </a:solidFill>
+              <a:effectLst/>
+              <a:uFillTx/>
+              <a:latin typeface="Arial"/>
+            </a:endParaRPr>
+          </a:p>
+        </p:txBody>
+      </p:sp>
+      <p:sp>
+        <p:nvSpPr>
+          <p:cNvPr id="289" name="Text 21"/>
+          <p:cNvSpPr/>
+          <p:nvPr/>
+        </p:nvSpPr>
+        <p:spPr>
+          <a:xfrm>
+            <a:off x="548640" y="5669280"/>
+            <a:ext cx="10972440" cy="365400"/>
+          </a:xfrm>
+          <a:prstGeom prst="rect">
+            <a:avLst/>
+          </a:prstGeom>
+          <a:noFill/>
+          <a:ln w="0">
+            <a:noFill/>
+          </a:ln>
+        </p:spPr>
+        <p:style>
+          <a:lnRef idx="0"/>
+          <a:fillRef idx="0"/>
+          <a:effectRef idx="0"/>
+          <a:fontRef idx="minor"/>
+        </p:style>
+        <p:txBody>
+          <a:bodyPr lIns="0" tIns="0" rIns="0" bIns="0" anchor="ctr">
+            <a:noAutofit/>
+          </a:bodyPr>
+          <a:p>
+            <a:pPr defTabSz="914400">
+              <a:lnSpc>
+                <a:spcPct val="100000"/>
+              </a:lnSpc>
+              <a:tabLst>
+                <a:tab pos="0" algn="l"/>
+              </a:tabLst>
+            </a:pPr>
+            <a:r>
+              <a:rPr lang="en-US" sz="1500" b="1" u="none" strike="noStrike">
+                <a:solidFill>
+                  <a:srgbClr val="1E293B"/>
+                </a:solidFill>
+                <a:effectLst/>
+                <a:uFillTx/>
+                <a:latin typeface="Calibri"/>
+                <a:ea typeface="Calibri"/>
+              </a:rPr>
+              <a:t>Free for public repos. Your capstone qualifies.</a:t>
+            </a:r>
+            <a:endParaRPr lang="en-IN" sz="1500" b="0" u="none" strike="noStrike">
+              <a:solidFill>
+                <a:srgbClr val="000000"/>
+              </a:solidFill>
+              <a:effectLst/>
+              <a:uFillTx/>
+              <a:latin typeface="Arial"/>
+            </a:endParaRPr>
+          </a:p>
+        </p:txBody>
+      </p:sp>
+      <p:sp>
+        <p:nvSpPr>
+          <p:cNvPr id="290" name="Text 22"/>
+          <p:cNvSpPr/>
+          <p:nvPr/>
+        </p:nvSpPr>
+        <p:spPr>
+          <a:xfrm>
+            <a:off x="548640" y="6473880"/>
+            <a:ext cx="6857640" cy="228240"/>
+          </a:xfrm>
+          <a:prstGeom prst="rect">
+            <a:avLst/>
+          </a:prstGeom>
+          <a:noFill/>
+          <a:ln w="0">
+            <a:noFill/>
+          </a:ln>
+        </p:spPr>
+        <p:style>
+          <a:lnRef idx="0"/>
+          <a:fillRef idx="0"/>
+          <a:effectRef idx="0"/>
+          <a:fontRef idx="minor"/>
+        </p:style>
+        <p:txBody>
+          <a:bodyPr lIns="0" tIns="0" rIns="0" bIns="0" anchor="ctr">
+            <a:noAutofit/>
+          </a:bodyPr>
+          <a:p>
+            <a:pPr defTabSz="914400">
+              <a:lnSpc>
+                <a:spcPct val="100000"/>
+              </a:lnSpc>
+              <a:tabLst>
+                <a:tab pos="0" algn="l"/>
+              </a:tabLst>
+            </a:pPr>
+            <a:r>
+              <a:rPr lang="en-US" sz="900" b="0" u="none" strike="noStrike">
+                <a:solidFill>
+                  <a:srgbClr val="64748B"/>
+                </a:solidFill>
+                <a:effectLst/>
+                <a:uFillTx/>
+                <a:latin typeface="Calibri"/>
+                <a:ea typeface="Calibri"/>
+              </a:rPr>
+              <a:t>Auth, Docker &amp; Deploy  ·  hashing  ·  JWT  ·  roles  ·  Docker  ·  shipping it</a:t>
+            </a:r>
+            <a:endParaRPr lang="en-IN" sz="900" b="0" u="none" strike="noStrike">
+              <a:solidFill>
+                <a:srgbClr val="000000"/>
+              </a:solidFill>
+              <a:effectLst/>
+              <a:uFillTx/>
+              <a:latin typeface="Arial"/>
+            </a:endParaRPr>
+          </a:p>
+        </p:txBody>
+      </p:sp>
+      <p:sp>
+        <p:nvSpPr>
+          <p:cNvPr id="291" name="Text 23"/>
+          <p:cNvSpPr/>
+          <p:nvPr/>
+        </p:nvSpPr>
+        <p:spPr>
+          <a:xfrm>
+            <a:off x="11183040" y="6473880"/>
+            <a:ext cx="456840" cy="228240"/>
+          </a:xfrm>
+          <a:prstGeom prst="rect">
+            <a:avLst/>
+          </a:prstGeom>
+          <a:noFill/>
+          <a:ln w="0">
+            <a:noFill/>
+          </a:ln>
+        </p:spPr>
+        <p:style>
+          <a:lnRef idx="0"/>
+          <a:fillRef idx="0"/>
+          <a:effectRef idx="0"/>
+          <a:fontRef idx="minor"/>
+        </p:style>
+        <p:txBody>
+          <a:bodyPr lIns="0" tIns="0" rIns="0" bIns="0" anchor="ctr">
+            <a:noAutofit/>
+          </a:bodyPr>
+          <a:p>
+            <a:pPr algn="r" defTabSz="914400">
+              <a:lnSpc>
+                <a:spcPct val="100000"/>
+              </a:lnSpc>
+              <a:tabLst>
+                <a:tab pos="0" algn="l"/>
+              </a:tabLst>
+            </a:pPr>
+            <a:r>
+              <a:rPr lang="en-US" sz="900" b="0" u="none" strike="noStrike">
+                <a:solidFill>
+                  <a:srgbClr val="64748B"/>
+                </a:solidFill>
+                <a:effectLst/>
+                <a:uFillTx/>
+                <a:latin typeface="Calibri"/>
+                <a:ea typeface="Calibri"/>
+              </a:rPr>
+              <a:t>21</a:t>
+            </a:r>
+            <a:endParaRPr lang="en-IN" sz="900" b="0" u="none" strike="noStrike">
+              <a:solidFill>
+                <a:srgbClr val="000000"/>
+              </a:solidFill>
+              <a:effectLst/>
+              <a:uFillTx/>
+              <a:latin typeface="Arial"/>
+            </a:endParaRPr>
+          </a:p>
+        </p:txBody>
+      </p:sp>
+    </p:spTree>
+  </p:cSld>
+  <mc:AlternateContent>
+    <mc:Choice Requires="p14">
+      <p:transition spd="slow" p14:dur="2000"/>
+    </mc:Choice>
+    <mc:Fallback>
+      <p:transition spd="slow"/>
+    </mc:Fallback>
+  </mc:AlternateContent>
+</p:sld>
+</file>
+
+<file path=ppt/slides/slide22.xml><?xml version="1.0" encoding="utf-8"?>
+<p:sld xmlns:a="http://schemas.openxmlformats.org/drawingml/2006/main" xmlns:p="http://schemas.openxmlformats.org/presentationml/2006/main" xmlns:r="http://schemas.openxmlformats.org/officeDocument/2006/relationships" xmlns:p14="http://schemas.microsoft.com/office/powerpoint/2010/main" xmlns:p15="http://schemas.microsoft.com/office/powerpoint/2012/main" xmlns:mc="http://schemas.openxmlformats.org/markup-compatibility/2006">
+  <p:cSld>
+    <p:spTree>
+      <p:nvGrpSpPr>
+        <p:cNvPr id="1" name=""/>
+        <p:cNvGrpSpPr/>
+        <p:nvPr/>
+      </p:nvGrpSpPr>
+      <p:grpSpPr>
+        <a:xfrm>
+          <a:off x="0" y="0"/>
+          <a:ext cx="0" cy="0"/>
+          <a:chOff x="0" y="0"/>
+          <a:chExt cx="0" cy="0"/>
+        </a:xfrm>
+      </p:grpSpPr>
+      <p:sp>
+        <p:nvSpPr>
+          <p:cNvPr id="292" name="Text 0"/>
+          <p:cNvSpPr/>
+          <p:nvPr/>
+        </p:nvSpPr>
+        <p:spPr>
+          <a:xfrm>
+            <a:off x="548640" y="457200"/>
+            <a:ext cx="11091240" cy="731160"/>
+          </a:xfrm>
+          <a:prstGeom prst="rect">
+            <a:avLst/>
+          </a:prstGeom>
+          <a:noFill/>
+          <a:ln w="0">
+            <a:noFill/>
+          </a:ln>
+        </p:spPr>
+        <p:style>
+          <a:lnRef idx="0"/>
+          <a:fillRef idx="0"/>
+          <a:effectRef idx="0"/>
+          <a:fontRef idx="minor"/>
+        </p:style>
+        <p:txBody>
+          <a:bodyPr lIns="0" tIns="0" rIns="0" bIns="0" anchor="ctr">
+            <a:noAutofit/>
+          </a:bodyPr>
+          <a:p>
+            <a:pPr defTabSz="914400">
+              <a:lnSpc>
+                <a:spcPct val="100000"/>
+              </a:lnSpc>
+              <a:tabLst>
+                <a:tab pos="0" algn="l"/>
+              </a:tabLst>
+            </a:pPr>
+            <a:r>
+              <a:rPr lang="en-US" sz="3000" b="1" u="none" strike="noStrike">
+                <a:solidFill>
+                  <a:srgbClr val="1E293B"/>
+                </a:solidFill>
+                <a:effectLst/>
+                <a:uFillTx/>
+                <a:latin typeface="Calibri"/>
+                <a:ea typeface="Calibri"/>
+              </a:rPr>
+              <a:t>One file. Three questions.</a:t>
+            </a:r>
+            <a:endParaRPr lang="en-IN" sz="3000" b="0" u="none" strike="noStrike">
+              <a:solidFill>
+                <a:srgbClr val="000000"/>
+              </a:solidFill>
+              <a:effectLst/>
+              <a:uFillTx/>
+              <a:latin typeface="Arial"/>
+            </a:endParaRPr>
+          </a:p>
+        </p:txBody>
+      </p:sp>
+      <p:sp>
+        <p:nvSpPr>
+          <p:cNvPr id="293" name="Text 1"/>
+          <p:cNvSpPr/>
+          <p:nvPr/>
+        </p:nvSpPr>
+        <p:spPr>
+          <a:xfrm>
+            <a:off x="548640" y="1188720"/>
+            <a:ext cx="10972440" cy="365400"/>
+          </a:xfrm>
+          <a:prstGeom prst="rect">
+            <a:avLst/>
+          </a:prstGeom>
+          <a:noFill/>
+          <a:ln w="0">
+            <a:noFill/>
+          </a:ln>
+        </p:spPr>
+        <p:style>
+          <a:lnRef idx="0"/>
+          <a:fillRef idx="0"/>
+          <a:effectRef idx="0"/>
+          <a:fontRef idx="minor"/>
+        </p:style>
+        <p:txBody>
+          <a:bodyPr lIns="0" tIns="0" rIns="0" bIns="0" anchor="ctr">
+            <a:noAutofit/>
+          </a:bodyPr>
+          <a:p>
+            <a:pPr defTabSz="914400">
+              <a:lnSpc>
+                <a:spcPct val="100000"/>
+              </a:lnSpc>
+              <a:tabLst>
+                <a:tab pos="0" algn="l"/>
+              </a:tabLst>
+            </a:pPr>
+            <a:r>
+              <a:rPr lang="en-US" sz="1500" b="0" i="1" u="none" strike="noStrike">
+                <a:solidFill>
+                  <a:srgbClr val="64748B"/>
+                </a:solidFill>
+                <a:effectLst/>
+                <a:uFillTx/>
+                <a:latin typeface="Calibri"/>
+                <a:ea typeface="Calibri"/>
+              </a:rPr>
+              <a:t>It must live at .github/workflows/ - GitHub looks nowhere else, and warns you about nothing.</a:t>
+            </a:r>
+            <a:endParaRPr lang="en-IN" sz="1500" b="0" u="none" strike="noStrike">
+              <a:solidFill>
+                <a:srgbClr val="000000"/>
+              </a:solidFill>
+              <a:effectLst/>
+              <a:uFillTx/>
+              <a:latin typeface="Arial"/>
+            </a:endParaRPr>
+          </a:p>
+        </p:txBody>
+      </p:sp>
+      <p:sp>
+        <p:nvSpPr>
+          <p:cNvPr id="294" name="Shape 2"/>
+          <p:cNvSpPr/>
+          <p:nvPr/>
+        </p:nvSpPr>
+        <p:spPr>
+          <a:xfrm>
+            <a:off x="548640" y="1600200"/>
+            <a:ext cx="6949080" cy="3017160"/>
+          </a:xfrm>
+          <a:prstGeom prst="roundRect">
+            <a:avLst>
+              <a:gd name="adj" fmla="val 1818"/>
             </a:avLst>
           </a:prstGeom>
           <a:solidFill>
@@ -15065,14 +16311,14 @@
       </p:sp>
       <p:sp>
         <p:nvSpPr>
-          <p:cNvPr id="284" name="Text 2"/>
-          <p:cNvSpPr/>
-          <p:nvPr/>
-        </p:nvSpPr>
-        <p:spPr>
-          <a:xfrm>
-            <a:off x="804600" y="1737360"/>
-            <a:ext cx="10579320" cy="411120"/>
+          <p:cNvPr id="295" name="Text 3"/>
+          <p:cNvSpPr/>
+          <p:nvPr/>
+        </p:nvSpPr>
+        <p:spPr>
+          <a:xfrm>
+            <a:off x="804600" y="1783080"/>
+            <a:ext cx="6437160" cy="2651400"/>
           </a:xfrm>
           <a:prstGeom prst="rect">
             <a:avLst/>
@@ -15102,7 +16348,7 @@
               </a:tabLst>
             </a:pPr>
             <a:r>
-              <a:rPr lang="en-US" sz="1250" b="0" u="none" strike="noStrike">
+              <a:rPr lang="en-US" sz="1200" b="0" u="none" strike="noStrike">
                 <a:solidFill>
                   <a:srgbClr val="1E293B"/>
                 </a:solidFill>
@@ -15111,9 +16357,9 @@
                 <a:latin typeface="Courier New"/>
                 <a:ea typeface="Courier New"/>
               </a:rPr>
-              <a:t>class Student:                                      https://your-api.onrender.com/docs</a:t>
-            </a:r>
-            <a:endParaRPr lang="en-IN" sz="1250" b="0" u="none" strike="noStrike">
+              <a:t>name: CI</a:t>
+            </a:r>
+            <a:endParaRPr lang="en-IN" sz="1200" b="0" u="none" strike="noStrike">
               <a:solidFill>
                 <a:srgbClr val="000000"/>
               </a:solidFill>
@@ -15131,8 +16377,26 @@
                 <a:tab pos="0" algn="l"/>
               </a:tabLst>
             </a:pPr>
-            <a:r>
-              <a:rPr lang="en-US" sz="1250" b="0" u="none" strike="noStrike">
+            <a:endParaRPr lang="en-IN" sz="1200" b="0" u="none" strike="noStrike">
+              <a:solidFill>
+                <a:srgbClr val="000000"/>
+              </a:solidFill>
+              <a:effectLst/>
+              <a:uFillTx/>
+              <a:latin typeface="Arial"/>
+            </a:endParaRPr>
+          </a:p>
+          <a:p>
+            <a:pPr defTabSz="914400">
+              <a:lnSpc>
+                <a:spcPct val="115000"/>
+              </a:lnSpc>
+              <a:tabLst>
+                <a:tab pos="0" algn="l"/>
+              </a:tabLst>
+            </a:pPr>
+            <a:r>
+              <a:rPr lang="en-US" sz="1200" b="0" u="none" strike="noStrike">
                 <a:solidFill>
                   <a:srgbClr val="1E293B"/>
                 </a:solidFill>
@@ -15141,7 +16405,634 @@
                 <a:latin typeface="Courier New"/>
                 <a:ea typeface="Courier New"/>
               </a:rPr>
-              <a:t>    def __init__(self, name): ...          ----&gt;     behind a login, on a real database</a:t>
+              <a:t>on:                        # WHEN does it run?</a:t>
+            </a:r>
+            <a:endParaRPr lang="en-IN" sz="1200" b="0" u="none" strike="noStrike">
+              <a:solidFill>
+                <a:srgbClr val="000000"/>
+              </a:solidFill>
+              <a:effectLst/>
+              <a:uFillTx/>
+              <a:latin typeface="Arial"/>
+            </a:endParaRPr>
+          </a:p>
+          <a:p>
+            <a:pPr defTabSz="914400">
+              <a:lnSpc>
+                <a:spcPct val="115000"/>
+              </a:lnSpc>
+              <a:tabLst>
+                <a:tab pos="0" algn="l"/>
+              </a:tabLst>
+            </a:pPr>
+            <a:r>
+              <a:rPr lang="en-US" sz="1200" b="0" u="none" strike="noStrike">
+                <a:solidFill>
+                  <a:srgbClr val="1E293B"/>
+                </a:solidFill>
+                <a:effectLst/>
+                <a:uFillTx/>
+                <a:latin typeface="Courier New"/>
+                <a:ea typeface="Courier New"/>
+              </a:rPr>
+              <a:t>  push:</a:t>
+            </a:r>
+            <a:endParaRPr lang="en-IN" sz="1200" b="0" u="none" strike="noStrike">
+              <a:solidFill>
+                <a:srgbClr val="000000"/>
+              </a:solidFill>
+              <a:effectLst/>
+              <a:uFillTx/>
+              <a:latin typeface="Arial"/>
+            </a:endParaRPr>
+          </a:p>
+          <a:p>
+            <a:pPr defTabSz="914400">
+              <a:lnSpc>
+                <a:spcPct val="115000"/>
+              </a:lnSpc>
+              <a:tabLst>
+                <a:tab pos="0" algn="l"/>
+              </a:tabLst>
+            </a:pPr>
+            <a:r>
+              <a:rPr lang="en-US" sz="1200" b="0" u="none" strike="noStrike">
+                <a:solidFill>
+                  <a:srgbClr val="1E293B"/>
+                </a:solidFill>
+                <a:effectLst/>
+                <a:uFillTx/>
+                <a:latin typeface="Courier New"/>
+                <a:ea typeface="Courier New"/>
+              </a:rPr>
+              <a:t>    branches: [main]</a:t>
+            </a:r>
+            <a:endParaRPr lang="en-IN" sz="1200" b="0" u="none" strike="noStrike">
+              <a:solidFill>
+                <a:srgbClr val="000000"/>
+              </a:solidFill>
+              <a:effectLst/>
+              <a:uFillTx/>
+              <a:latin typeface="Arial"/>
+            </a:endParaRPr>
+          </a:p>
+          <a:p>
+            <a:pPr defTabSz="914400">
+              <a:lnSpc>
+                <a:spcPct val="115000"/>
+              </a:lnSpc>
+              <a:tabLst>
+                <a:tab pos="0" algn="l"/>
+              </a:tabLst>
+            </a:pPr>
+            <a:r>
+              <a:rPr lang="en-US" sz="1200" b="0" u="none" strike="noStrike">
+                <a:solidFill>
+                  <a:srgbClr val="1E293B"/>
+                </a:solidFill>
+                <a:effectLst/>
+                <a:uFillTx/>
+                <a:latin typeface="Courier New"/>
+                <a:ea typeface="Courier New"/>
+              </a:rPr>
+              <a:t>  pull_request:</a:t>
+            </a:r>
+            <a:endParaRPr lang="en-IN" sz="1200" b="0" u="none" strike="noStrike">
+              <a:solidFill>
+                <a:srgbClr val="000000"/>
+              </a:solidFill>
+              <a:effectLst/>
+              <a:uFillTx/>
+              <a:latin typeface="Arial"/>
+            </a:endParaRPr>
+          </a:p>
+          <a:p>
+            <a:pPr defTabSz="914400">
+              <a:lnSpc>
+                <a:spcPct val="115000"/>
+              </a:lnSpc>
+              <a:tabLst>
+                <a:tab pos="0" algn="l"/>
+              </a:tabLst>
+            </a:pPr>
+            <a:endParaRPr lang="en-IN" sz="1200" b="0" u="none" strike="noStrike">
+              <a:solidFill>
+                <a:srgbClr val="000000"/>
+              </a:solidFill>
+              <a:effectLst/>
+              <a:uFillTx/>
+              <a:latin typeface="Arial"/>
+            </a:endParaRPr>
+          </a:p>
+          <a:p>
+            <a:pPr defTabSz="914400">
+              <a:lnSpc>
+                <a:spcPct val="115000"/>
+              </a:lnSpc>
+              <a:tabLst>
+                <a:tab pos="0" algn="l"/>
+              </a:tabLst>
+            </a:pPr>
+            <a:r>
+              <a:rPr lang="en-US" sz="1200" b="0" u="none" strike="noStrike">
+                <a:solidFill>
+                  <a:srgbClr val="1E293B"/>
+                </a:solidFill>
+                <a:effectLst/>
+                <a:uFillTx/>
+                <a:latin typeface="Courier New"/>
+                <a:ea typeface="Courier New"/>
+              </a:rPr>
+              <a:t>jobs:</a:t>
+            </a:r>
+            <a:endParaRPr lang="en-IN" sz="1200" b="0" u="none" strike="noStrike">
+              <a:solidFill>
+                <a:srgbClr val="000000"/>
+              </a:solidFill>
+              <a:effectLst/>
+              <a:uFillTx/>
+              <a:latin typeface="Arial"/>
+            </a:endParaRPr>
+          </a:p>
+          <a:p>
+            <a:pPr defTabSz="914400">
+              <a:lnSpc>
+                <a:spcPct val="115000"/>
+              </a:lnSpc>
+              <a:tabLst>
+                <a:tab pos="0" algn="l"/>
+              </a:tabLst>
+            </a:pPr>
+            <a:r>
+              <a:rPr lang="en-US" sz="1200" b="0" u="none" strike="noStrike">
+                <a:solidFill>
+                  <a:srgbClr val="1E293B"/>
+                </a:solidFill>
+                <a:effectLst/>
+                <a:uFillTx/>
+                <a:latin typeface="Courier New"/>
+                <a:ea typeface="Courier New"/>
+              </a:rPr>
+              <a:t>  check:</a:t>
+            </a:r>
+            <a:endParaRPr lang="en-IN" sz="1200" b="0" u="none" strike="noStrike">
+              <a:solidFill>
+                <a:srgbClr val="000000"/>
+              </a:solidFill>
+              <a:effectLst/>
+              <a:uFillTx/>
+              <a:latin typeface="Arial"/>
+            </a:endParaRPr>
+          </a:p>
+          <a:p>
+            <a:pPr defTabSz="914400">
+              <a:lnSpc>
+                <a:spcPct val="115000"/>
+              </a:lnSpc>
+              <a:tabLst>
+                <a:tab pos="0" algn="l"/>
+              </a:tabLst>
+            </a:pPr>
+            <a:r>
+              <a:rPr lang="en-US" sz="1200" b="0" u="none" strike="noStrike">
+                <a:solidFill>
+                  <a:srgbClr val="1E293B"/>
+                </a:solidFill>
+                <a:effectLst/>
+                <a:uFillTx/>
+                <a:latin typeface="Courier New"/>
+                <a:ea typeface="Courier New"/>
+              </a:rPr>
+              <a:t>    runs-on: ubuntu-latest   # WHERE does it run?</a:t>
+            </a:r>
+            <a:endParaRPr lang="en-IN" sz="1200" b="0" u="none" strike="noStrike">
+              <a:solidFill>
+                <a:srgbClr val="000000"/>
+              </a:solidFill>
+              <a:effectLst/>
+              <a:uFillTx/>
+              <a:latin typeface="Arial"/>
+            </a:endParaRPr>
+          </a:p>
+          <a:p>
+            <a:pPr defTabSz="914400">
+              <a:lnSpc>
+                <a:spcPct val="115000"/>
+              </a:lnSpc>
+              <a:tabLst>
+                <a:tab pos="0" algn="l"/>
+              </a:tabLst>
+            </a:pPr>
+            <a:r>
+              <a:rPr lang="en-US" sz="1200" b="0" u="none" strike="noStrike">
+                <a:solidFill>
+                  <a:srgbClr val="1E293B"/>
+                </a:solidFill>
+                <a:effectLst/>
+                <a:uFillTx/>
+                <a:latin typeface="Courier New"/>
+                <a:ea typeface="Courier New"/>
+              </a:rPr>
+              <a:t>    steps:                   # WHAT does it do?</a:t>
+            </a:r>
+            <a:endParaRPr lang="en-IN" sz="1200" b="0" u="none" strike="noStrike">
+              <a:solidFill>
+                <a:srgbClr val="000000"/>
+              </a:solidFill>
+              <a:effectLst/>
+              <a:uFillTx/>
+              <a:latin typeface="Arial"/>
+            </a:endParaRPr>
+          </a:p>
+          <a:p>
+            <a:pPr defTabSz="914400">
+              <a:lnSpc>
+                <a:spcPct val="115000"/>
+              </a:lnSpc>
+              <a:tabLst>
+                <a:tab pos="0" algn="l"/>
+              </a:tabLst>
+            </a:pPr>
+            <a:r>
+              <a:rPr lang="en-US" sz="1200" b="0" u="none" strike="noStrike">
+                <a:solidFill>
+                  <a:srgbClr val="1E293B"/>
+                </a:solidFill>
+                <a:effectLst/>
+                <a:uFillTx/>
+                <a:latin typeface="Courier New"/>
+                <a:ea typeface="Courier New"/>
+              </a:rPr>
+              <a:t>      - uses: actions/checkout@v7</a:t>
+            </a:r>
+            <a:endParaRPr lang="en-IN" sz="1200" b="0" u="none" strike="noStrike">
+              <a:solidFill>
+                <a:srgbClr val="000000"/>
+              </a:solidFill>
+              <a:effectLst/>
+              <a:uFillTx/>
+              <a:latin typeface="Arial"/>
+            </a:endParaRPr>
+          </a:p>
+          <a:p>
+            <a:pPr defTabSz="914400">
+              <a:lnSpc>
+                <a:spcPct val="115000"/>
+              </a:lnSpc>
+              <a:tabLst>
+                <a:tab pos="0" algn="l"/>
+              </a:tabLst>
+            </a:pPr>
+            <a:r>
+              <a:rPr lang="en-US" sz="1200" b="0" u="none" strike="noStrike">
+                <a:solidFill>
+                  <a:srgbClr val="1E293B"/>
+                </a:solidFill>
+                <a:effectLst/>
+                <a:uFillTx/>
+                <a:latin typeface="Courier New"/>
+                <a:ea typeface="Courier New"/>
+              </a:rPr>
+              <a:t>      - run: uv sync --frozen</a:t>
+            </a:r>
+            <a:endParaRPr lang="en-IN" sz="1200" b="0" u="none" strike="noStrike">
+              <a:solidFill>
+                <a:srgbClr val="000000"/>
+              </a:solidFill>
+              <a:effectLst/>
+              <a:uFillTx/>
+              <a:latin typeface="Arial"/>
+            </a:endParaRPr>
+          </a:p>
+        </p:txBody>
+      </p:sp>
+      <p:sp>
+        <p:nvSpPr>
+          <p:cNvPr id="296" name="Shape 4"/>
+          <p:cNvSpPr/>
+          <p:nvPr/>
+        </p:nvSpPr>
+        <p:spPr>
+          <a:xfrm>
+            <a:off x="7863840" y="1600200"/>
+            <a:ext cx="3776040" cy="3017160"/>
+          </a:xfrm>
+          <a:prstGeom prst="roundRect">
+            <a:avLst>
+              <a:gd name="adj" fmla="val 3030"/>
+            </a:avLst>
+          </a:prstGeom>
+          <a:solidFill>
+            <a:srgbClr val="F1F5F9"/>
+          </a:solidFill>
+          <a:ln w="12700">
+            <a:solidFill>
+              <a:srgbClr val="E2E8F0"/>
+            </a:solidFill>
+            <a:round/>
+          </a:ln>
+        </p:spPr>
+        <p:style>
+          <a:lnRef idx="0"/>
+          <a:fillRef idx="0"/>
+          <a:effectRef idx="0"/>
+          <a:fontRef idx="minor"/>
+        </p:style>
+        <p:txBody>
+          <a:bodyPr lIns="90000" tIns="45000" rIns="90000" bIns="45000" anchor="t">
+            <a:noAutofit/>
+          </a:bodyPr>
+          <a:p>
+            <a:endParaRPr lang="en-IN" sz="1800" b="0" u="none" strike="noStrike">
+              <a:solidFill>
+                <a:srgbClr val="000000"/>
+              </a:solidFill>
+              <a:effectLst/>
+              <a:uFillTx/>
+              <a:latin typeface="Arial"/>
+            </a:endParaRPr>
+          </a:p>
+        </p:txBody>
+      </p:sp>
+      <p:sp>
+        <p:nvSpPr>
+          <p:cNvPr id="297" name="Text 5"/>
+          <p:cNvSpPr/>
+          <p:nvPr/>
+        </p:nvSpPr>
+        <p:spPr>
+          <a:xfrm>
+            <a:off x="8138160" y="1783080"/>
+            <a:ext cx="3291480" cy="365400"/>
+          </a:xfrm>
+          <a:prstGeom prst="rect">
+            <a:avLst/>
+          </a:prstGeom>
+          <a:noFill/>
+          <a:ln w="0">
+            <a:noFill/>
+          </a:ln>
+        </p:spPr>
+        <p:style>
+          <a:lnRef idx="0"/>
+          <a:fillRef idx="0"/>
+          <a:effectRef idx="0"/>
+          <a:fontRef idx="minor"/>
+        </p:style>
+        <p:txBody>
+          <a:bodyPr lIns="0" tIns="0" rIns="0" bIns="0" anchor="ctr">
+            <a:noAutofit/>
+          </a:bodyPr>
+          <a:p>
+            <a:pPr defTabSz="914400">
+              <a:lnSpc>
+                <a:spcPct val="100000"/>
+              </a:lnSpc>
+              <a:tabLst>
+                <a:tab pos="0" algn="l"/>
+              </a:tabLst>
+            </a:pPr>
+            <a:r>
+              <a:rPr lang="en-US" sz="1600" b="1" u="none" strike="noStrike">
+                <a:solidFill>
+                  <a:srgbClr val="6366F1"/>
+                </a:solidFill>
+                <a:effectLst/>
+                <a:uFillTx/>
+                <a:latin typeface="Calibri"/>
+                <a:ea typeface="Calibri"/>
+              </a:rPr>
+              <a:t>uses  vs  run</a:t>
+            </a:r>
+            <a:endParaRPr lang="en-IN" sz="1600" b="0" u="none" strike="noStrike">
+              <a:solidFill>
+                <a:srgbClr val="000000"/>
+              </a:solidFill>
+              <a:effectLst/>
+              <a:uFillTx/>
+              <a:latin typeface="Arial"/>
+            </a:endParaRPr>
+          </a:p>
+        </p:txBody>
+      </p:sp>
+      <p:sp>
+        <p:nvSpPr>
+          <p:cNvPr id="298" name="Text 6"/>
+          <p:cNvSpPr/>
+          <p:nvPr/>
+        </p:nvSpPr>
+        <p:spPr>
+          <a:xfrm>
+            <a:off x="8138160" y="2240280"/>
+            <a:ext cx="3291480" cy="1371240"/>
+          </a:xfrm>
+          <a:prstGeom prst="rect">
+            <a:avLst/>
+          </a:prstGeom>
+          <a:noFill/>
+          <a:ln w="0">
+            <a:noFill/>
+          </a:ln>
+        </p:spPr>
+        <p:style>
+          <a:lnRef idx="0"/>
+          <a:fillRef idx="0"/>
+          <a:effectRef idx="0"/>
+          <a:fontRef idx="minor"/>
+        </p:style>
+        <p:txBody>
+          <a:bodyPr lIns="0" tIns="0" rIns="0" bIns="0" anchor="ctr">
+            <a:noAutofit/>
+          </a:bodyPr>
+          <a:p>
+            <a:r>
+              <a:rPr lang="en-US" sz="1350" b="1" u="none" strike="noStrike">
+                <a:solidFill>
+                  <a:srgbClr val="6366F1"/>
+                </a:solidFill>
+                <a:effectLst/>
+                <a:uFillTx/>
+                <a:latin typeface="Courier New"/>
+                <a:ea typeface="Courier New"/>
+              </a:rPr>
+              <a:t>uses:</a:t>
+            </a:r>
+            <a:r>
+              <a:rPr lang="en-US" sz="1350" b="0" u="none" strike="noStrike">
+                <a:solidFill>
+                  <a:srgbClr val="1E293B"/>
+                </a:solidFill>
+                <a:effectLst/>
+                <a:uFillTx/>
+                <a:latin typeface="Calibri"/>
+                <a:ea typeface="Calibri"/>
+              </a:rPr>
+              <a:t>  borrow a step</a:t>
+            </a:r>
+            <a:endParaRPr lang="en-IN" sz="1350" b="0" u="none" strike="noStrike">
+              <a:solidFill>
+                <a:srgbClr val="000000"/>
+              </a:solidFill>
+              <a:effectLst/>
+              <a:uFillTx/>
+              <a:latin typeface="Arial"/>
+            </a:endParaRPr>
+          </a:p>
+          <a:p>
+            <a:r>
+              <a:rPr lang="en-US" sz="1350" b="0" u="none" strike="noStrike">
+                <a:solidFill>
+                  <a:srgbClr val="1E293B"/>
+                </a:solidFill>
+                <a:effectLst/>
+                <a:uFillTx/>
+                <a:latin typeface="Calibri"/>
+                <a:ea typeface="Calibri"/>
+              </a:rPr>
+              <a:t>         someone published</a:t>
+            </a:r>
+            <a:endParaRPr lang="en-IN" sz="1350" b="0" u="none" strike="noStrike">
+              <a:solidFill>
+                <a:srgbClr val="000000"/>
+              </a:solidFill>
+              <a:effectLst/>
+              <a:uFillTx/>
+              <a:latin typeface="Arial"/>
+            </a:endParaRPr>
+          </a:p>
+          <a:p>
+            <a:endParaRPr lang="en-IN" sz="1350" b="0" u="none" strike="noStrike">
+              <a:solidFill>
+                <a:srgbClr val="000000"/>
+              </a:solidFill>
+              <a:effectLst/>
+              <a:uFillTx/>
+              <a:latin typeface="Arial"/>
+            </a:endParaRPr>
+          </a:p>
+          <a:p>
+            <a:pPr defTabSz="914400">
+              <a:lnSpc>
+                <a:spcPct val="100000"/>
+              </a:lnSpc>
+              <a:tabLst>
+                <a:tab pos="0" algn="l"/>
+              </a:tabLst>
+            </a:pPr>
+            <a:r>
+              <a:rPr lang="en-US" sz="1350" b="1" u="none" strike="noStrike">
+                <a:solidFill>
+                  <a:srgbClr val="0891B2"/>
+                </a:solidFill>
+                <a:effectLst/>
+                <a:uFillTx/>
+                <a:latin typeface="Courier New"/>
+                <a:ea typeface="Courier New"/>
+              </a:rPr>
+              <a:t>run:</a:t>
+            </a:r>
+            <a:r>
+              <a:rPr lang="en-US" sz="1350" b="0" u="none" strike="noStrike">
+                <a:solidFill>
+                  <a:srgbClr val="1E293B"/>
+                </a:solidFill>
+                <a:effectLst/>
+                <a:uFillTx/>
+                <a:latin typeface="Calibri"/>
+                <a:ea typeface="Calibri"/>
+              </a:rPr>
+              <a:t>   your own shell</a:t>
+            </a:r>
+            <a:endParaRPr lang="en-IN" sz="1350" b="0" u="none" strike="noStrike">
+              <a:solidFill>
+                <a:srgbClr val="000000"/>
+              </a:solidFill>
+              <a:effectLst/>
+              <a:uFillTx/>
+              <a:latin typeface="Arial"/>
+            </a:endParaRPr>
+          </a:p>
+          <a:p>
+            <a:pPr defTabSz="914400">
+              <a:lnSpc>
+                <a:spcPct val="100000"/>
+              </a:lnSpc>
+              <a:tabLst>
+                <a:tab pos="0" algn="l"/>
+              </a:tabLst>
+            </a:pPr>
+            <a:r>
+              <a:rPr lang="en-US" sz="1350" b="0" u="none" strike="noStrike">
+                <a:solidFill>
+                  <a:srgbClr val="1E293B"/>
+                </a:solidFill>
+                <a:effectLst/>
+                <a:uFillTx/>
+                <a:latin typeface="Calibri"/>
+                <a:ea typeface="Calibri"/>
+              </a:rPr>
+              <a:t>         command</a:t>
+            </a:r>
+            <a:endParaRPr lang="en-IN" sz="1350" b="0" u="none" strike="noStrike">
+              <a:solidFill>
+                <a:srgbClr val="000000"/>
+              </a:solidFill>
+              <a:effectLst/>
+              <a:uFillTx/>
+              <a:latin typeface="Arial"/>
+            </a:endParaRPr>
+          </a:p>
+        </p:txBody>
+      </p:sp>
+      <p:sp>
+        <p:nvSpPr>
+          <p:cNvPr id="299" name="Text 7"/>
+          <p:cNvSpPr/>
+          <p:nvPr/>
+        </p:nvSpPr>
+        <p:spPr>
+          <a:xfrm>
+            <a:off x="8138160" y="3794760"/>
+            <a:ext cx="3291480" cy="365400"/>
+          </a:xfrm>
+          <a:prstGeom prst="rect">
+            <a:avLst/>
+          </a:prstGeom>
+          <a:noFill/>
+          <a:ln w="0">
+            <a:noFill/>
+          </a:ln>
+        </p:spPr>
+        <p:style>
+          <a:lnRef idx="0"/>
+          <a:fillRef idx="0"/>
+          <a:effectRef idx="0"/>
+          <a:fontRef idx="minor"/>
+        </p:style>
+        <p:txBody>
+          <a:bodyPr lIns="0" tIns="0" rIns="0" bIns="0" anchor="ctr">
+            <a:noAutofit/>
+          </a:bodyPr>
+          <a:p>
+            <a:pPr defTabSz="914400">
+              <a:lnSpc>
+                <a:spcPct val="100000"/>
+              </a:lnSpc>
+              <a:tabLst>
+                <a:tab pos="0" algn="l"/>
+              </a:tabLst>
+            </a:pPr>
+            <a:r>
+              <a:rPr lang="en-US" sz="1250" b="0" i="1" u="none" strike="noStrike">
+                <a:solidFill>
+                  <a:srgbClr val="64748B"/>
+                </a:solidFill>
+                <a:effectLst/>
+                <a:uFillTx/>
+                <a:latin typeface="Calibri"/>
+                <a:ea typeface="Calibri"/>
+              </a:rPr>
+              <a:t>Never both in one step.</a:t>
             </a:r>
             <a:endParaRPr lang="en-IN" sz="1250" b="0" u="none" strike="noStrike">
               <a:solidFill>
@@ -15156,18 +17047,1900 @@
       </p:sp>
       <p:sp>
         <p:nvSpPr>
-          <p:cNvPr id="285" name="Shape 3"/>
-          <p:cNvSpPr/>
-          <p:nvPr/>
-        </p:nvSpPr>
-        <p:spPr>
-          <a:xfrm>
-            <a:off x="548640" y="2560320"/>
+          <p:cNvPr id="300" name="Shape 8"/>
+          <p:cNvSpPr/>
+          <p:nvPr/>
+        </p:nvSpPr>
+        <p:spPr>
+          <a:xfrm>
+            <a:off x="548640" y="4754880"/>
+            <a:ext cx="11091240" cy="1005480"/>
+          </a:xfrm>
+          <a:prstGeom prst="roundRect">
+            <a:avLst>
+              <a:gd name="adj" fmla="val 9091"/>
+            </a:avLst>
+          </a:prstGeom>
+          <a:solidFill>
+            <a:srgbClr val="FFFBEB"/>
+          </a:solidFill>
+          <a:ln w="12700">
+            <a:solidFill>
+              <a:srgbClr val="FDE68A"/>
+            </a:solidFill>
+            <a:round/>
+          </a:ln>
+        </p:spPr>
+        <p:style>
+          <a:lnRef idx="0"/>
+          <a:fillRef idx="0"/>
+          <a:effectRef idx="0"/>
+          <a:fontRef idx="minor"/>
+        </p:style>
+        <p:txBody>
+          <a:bodyPr lIns="90000" tIns="45000" rIns="90000" bIns="45000" anchor="t">
+            <a:noAutofit/>
+          </a:bodyPr>
+          <a:p>
+            <a:endParaRPr lang="en-IN" sz="1800" b="0" u="none" strike="noStrike">
+              <a:solidFill>
+                <a:srgbClr val="000000"/>
+              </a:solidFill>
+              <a:effectLst/>
+              <a:uFillTx/>
+              <a:latin typeface="Arial"/>
+            </a:endParaRPr>
+          </a:p>
+        </p:txBody>
+      </p:sp>
+      <p:sp>
+        <p:nvSpPr>
+          <p:cNvPr id="301" name="Text 9"/>
+          <p:cNvSpPr/>
+          <p:nvPr/>
+        </p:nvSpPr>
+        <p:spPr>
+          <a:xfrm>
+            <a:off x="868680" y="4754880"/>
+            <a:ext cx="10423800" cy="1005480"/>
+          </a:xfrm>
+          <a:prstGeom prst="rect">
+            <a:avLst/>
+          </a:prstGeom>
+          <a:noFill/>
+          <a:ln w="0">
+            <a:noFill/>
+          </a:ln>
+        </p:spPr>
+        <p:style>
+          <a:lnRef idx="0"/>
+          <a:fillRef idx="0"/>
+          <a:effectRef idx="0"/>
+          <a:fontRef idx="minor"/>
+        </p:style>
+        <p:txBody>
+          <a:bodyPr lIns="0" tIns="0" rIns="0" bIns="0" anchor="ctr">
+            <a:noAutofit/>
+          </a:bodyPr>
+          <a:p>
+            <a:pPr defTabSz="914400">
+              <a:lnSpc>
+                <a:spcPct val="100000"/>
+              </a:lnSpc>
+              <a:tabLst>
+                <a:tab pos="0" algn="l"/>
+              </a:tabLst>
+            </a:pPr>
+            <a:r>
+              <a:rPr lang="en-US" sz="1500" b="1" u="none" strike="noStrike">
+                <a:solidFill>
+                  <a:srgbClr val="B45309"/>
+                </a:solidFill>
+                <a:effectLst/>
+                <a:uFillTx/>
+                <a:latin typeface="Calibri"/>
+                <a:ea typeface="Calibri"/>
+              </a:rPr>
+              <a:t>Every JOB is a different machine.  </a:t>
+            </a:r>
+            <a:r>
+              <a:rPr lang="en-US" sz="1500" b="0" u="none" strike="noStrike">
+                <a:solidFill>
+                  <a:srgbClr val="1E293B"/>
+                </a:solidFill>
+                <a:effectLst/>
+                <a:uFillTx/>
+                <a:latin typeface="Calibri"/>
+                <a:ea typeface="Calibri"/>
+              </a:rPr>
+              <a:t>They share nothing - not files, not installed packages. Jobs run in parallel by default; needs: forces an order. And the first step is almost always checkout, because the machine does not have your code.</a:t>
+            </a:r>
+            <a:endParaRPr lang="en-IN" sz="1500" b="0" u="none" strike="noStrike">
+              <a:solidFill>
+                <a:srgbClr val="000000"/>
+              </a:solidFill>
+              <a:effectLst/>
+              <a:uFillTx/>
+              <a:latin typeface="Arial"/>
+            </a:endParaRPr>
+          </a:p>
+        </p:txBody>
+      </p:sp>
+      <p:sp>
+        <p:nvSpPr>
+          <p:cNvPr id="302" name="Text 10"/>
+          <p:cNvSpPr/>
+          <p:nvPr/>
+        </p:nvSpPr>
+        <p:spPr>
+          <a:xfrm>
+            <a:off x="548640" y="5897880"/>
+            <a:ext cx="10972440" cy="365400"/>
+          </a:xfrm>
+          <a:prstGeom prst="rect">
+            <a:avLst/>
+          </a:prstGeom>
+          <a:noFill/>
+          <a:ln w="0">
+            <a:noFill/>
+          </a:ln>
+        </p:spPr>
+        <p:style>
+          <a:lnRef idx="0"/>
+          <a:fillRef idx="0"/>
+          <a:effectRef idx="0"/>
+          <a:fontRef idx="minor"/>
+        </p:style>
+        <p:txBody>
+          <a:bodyPr lIns="0" tIns="0" rIns="0" bIns="0" anchor="ctr">
+            <a:noAutofit/>
+          </a:bodyPr>
+          <a:p>
+            <a:pPr defTabSz="914400">
+              <a:lnSpc>
+                <a:spcPct val="100000"/>
+              </a:lnSpc>
+              <a:tabLst>
+                <a:tab pos="0" algn="l"/>
+              </a:tabLst>
+            </a:pPr>
+            <a:r>
+              <a:rPr lang="en-US" sz="1400" b="1" u="none" strike="noStrike">
+                <a:solidFill>
+                  <a:srgbClr val="1E293B"/>
+                </a:solidFill>
+                <a:effectLst/>
+                <a:uFillTx/>
+                <a:latin typeface="Calibri"/>
+                <a:ea typeface="Calibri"/>
+              </a:rPr>
+              <a:t>The four failures: wrong folder  ·  no checkout  ·  expecting job 2 to see job 1's files  ·  YAML indentation</a:t>
+            </a:r>
+            <a:endParaRPr lang="en-IN" sz="1400" b="0" u="none" strike="noStrike">
+              <a:solidFill>
+                <a:srgbClr val="000000"/>
+              </a:solidFill>
+              <a:effectLst/>
+              <a:uFillTx/>
+              <a:latin typeface="Arial"/>
+            </a:endParaRPr>
+          </a:p>
+        </p:txBody>
+      </p:sp>
+      <p:sp>
+        <p:nvSpPr>
+          <p:cNvPr id="303" name="Text 11"/>
+          <p:cNvSpPr/>
+          <p:nvPr/>
+        </p:nvSpPr>
+        <p:spPr>
+          <a:xfrm>
+            <a:off x="548640" y="6473880"/>
+            <a:ext cx="6857640" cy="228240"/>
+          </a:xfrm>
+          <a:prstGeom prst="rect">
+            <a:avLst/>
+          </a:prstGeom>
+          <a:noFill/>
+          <a:ln w="0">
+            <a:noFill/>
+          </a:ln>
+        </p:spPr>
+        <p:style>
+          <a:lnRef idx="0"/>
+          <a:fillRef idx="0"/>
+          <a:effectRef idx="0"/>
+          <a:fontRef idx="minor"/>
+        </p:style>
+        <p:txBody>
+          <a:bodyPr lIns="0" tIns="0" rIns="0" bIns="0" anchor="ctr">
+            <a:noAutofit/>
+          </a:bodyPr>
+          <a:p>
+            <a:pPr defTabSz="914400">
+              <a:lnSpc>
+                <a:spcPct val="100000"/>
+              </a:lnSpc>
+              <a:tabLst>
+                <a:tab pos="0" algn="l"/>
+              </a:tabLst>
+            </a:pPr>
+            <a:r>
+              <a:rPr lang="en-US" sz="900" b="0" u="none" strike="noStrike">
+                <a:solidFill>
+                  <a:srgbClr val="64748B"/>
+                </a:solidFill>
+                <a:effectLst/>
+                <a:uFillTx/>
+                <a:latin typeface="Calibri"/>
+                <a:ea typeface="Calibri"/>
+              </a:rPr>
+              <a:t>Auth, Docker &amp; Deploy  ·  hashing  ·  JWT  ·  roles  ·  Docker  ·  shipping it</a:t>
+            </a:r>
+            <a:endParaRPr lang="en-IN" sz="900" b="0" u="none" strike="noStrike">
+              <a:solidFill>
+                <a:srgbClr val="000000"/>
+              </a:solidFill>
+              <a:effectLst/>
+              <a:uFillTx/>
+              <a:latin typeface="Arial"/>
+            </a:endParaRPr>
+          </a:p>
+        </p:txBody>
+      </p:sp>
+      <p:sp>
+        <p:nvSpPr>
+          <p:cNvPr id="304" name="Text 12"/>
+          <p:cNvSpPr/>
+          <p:nvPr/>
+        </p:nvSpPr>
+        <p:spPr>
+          <a:xfrm>
+            <a:off x="11183040" y="6473880"/>
+            <a:ext cx="456840" cy="228240"/>
+          </a:xfrm>
+          <a:prstGeom prst="rect">
+            <a:avLst/>
+          </a:prstGeom>
+          <a:noFill/>
+          <a:ln w="0">
+            <a:noFill/>
+          </a:ln>
+        </p:spPr>
+        <p:style>
+          <a:lnRef idx="0"/>
+          <a:fillRef idx="0"/>
+          <a:effectRef idx="0"/>
+          <a:fontRef idx="minor"/>
+        </p:style>
+        <p:txBody>
+          <a:bodyPr lIns="0" tIns="0" rIns="0" bIns="0" anchor="ctr">
+            <a:noAutofit/>
+          </a:bodyPr>
+          <a:p>
+            <a:pPr algn="r" defTabSz="914400">
+              <a:lnSpc>
+                <a:spcPct val="100000"/>
+              </a:lnSpc>
+              <a:tabLst>
+                <a:tab pos="0" algn="l"/>
+              </a:tabLst>
+            </a:pPr>
+            <a:r>
+              <a:rPr lang="en-US" sz="900" b="0" u="none" strike="noStrike">
+                <a:solidFill>
+                  <a:srgbClr val="64748B"/>
+                </a:solidFill>
+                <a:effectLst/>
+                <a:uFillTx/>
+                <a:latin typeface="Calibri"/>
+                <a:ea typeface="Calibri"/>
+              </a:rPr>
+              <a:t>22</a:t>
+            </a:r>
+            <a:endParaRPr lang="en-IN" sz="900" b="0" u="none" strike="noStrike">
+              <a:solidFill>
+                <a:srgbClr val="000000"/>
+              </a:solidFill>
+              <a:effectLst/>
+              <a:uFillTx/>
+              <a:latin typeface="Arial"/>
+            </a:endParaRPr>
+          </a:p>
+        </p:txBody>
+      </p:sp>
+    </p:spTree>
+  </p:cSld>
+  <mc:AlternateContent>
+    <mc:Choice Requires="p14">
+      <p:transition spd="slow" p14:dur="2000"/>
+    </mc:Choice>
+    <mc:Fallback>
+      <p:transition spd="slow"/>
+    </mc:Fallback>
+  </mc:AlternateContent>
+</p:sld>
+</file>
+
+<file path=ppt/slides/slide23.xml><?xml version="1.0" encoding="utf-8"?>
+<p:sld xmlns:a="http://schemas.openxmlformats.org/drawingml/2006/main" xmlns:p="http://schemas.openxmlformats.org/presentationml/2006/main" xmlns:r="http://schemas.openxmlformats.org/officeDocument/2006/relationships" xmlns:p14="http://schemas.microsoft.com/office/powerpoint/2010/main" xmlns:p15="http://schemas.microsoft.com/office/powerpoint/2012/main" xmlns:mc="http://schemas.openxmlformats.org/markup-compatibility/2006">
+  <p:cSld>
+    <p:spTree>
+      <p:nvGrpSpPr>
+        <p:cNvPr id="1" name=""/>
+        <p:cNvGrpSpPr/>
+        <p:nvPr/>
+      </p:nvGrpSpPr>
+      <p:grpSpPr>
+        <a:xfrm>
+          <a:off x="0" y="0"/>
+          <a:ext cx="0" cy="0"/>
+          <a:chOff x="0" y="0"/>
+          <a:chExt cx="0" cy="0"/>
+        </a:xfrm>
+      </p:grpSpPr>
+      <p:sp>
+        <p:nvSpPr>
+          <p:cNvPr id="305" name="Text 0"/>
+          <p:cNvSpPr/>
+          <p:nvPr/>
+        </p:nvSpPr>
+        <p:spPr>
+          <a:xfrm>
+            <a:off x="548640" y="457200"/>
+            <a:ext cx="11091240" cy="731160"/>
+          </a:xfrm>
+          <a:prstGeom prst="rect">
+            <a:avLst/>
+          </a:prstGeom>
+          <a:noFill/>
+          <a:ln w="0">
+            <a:noFill/>
+          </a:ln>
+        </p:spPr>
+        <p:style>
+          <a:lnRef idx="0"/>
+          <a:fillRef idx="0"/>
+          <a:effectRef idx="0"/>
+          <a:fontRef idx="minor"/>
+        </p:style>
+        <p:txBody>
+          <a:bodyPr lIns="0" tIns="0" rIns="0" bIns="0" anchor="ctr">
+            <a:noAutofit/>
+          </a:bodyPr>
+          <a:p>
+            <a:pPr defTabSz="914400">
+              <a:lnSpc>
+                <a:spcPct val="100000"/>
+              </a:lnSpc>
+              <a:tabLst>
+                <a:tab pos="0" algn="l"/>
+              </a:tabLst>
+            </a:pPr>
+            <a:r>
+              <a:rPr lang="en-US" sz="3000" b="1" u="none" strike="noStrike">
+                <a:solidFill>
+                  <a:srgbClr val="1E293B"/>
+                </a:solidFill>
+                <a:effectLst/>
+                <a:uFillTx/>
+                <a:latin typeface="Calibri"/>
+                <a:ea typeface="Calibri"/>
+              </a:rPr>
+              <a:t>@v7 is a decision about who can run code in your CI</a:t>
+            </a:r>
+            <a:endParaRPr lang="en-IN" sz="3000" b="0" u="none" strike="noStrike">
+              <a:solidFill>
+                <a:srgbClr val="000000"/>
+              </a:solidFill>
+              <a:effectLst/>
+              <a:uFillTx/>
+              <a:latin typeface="Arial"/>
+            </a:endParaRPr>
+          </a:p>
+        </p:txBody>
+      </p:sp>
+      <p:sp>
+        <p:nvSpPr>
+          <p:cNvPr id="306" name="Text 1"/>
+          <p:cNvSpPr/>
+          <p:nvPr/>
+        </p:nvSpPr>
+        <p:spPr>
+          <a:xfrm>
+            <a:off x="548640" y="1188720"/>
+            <a:ext cx="10972440" cy="365400"/>
+          </a:xfrm>
+          <a:prstGeom prst="rect">
+            <a:avLst/>
+          </a:prstGeom>
+          <a:noFill/>
+          <a:ln w="0">
+            <a:noFill/>
+          </a:ln>
+        </p:spPr>
+        <p:style>
+          <a:lnRef idx="0"/>
+          <a:fillRef idx="0"/>
+          <a:effectRef idx="0"/>
+          <a:fontRef idx="minor"/>
+        </p:style>
+        <p:txBody>
+          <a:bodyPr lIns="0" tIns="0" rIns="0" bIns="0" anchor="ctr">
+            <a:noAutofit/>
+          </a:bodyPr>
+          <a:p>
+            <a:pPr defTabSz="914400">
+              <a:lnSpc>
+                <a:spcPct val="100000"/>
+              </a:lnSpc>
+              <a:tabLst>
+                <a:tab pos="0" algn="l"/>
+              </a:tabLst>
+            </a:pPr>
+            <a:r>
+              <a:rPr lang="en-US" sz="1500" b="0" i="1" u="none" strike="noStrike">
+                <a:solidFill>
+                  <a:srgbClr val="64748B"/>
+                </a:solidFill>
+                <a:effectLst/>
+                <a:uFillTx/>
+                <a:latin typeface="Calibri"/>
+                <a:ea typeface="Calibri"/>
+              </a:rPr>
+              <a:t>The one slide here that is about security, not convenience.</a:t>
+            </a:r>
+            <a:endParaRPr lang="en-IN" sz="1500" b="0" u="none" strike="noStrike">
+              <a:solidFill>
+                <a:srgbClr val="000000"/>
+              </a:solidFill>
+              <a:effectLst/>
+              <a:uFillTx/>
+              <a:latin typeface="Arial"/>
+            </a:endParaRPr>
+          </a:p>
+        </p:txBody>
+      </p:sp>
+      <p:sp>
+        <p:nvSpPr>
+          <p:cNvPr id="307" name="Shape 2"/>
+          <p:cNvSpPr/>
+          <p:nvPr/>
+        </p:nvSpPr>
+        <p:spPr>
+          <a:xfrm>
+            <a:off x="548640" y="1600200"/>
+            <a:ext cx="11091240" cy="1325520"/>
+          </a:xfrm>
+          <a:prstGeom prst="roundRect">
+            <a:avLst>
+              <a:gd name="adj" fmla="val 6897"/>
+            </a:avLst>
+          </a:prstGeom>
+          <a:solidFill>
+            <a:srgbClr val="FEF2F2"/>
+          </a:solidFill>
+          <a:ln w="12700">
+            <a:solidFill>
+              <a:srgbClr val="FECACA"/>
+            </a:solidFill>
+            <a:round/>
+          </a:ln>
+        </p:spPr>
+        <p:style>
+          <a:lnRef idx="0"/>
+          <a:fillRef idx="0"/>
+          <a:effectRef idx="0"/>
+          <a:fontRef idx="minor"/>
+        </p:style>
+        <p:txBody>
+          <a:bodyPr lIns="90000" tIns="45000" rIns="90000" bIns="45000" anchor="t">
+            <a:noAutofit/>
+          </a:bodyPr>
+          <a:p>
+            <a:endParaRPr lang="en-IN" sz="1800" b="0" u="none" strike="noStrike">
+              <a:solidFill>
+                <a:srgbClr val="000000"/>
+              </a:solidFill>
+              <a:effectLst/>
+              <a:uFillTx/>
+              <a:latin typeface="Arial"/>
+            </a:endParaRPr>
+          </a:p>
+        </p:txBody>
+      </p:sp>
+      <p:sp>
+        <p:nvSpPr>
+          <p:cNvPr id="308" name="Text 3"/>
+          <p:cNvSpPr/>
+          <p:nvPr/>
+        </p:nvSpPr>
+        <p:spPr>
+          <a:xfrm>
+            <a:off x="868680" y="1737360"/>
+            <a:ext cx="10423800" cy="365400"/>
+          </a:xfrm>
+          <a:prstGeom prst="rect">
+            <a:avLst/>
+          </a:prstGeom>
+          <a:noFill/>
+          <a:ln w="0">
+            <a:noFill/>
+          </a:ln>
+        </p:spPr>
+        <p:style>
+          <a:lnRef idx="0"/>
+          <a:fillRef idx="0"/>
+          <a:effectRef idx="0"/>
+          <a:fontRef idx="minor"/>
+        </p:style>
+        <p:txBody>
+          <a:bodyPr lIns="0" tIns="0" rIns="0" bIns="0" anchor="ctr">
+            <a:noAutofit/>
+          </a:bodyPr>
+          <a:p>
+            <a:pPr defTabSz="914400">
+              <a:lnSpc>
+                <a:spcPct val="100000"/>
+              </a:lnSpc>
+              <a:tabLst>
+                <a:tab pos="0" algn="l"/>
+              </a:tabLst>
+            </a:pPr>
+            <a:r>
+              <a:rPr lang="en-US" sz="1700" b="1" u="none" strike="noStrike">
+                <a:solidFill>
+                  <a:srgbClr val="B91C1C"/>
+                </a:solidFill>
+                <a:effectLst/>
+                <a:uFillTx/>
+                <a:latin typeface="Calibri"/>
+                <a:ea typeface="Calibri"/>
+              </a:rPr>
+              <a:t>A moving tag points at whatever the owner points it at - today, and tomorrow.</a:t>
+            </a:r>
+            <a:endParaRPr lang="en-IN" sz="1700" b="0" u="none" strike="noStrike">
+              <a:solidFill>
+                <a:srgbClr val="000000"/>
+              </a:solidFill>
+              <a:effectLst/>
+              <a:uFillTx/>
+              <a:latin typeface="Arial"/>
+            </a:endParaRPr>
+          </a:p>
+        </p:txBody>
+      </p:sp>
+      <p:sp>
+        <p:nvSpPr>
+          <p:cNvPr id="309" name="Text 4"/>
+          <p:cNvSpPr/>
+          <p:nvPr/>
+        </p:nvSpPr>
+        <p:spPr>
+          <a:xfrm>
+            <a:off x="868680" y="2121480"/>
+            <a:ext cx="10423800" cy="731160"/>
+          </a:xfrm>
+          <a:prstGeom prst="rect">
+            <a:avLst/>
+          </a:prstGeom>
+          <a:noFill/>
+          <a:ln w="0">
+            <a:noFill/>
+          </a:ln>
+        </p:spPr>
+        <p:style>
+          <a:lnRef idx="0"/>
+          <a:fillRef idx="0"/>
+          <a:effectRef idx="0"/>
+          <a:fontRef idx="minor"/>
+        </p:style>
+        <p:txBody>
+          <a:bodyPr lIns="0" tIns="0" rIns="0" bIns="0" anchor="ctr">
+            <a:noAutofit/>
+          </a:bodyPr>
+          <a:p>
+            <a:pPr defTabSz="914400">
+              <a:lnSpc>
+                <a:spcPct val="100000"/>
+              </a:lnSpc>
+              <a:tabLst>
+                <a:tab pos="0" algn="l"/>
+              </a:tabLst>
+            </a:pPr>
+            <a:r>
+              <a:rPr lang="en-US" sz="1450" b="0" u="none" strike="noStrike">
+                <a:solidFill>
+                  <a:srgbClr val="1E293B"/>
+                </a:solidFill>
+                <a:effectLst/>
+                <a:uFillTx/>
+                <a:latin typeface="Calibri"/>
+                <a:ea typeface="Calibri"/>
+              </a:rPr>
+              <a:t>In 2025 tj-actions/changed-files was compromised exactly this way. Thousands of repositories ran the attacker's code, inside their own CI, with access to their own secrets.</a:t>
+            </a:r>
+            <a:endParaRPr lang="en-IN" sz="1450" b="0" u="none" strike="noStrike">
+              <a:solidFill>
+                <a:srgbClr val="000000"/>
+              </a:solidFill>
+              <a:effectLst/>
+              <a:uFillTx/>
+              <a:latin typeface="Arial"/>
+            </a:endParaRPr>
+          </a:p>
+        </p:txBody>
+      </p:sp>
+      <p:sp>
+        <p:nvSpPr>
+          <p:cNvPr id="310" name="Shape 5"/>
+          <p:cNvSpPr/>
+          <p:nvPr/>
+        </p:nvSpPr>
+        <p:spPr>
+          <a:xfrm>
+            <a:off x="548640" y="3108960"/>
             <a:ext cx="11091240" cy="566640"/>
           </a:xfrm>
           <a:prstGeom prst="roundRect">
             <a:avLst>
               <a:gd name="adj" fmla="val 16129"/>
+            </a:avLst>
+          </a:prstGeom>
+          <a:solidFill>
+            <a:srgbClr val="F1F5F9"/>
+          </a:solidFill>
+          <a:ln w="12700">
+            <a:solidFill>
+              <a:srgbClr val="E2E8F0"/>
+            </a:solidFill>
+            <a:round/>
+          </a:ln>
+        </p:spPr>
+        <p:style>
+          <a:lnRef idx="0"/>
+          <a:fillRef idx="0"/>
+          <a:effectRef idx="0"/>
+          <a:fontRef idx="minor"/>
+        </p:style>
+        <p:txBody>
+          <a:bodyPr lIns="90000" tIns="45000" rIns="90000" bIns="45000" anchor="t">
+            <a:noAutofit/>
+          </a:bodyPr>
+          <a:p>
+            <a:endParaRPr lang="en-IN" sz="1800" b="0" u="none" strike="noStrike">
+              <a:solidFill>
+                <a:srgbClr val="000000"/>
+              </a:solidFill>
+              <a:effectLst/>
+              <a:uFillTx/>
+              <a:latin typeface="Arial"/>
+            </a:endParaRPr>
+          </a:p>
+        </p:txBody>
+      </p:sp>
+      <p:sp>
+        <p:nvSpPr>
+          <p:cNvPr id="311" name="Text 6"/>
+          <p:cNvSpPr/>
+          <p:nvPr/>
+        </p:nvSpPr>
+        <p:spPr>
+          <a:xfrm>
+            <a:off x="777240" y="3108960"/>
+            <a:ext cx="2834280" cy="566640"/>
+          </a:xfrm>
+          <a:prstGeom prst="rect">
+            <a:avLst/>
+          </a:prstGeom>
+          <a:noFill/>
+          <a:ln w="0">
+            <a:noFill/>
+          </a:ln>
+        </p:spPr>
+        <p:style>
+          <a:lnRef idx="0"/>
+          <a:fillRef idx="0"/>
+          <a:effectRef idx="0"/>
+          <a:fontRef idx="minor"/>
+        </p:style>
+        <p:txBody>
+          <a:bodyPr lIns="0" tIns="0" rIns="0" bIns="0" anchor="ctr">
+            <a:noAutofit/>
+          </a:bodyPr>
+          <a:p>
+            <a:pPr defTabSz="914400">
+              <a:lnSpc>
+                <a:spcPct val="100000"/>
+              </a:lnSpc>
+              <a:tabLst>
+                <a:tab pos="0" algn="l"/>
+              </a:tabLst>
+            </a:pPr>
+            <a:r>
+              <a:rPr lang="en-US" sz="1250" b="1" u="none" strike="noStrike">
+                <a:solidFill>
+                  <a:srgbClr val="B45309"/>
+                </a:solidFill>
+                <a:effectLst/>
+                <a:uFillTx/>
+                <a:latin typeface="Courier New"/>
+                <a:ea typeface="Courier New"/>
+              </a:rPr>
+              <a:t>@v7</a:t>
+            </a:r>
+            <a:endParaRPr lang="en-IN" sz="1250" b="0" u="none" strike="noStrike">
+              <a:solidFill>
+                <a:srgbClr val="000000"/>
+              </a:solidFill>
+              <a:effectLst/>
+              <a:uFillTx/>
+              <a:latin typeface="Arial"/>
+            </a:endParaRPr>
+          </a:p>
+        </p:txBody>
+      </p:sp>
+      <p:sp>
+        <p:nvSpPr>
+          <p:cNvPr id="312" name="Text 7"/>
+          <p:cNvSpPr/>
+          <p:nvPr/>
+        </p:nvSpPr>
+        <p:spPr>
+          <a:xfrm>
+            <a:off x="3749040" y="3108960"/>
+            <a:ext cx="1737000" cy="566640"/>
+          </a:xfrm>
+          <a:prstGeom prst="rect">
+            <a:avLst/>
+          </a:prstGeom>
+          <a:noFill/>
+          <a:ln w="0">
+            <a:noFill/>
+          </a:ln>
+        </p:spPr>
+        <p:style>
+          <a:lnRef idx="0"/>
+          <a:fillRef idx="0"/>
+          <a:effectRef idx="0"/>
+          <a:fontRef idx="minor"/>
+        </p:style>
+        <p:txBody>
+          <a:bodyPr lIns="0" tIns="0" rIns="0" bIns="0" anchor="ctr">
+            <a:noAutofit/>
+          </a:bodyPr>
+          <a:p>
+            <a:pPr defTabSz="914400">
+              <a:lnSpc>
+                <a:spcPct val="100000"/>
+              </a:lnSpc>
+              <a:tabLst>
+                <a:tab pos="0" algn="l"/>
+              </a:tabLst>
+            </a:pPr>
+            <a:r>
+              <a:rPr lang="en-US" sz="1300" b="1" u="none" strike="noStrike">
+                <a:solidFill>
+                  <a:srgbClr val="1E293B"/>
+                </a:solidFill>
+                <a:effectLst/>
+                <a:uFillTx/>
+                <a:latin typeface="Calibri"/>
+                <a:ea typeface="Calibri"/>
+              </a:rPr>
+              <a:t>moving tag</a:t>
+            </a:r>
+            <a:endParaRPr lang="en-IN" sz="1300" b="0" u="none" strike="noStrike">
+              <a:solidFill>
+                <a:srgbClr val="000000"/>
+              </a:solidFill>
+              <a:effectLst/>
+              <a:uFillTx/>
+              <a:latin typeface="Arial"/>
+            </a:endParaRPr>
+          </a:p>
+        </p:txBody>
+      </p:sp>
+      <p:sp>
+        <p:nvSpPr>
+          <p:cNvPr id="313" name="Text 8"/>
+          <p:cNvSpPr/>
+          <p:nvPr/>
+        </p:nvSpPr>
+        <p:spPr>
+          <a:xfrm>
+            <a:off x="5577840" y="3108960"/>
+            <a:ext cx="5851800" cy="566640"/>
+          </a:xfrm>
+          <a:prstGeom prst="rect">
+            <a:avLst/>
+          </a:prstGeom>
+          <a:noFill/>
+          <a:ln w="0">
+            <a:noFill/>
+          </a:ln>
+        </p:spPr>
+        <p:style>
+          <a:lnRef idx="0"/>
+          <a:fillRef idx="0"/>
+          <a:effectRef idx="0"/>
+          <a:fontRef idx="minor"/>
+        </p:style>
+        <p:txBody>
+          <a:bodyPr lIns="0" tIns="0" rIns="0" bIns="0" anchor="ctr">
+            <a:noAutofit/>
+          </a:bodyPr>
+          <a:p>
+            <a:pPr defTabSz="914400">
+              <a:lnSpc>
+                <a:spcPct val="100000"/>
+              </a:lnSpc>
+              <a:tabLst>
+                <a:tab pos="0" algn="l"/>
+              </a:tabLst>
+            </a:pPr>
+            <a:r>
+              <a:rPr lang="en-US" sz="1300" b="0" u="none" strike="noStrike">
+                <a:solidFill>
+                  <a:srgbClr val="1E293B"/>
+                </a:solidFill>
+                <a:effectLst/>
+                <a:uFillTx/>
+                <a:latin typeface="Calibri"/>
+                <a:ea typeface="Calibri"/>
+              </a:rPr>
+              <a:t>convenient, and someone else decides what it means</a:t>
+            </a:r>
+            <a:endParaRPr lang="en-IN" sz="1300" b="0" u="none" strike="noStrike">
+              <a:solidFill>
+                <a:srgbClr val="000000"/>
+              </a:solidFill>
+              <a:effectLst/>
+              <a:uFillTx/>
+              <a:latin typeface="Arial"/>
+            </a:endParaRPr>
+          </a:p>
+        </p:txBody>
+      </p:sp>
+      <p:sp>
+        <p:nvSpPr>
+          <p:cNvPr id="314" name="Shape 9"/>
+          <p:cNvSpPr/>
+          <p:nvPr/>
+        </p:nvSpPr>
+        <p:spPr>
+          <a:xfrm>
+            <a:off x="548640" y="3767400"/>
+            <a:ext cx="11091240" cy="566640"/>
+          </a:xfrm>
+          <a:prstGeom prst="roundRect">
+            <a:avLst>
+              <a:gd name="adj" fmla="val 16129"/>
+            </a:avLst>
+          </a:prstGeom>
+          <a:solidFill>
+            <a:srgbClr val="F1F5F9"/>
+          </a:solidFill>
+          <a:ln w="12700">
+            <a:solidFill>
+              <a:srgbClr val="E2E8F0"/>
+            </a:solidFill>
+            <a:round/>
+          </a:ln>
+        </p:spPr>
+        <p:style>
+          <a:lnRef idx="0"/>
+          <a:fillRef idx="0"/>
+          <a:effectRef idx="0"/>
+          <a:fontRef idx="minor"/>
+        </p:style>
+        <p:txBody>
+          <a:bodyPr lIns="90000" tIns="45000" rIns="90000" bIns="45000" anchor="t">
+            <a:noAutofit/>
+          </a:bodyPr>
+          <a:p>
+            <a:endParaRPr lang="en-IN" sz="1800" b="0" u="none" strike="noStrike">
+              <a:solidFill>
+                <a:srgbClr val="000000"/>
+              </a:solidFill>
+              <a:effectLst/>
+              <a:uFillTx/>
+              <a:latin typeface="Arial"/>
+            </a:endParaRPr>
+          </a:p>
+        </p:txBody>
+      </p:sp>
+      <p:sp>
+        <p:nvSpPr>
+          <p:cNvPr id="315" name="Text 10"/>
+          <p:cNvSpPr/>
+          <p:nvPr/>
+        </p:nvSpPr>
+        <p:spPr>
+          <a:xfrm>
+            <a:off x="777240" y="3767400"/>
+            <a:ext cx="2834280" cy="566640"/>
+          </a:xfrm>
+          <a:prstGeom prst="rect">
+            <a:avLst/>
+          </a:prstGeom>
+          <a:noFill/>
+          <a:ln w="0">
+            <a:noFill/>
+          </a:ln>
+        </p:spPr>
+        <p:style>
+          <a:lnRef idx="0"/>
+          <a:fillRef idx="0"/>
+          <a:effectRef idx="0"/>
+          <a:fontRef idx="minor"/>
+        </p:style>
+        <p:txBody>
+          <a:bodyPr lIns="0" tIns="0" rIns="0" bIns="0" anchor="ctr">
+            <a:noAutofit/>
+          </a:bodyPr>
+          <a:p>
+            <a:pPr defTabSz="914400">
+              <a:lnSpc>
+                <a:spcPct val="100000"/>
+              </a:lnSpc>
+              <a:tabLst>
+                <a:tab pos="0" algn="l"/>
+              </a:tabLst>
+            </a:pPr>
+            <a:r>
+              <a:rPr lang="en-US" sz="1250" b="1" u="none" strike="noStrike">
+                <a:solidFill>
+                  <a:srgbClr val="0891B2"/>
+                </a:solidFill>
+                <a:effectLst/>
+                <a:uFillTx/>
+                <a:latin typeface="Courier New"/>
+                <a:ea typeface="Courier New"/>
+              </a:rPr>
+              <a:t>@v7.0.1</a:t>
+            </a:r>
+            <a:endParaRPr lang="en-IN" sz="1250" b="0" u="none" strike="noStrike">
+              <a:solidFill>
+                <a:srgbClr val="000000"/>
+              </a:solidFill>
+              <a:effectLst/>
+              <a:uFillTx/>
+              <a:latin typeface="Arial"/>
+            </a:endParaRPr>
+          </a:p>
+        </p:txBody>
+      </p:sp>
+      <p:sp>
+        <p:nvSpPr>
+          <p:cNvPr id="316" name="Text 11"/>
+          <p:cNvSpPr/>
+          <p:nvPr/>
+        </p:nvSpPr>
+        <p:spPr>
+          <a:xfrm>
+            <a:off x="3749040" y="3767400"/>
+            <a:ext cx="1737000" cy="566640"/>
+          </a:xfrm>
+          <a:prstGeom prst="rect">
+            <a:avLst/>
+          </a:prstGeom>
+          <a:noFill/>
+          <a:ln w="0">
+            <a:noFill/>
+          </a:ln>
+        </p:spPr>
+        <p:style>
+          <a:lnRef idx="0"/>
+          <a:fillRef idx="0"/>
+          <a:effectRef idx="0"/>
+          <a:fontRef idx="minor"/>
+        </p:style>
+        <p:txBody>
+          <a:bodyPr lIns="0" tIns="0" rIns="0" bIns="0" anchor="ctr">
+            <a:noAutofit/>
+          </a:bodyPr>
+          <a:p>
+            <a:pPr defTabSz="914400">
+              <a:lnSpc>
+                <a:spcPct val="100000"/>
+              </a:lnSpc>
+              <a:tabLst>
+                <a:tab pos="0" algn="l"/>
+              </a:tabLst>
+            </a:pPr>
+            <a:r>
+              <a:rPr lang="en-US" sz="1300" b="1" u="none" strike="noStrike">
+                <a:solidFill>
+                  <a:srgbClr val="1E293B"/>
+                </a:solidFill>
+                <a:effectLst/>
+                <a:uFillTx/>
+                <a:latin typeface="Calibri"/>
+                <a:ea typeface="Calibri"/>
+              </a:rPr>
+              <a:t>exact release</a:t>
+            </a:r>
+            <a:endParaRPr lang="en-IN" sz="1300" b="0" u="none" strike="noStrike">
+              <a:solidFill>
+                <a:srgbClr val="000000"/>
+              </a:solidFill>
+              <a:effectLst/>
+              <a:uFillTx/>
+              <a:latin typeface="Arial"/>
+            </a:endParaRPr>
+          </a:p>
+        </p:txBody>
+      </p:sp>
+      <p:sp>
+        <p:nvSpPr>
+          <p:cNvPr id="317" name="Text 12"/>
+          <p:cNvSpPr/>
+          <p:nvPr/>
+        </p:nvSpPr>
+        <p:spPr>
+          <a:xfrm>
+            <a:off x="5577840" y="3767400"/>
+            <a:ext cx="5851800" cy="566640"/>
+          </a:xfrm>
+          <a:prstGeom prst="rect">
+            <a:avLst/>
+          </a:prstGeom>
+          <a:noFill/>
+          <a:ln w="0">
+            <a:noFill/>
+          </a:ln>
+        </p:spPr>
+        <p:style>
+          <a:lnRef idx="0"/>
+          <a:fillRef idx="0"/>
+          <a:effectRef idx="0"/>
+          <a:fontRef idx="minor"/>
+        </p:style>
+        <p:txBody>
+          <a:bodyPr lIns="0" tIns="0" rIns="0" bIns="0" anchor="ctr">
+            <a:noAutofit/>
+          </a:bodyPr>
+          <a:p>
+            <a:pPr defTabSz="914400">
+              <a:lnSpc>
+                <a:spcPct val="100000"/>
+              </a:lnSpc>
+              <a:tabLst>
+                <a:tab pos="0" algn="l"/>
+              </a:tabLst>
+            </a:pPr>
+            <a:r>
+              <a:rPr lang="en-US" sz="1300" b="0" u="none" strike="noStrike">
+                <a:solidFill>
+                  <a:srgbClr val="1E293B"/>
+                </a:solidFill>
+                <a:effectLst/>
+                <a:uFillTx/>
+                <a:latin typeface="Calibri"/>
+                <a:ea typeface="Calibri"/>
+              </a:rPr>
+              <a:t>better - a specific published version</a:t>
+            </a:r>
+            <a:endParaRPr lang="en-IN" sz="1300" b="0" u="none" strike="noStrike">
+              <a:solidFill>
+                <a:srgbClr val="000000"/>
+              </a:solidFill>
+              <a:effectLst/>
+              <a:uFillTx/>
+              <a:latin typeface="Arial"/>
+            </a:endParaRPr>
+          </a:p>
+        </p:txBody>
+      </p:sp>
+      <p:sp>
+        <p:nvSpPr>
+          <p:cNvPr id="318" name="Shape 13"/>
+          <p:cNvSpPr/>
+          <p:nvPr/>
+        </p:nvSpPr>
+        <p:spPr>
+          <a:xfrm>
+            <a:off x="548640" y="4425840"/>
+            <a:ext cx="11091240" cy="566640"/>
+          </a:xfrm>
+          <a:prstGeom prst="roundRect">
+            <a:avLst>
+              <a:gd name="adj" fmla="val 16129"/>
+            </a:avLst>
+          </a:prstGeom>
+          <a:solidFill>
+            <a:srgbClr val="F0FDF4"/>
+          </a:solidFill>
+          <a:ln w="12700">
+            <a:solidFill>
+              <a:srgbClr val="15803D"/>
+            </a:solidFill>
+            <a:round/>
+          </a:ln>
+        </p:spPr>
+        <p:style>
+          <a:lnRef idx="0"/>
+          <a:fillRef idx="0"/>
+          <a:effectRef idx="0"/>
+          <a:fontRef idx="minor"/>
+        </p:style>
+        <p:txBody>
+          <a:bodyPr lIns="90000" tIns="45000" rIns="90000" bIns="45000" anchor="t">
+            <a:noAutofit/>
+          </a:bodyPr>
+          <a:p>
+            <a:endParaRPr lang="en-IN" sz="1800" b="0" u="none" strike="noStrike">
+              <a:solidFill>
+                <a:srgbClr val="000000"/>
+              </a:solidFill>
+              <a:effectLst/>
+              <a:uFillTx/>
+              <a:latin typeface="Arial"/>
+            </a:endParaRPr>
+          </a:p>
+        </p:txBody>
+      </p:sp>
+      <p:sp>
+        <p:nvSpPr>
+          <p:cNvPr id="319" name="Text 14"/>
+          <p:cNvSpPr/>
+          <p:nvPr/>
+        </p:nvSpPr>
+        <p:spPr>
+          <a:xfrm>
+            <a:off x="777240" y="4425840"/>
+            <a:ext cx="2834280" cy="566640"/>
+          </a:xfrm>
+          <a:prstGeom prst="rect">
+            <a:avLst/>
+          </a:prstGeom>
+          <a:noFill/>
+          <a:ln w="0">
+            <a:noFill/>
+          </a:ln>
+        </p:spPr>
+        <p:style>
+          <a:lnRef idx="0"/>
+          <a:fillRef idx="0"/>
+          <a:effectRef idx="0"/>
+          <a:fontRef idx="minor"/>
+        </p:style>
+        <p:txBody>
+          <a:bodyPr lIns="0" tIns="0" rIns="0" bIns="0" anchor="ctr">
+            <a:noAutofit/>
+          </a:bodyPr>
+          <a:p>
+            <a:pPr defTabSz="914400">
+              <a:lnSpc>
+                <a:spcPct val="100000"/>
+              </a:lnSpc>
+              <a:tabLst>
+                <a:tab pos="0" algn="l"/>
+              </a:tabLst>
+            </a:pPr>
+            <a:r>
+              <a:rPr lang="en-US" sz="1250" b="1" u="none" strike="noStrike">
+                <a:solidFill>
+                  <a:srgbClr val="15803D"/>
+                </a:solidFill>
+                <a:effectLst/>
+                <a:uFillTx/>
+                <a:latin typeface="Courier New"/>
+                <a:ea typeface="Courier New"/>
+              </a:rPr>
+              <a:t>@a1b2c3... # v7.0.1</a:t>
+            </a:r>
+            <a:endParaRPr lang="en-IN" sz="1250" b="0" u="none" strike="noStrike">
+              <a:solidFill>
+                <a:srgbClr val="000000"/>
+              </a:solidFill>
+              <a:effectLst/>
+              <a:uFillTx/>
+              <a:latin typeface="Arial"/>
+            </a:endParaRPr>
+          </a:p>
+        </p:txBody>
+      </p:sp>
+      <p:sp>
+        <p:nvSpPr>
+          <p:cNvPr id="320" name="Text 15"/>
+          <p:cNvSpPr/>
+          <p:nvPr/>
+        </p:nvSpPr>
+        <p:spPr>
+          <a:xfrm>
+            <a:off x="3749040" y="4425840"/>
+            <a:ext cx="1737000" cy="566640"/>
+          </a:xfrm>
+          <a:prstGeom prst="rect">
+            <a:avLst/>
+          </a:prstGeom>
+          <a:noFill/>
+          <a:ln w="0">
+            <a:noFill/>
+          </a:ln>
+        </p:spPr>
+        <p:style>
+          <a:lnRef idx="0"/>
+          <a:fillRef idx="0"/>
+          <a:effectRef idx="0"/>
+          <a:fontRef idx="minor"/>
+        </p:style>
+        <p:txBody>
+          <a:bodyPr lIns="0" tIns="0" rIns="0" bIns="0" anchor="ctr">
+            <a:noAutofit/>
+          </a:bodyPr>
+          <a:p>
+            <a:pPr defTabSz="914400">
+              <a:lnSpc>
+                <a:spcPct val="100000"/>
+              </a:lnSpc>
+              <a:tabLst>
+                <a:tab pos="0" algn="l"/>
+              </a:tabLst>
+            </a:pPr>
+            <a:r>
+              <a:rPr lang="en-US" sz="1300" b="1" u="none" strike="noStrike">
+                <a:solidFill>
+                  <a:srgbClr val="1E293B"/>
+                </a:solidFill>
+                <a:effectLst/>
+                <a:uFillTx/>
+                <a:latin typeface="Calibri"/>
+                <a:ea typeface="Calibri"/>
+              </a:rPr>
+              <a:t>pinned commit</a:t>
+            </a:r>
+            <a:endParaRPr lang="en-IN" sz="1300" b="0" u="none" strike="noStrike">
+              <a:solidFill>
+                <a:srgbClr val="000000"/>
+              </a:solidFill>
+              <a:effectLst/>
+              <a:uFillTx/>
+              <a:latin typeface="Arial"/>
+            </a:endParaRPr>
+          </a:p>
+        </p:txBody>
+      </p:sp>
+      <p:sp>
+        <p:nvSpPr>
+          <p:cNvPr id="321" name="Text 16"/>
+          <p:cNvSpPr/>
+          <p:nvPr/>
+        </p:nvSpPr>
+        <p:spPr>
+          <a:xfrm>
+            <a:off x="5577840" y="4425840"/>
+            <a:ext cx="5851800" cy="566640"/>
+          </a:xfrm>
+          <a:prstGeom prst="rect">
+            <a:avLst/>
+          </a:prstGeom>
+          <a:noFill/>
+          <a:ln w="0">
+            <a:noFill/>
+          </a:ln>
+        </p:spPr>
+        <p:style>
+          <a:lnRef idx="0"/>
+          <a:fillRef idx="0"/>
+          <a:effectRef idx="0"/>
+          <a:fontRef idx="minor"/>
+        </p:style>
+        <p:txBody>
+          <a:bodyPr lIns="0" tIns="0" rIns="0" bIns="0" anchor="ctr">
+            <a:noAutofit/>
+          </a:bodyPr>
+          <a:p>
+            <a:pPr defTabSz="914400">
+              <a:lnSpc>
+                <a:spcPct val="100000"/>
+              </a:lnSpc>
+              <a:tabLst>
+                <a:tab pos="0" algn="l"/>
+              </a:tabLst>
+            </a:pPr>
+            <a:r>
+              <a:rPr lang="en-US" sz="1300" b="0" u="none" strike="noStrike">
+                <a:solidFill>
+                  <a:srgbClr val="1E293B"/>
+                </a:solidFill>
+                <a:effectLst/>
+                <a:uFillTx/>
+                <a:latin typeface="Calibri"/>
+                <a:ea typeface="Calibri"/>
+              </a:rPr>
+              <a:t>GitHub's own hardening guidance</a:t>
+            </a:r>
+            <a:endParaRPr lang="en-IN" sz="1300" b="0" u="none" strike="noStrike">
+              <a:solidFill>
+                <a:srgbClr val="000000"/>
+              </a:solidFill>
+              <a:effectLst/>
+              <a:uFillTx/>
+              <a:latin typeface="Arial"/>
+            </a:endParaRPr>
+          </a:p>
+        </p:txBody>
+      </p:sp>
+      <p:sp>
+        <p:nvSpPr>
+          <p:cNvPr id="322" name="Shape 17"/>
+          <p:cNvSpPr/>
+          <p:nvPr/>
+        </p:nvSpPr>
+        <p:spPr>
+          <a:xfrm>
+            <a:off x="548640" y="5166360"/>
+            <a:ext cx="11091240" cy="959760"/>
+          </a:xfrm>
+          <a:prstGeom prst="roundRect">
+            <a:avLst>
+              <a:gd name="adj" fmla="val 9524"/>
+            </a:avLst>
+          </a:prstGeom>
+          <a:solidFill>
+            <a:srgbClr val="EEF0FF"/>
+          </a:solidFill>
+          <a:ln w="12700">
+            <a:solidFill>
+              <a:srgbClr val="6366F1"/>
+            </a:solidFill>
+            <a:round/>
+          </a:ln>
+        </p:spPr>
+        <p:style>
+          <a:lnRef idx="0"/>
+          <a:fillRef idx="0"/>
+          <a:effectRef idx="0"/>
+          <a:fontRef idx="minor"/>
+        </p:style>
+        <p:txBody>
+          <a:bodyPr lIns="90000" tIns="45000" rIns="90000" bIns="45000" anchor="t">
+            <a:noAutofit/>
+          </a:bodyPr>
+          <a:p>
+            <a:endParaRPr lang="en-IN" sz="1800" b="0" u="none" strike="noStrike">
+              <a:solidFill>
+                <a:srgbClr val="000000"/>
+              </a:solidFill>
+              <a:effectLst/>
+              <a:uFillTx/>
+              <a:latin typeface="Arial"/>
+            </a:endParaRPr>
+          </a:p>
+        </p:txBody>
+      </p:sp>
+      <p:sp>
+        <p:nvSpPr>
+          <p:cNvPr id="323" name="Text 18"/>
+          <p:cNvSpPr/>
+          <p:nvPr/>
+        </p:nvSpPr>
+        <p:spPr>
+          <a:xfrm>
+            <a:off x="868680" y="5166360"/>
+            <a:ext cx="10423800" cy="959760"/>
+          </a:xfrm>
+          <a:prstGeom prst="rect">
+            <a:avLst/>
+          </a:prstGeom>
+          <a:noFill/>
+          <a:ln w="0">
+            <a:noFill/>
+          </a:ln>
+        </p:spPr>
+        <p:style>
+          <a:lnRef idx="0"/>
+          <a:fillRef idx="0"/>
+          <a:effectRef idx="0"/>
+          <a:fontRef idx="minor"/>
+        </p:style>
+        <p:txBody>
+          <a:bodyPr lIns="0" tIns="0" rIns="0" bIns="0" anchor="ctr">
+            <a:noAutofit/>
+          </a:bodyPr>
+          <a:p>
+            <a:pPr defTabSz="914400">
+              <a:lnSpc>
+                <a:spcPct val="100000"/>
+              </a:lnSpc>
+              <a:tabLst>
+                <a:tab pos="0" algn="l"/>
+              </a:tabLst>
+            </a:pPr>
+            <a:r>
+              <a:rPr lang="en-US" sz="1500" b="1" u="none" strike="noStrike">
+                <a:solidFill>
+                  <a:srgbClr val="6366F1"/>
+                </a:solidFill>
+                <a:effectLst/>
+                <a:uFillTx/>
+                <a:latin typeface="Calibri"/>
+                <a:ea typeface="Calibri"/>
+              </a:rPr>
+              <a:t>Secrets never go in the file.  </a:t>
+            </a:r>
+            <a:r>
+              <a:rPr lang="en-US" sz="1500" b="0" u="none" strike="noStrike">
+                <a:solidFill>
+                  <a:srgbClr val="1E293B"/>
+                </a:solidFill>
+                <a:effectLst/>
+                <a:uFillTx/>
+                <a:latin typeface="Calibri"/>
+                <a:ea typeface="Calibri"/>
+              </a:rPr>
+              <a:t>Settings -&gt; Secrets -&gt; Actions, then ${{ secrets.NAME }}. GitHub masks them in logs, and pull requests from forks cannot read them at all - otherwise anyone could open a PR that prints your keys.</a:t>
+            </a:r>
+            <a:endParaRPr lang="en-IN" sz="1500" b="0" u="none" strike="noStrike">
+              <a:solidFill>
+                <a:srgbClr val="000000"/>
+              </a:solidFill>
+              <a:effectLst/>
+              <a:uFillTx/>
+              <a:latin typeface="Arial"/>
+            </a:endParaRPr>
+          </a:p>
+        </p:txBody>
+      </p:sp>
+      <p:sp>
+        <p:nvSpPr>
+          <p:cNvPr id="324" name="Text 19"/>
+          <p:cNvSpPr/>
+          <p:nvPr/>
+        </p:nvSpPr>
+        <p:spPr>
+          <a:xfrm>
+            <a:off x="548640" y="6473880"/>
+            <a:ext cx="6857640" cy="228240"/>
+          </a:xfrm>
+          <a:prstGeom prst="rect">
+            <a:avLst/>
+          </a:prstGeom>
+          <a:noFill/>
+          <a:ln w="0">
+            <a:noFill/>
+          </a:ln>
+        </p:spPr>
+        <p:style>
+          <a:lnRef idx="0"/>
+          <a:fillRef idx="0"/>
+          <a:effectRef idx="0"/>
+          <a:fontRef idx="minor"/>
+        </p:style>
+        <p:txBody>
+          <a:bodyPr lIns="0" tIns="0" rIns="0" bIns="0" anchor="ctr">
+            <a:noAutofit/>
+          </a:bodyPr>
+          <a:p>
+            <a:pPr defTabSz="914400">
+              <a:lnSpc>
+                <a:spcPct val="100000"/>
+              </a:lnSpc>
+              <a:tabLst>
+                <a:tab pos="0" algn="l"/>
+              </a:tabLst>
+            </a:pPr>
+            <a:r>
+              <a:rPr lang="en-US" sz="900" b="0" u="none" strike="noStrike">
+                <a:solidFill>
+                  <a:srgbClr val="64748B"/>
+                </a:solidFill>
+                <a:effectLst/>
+                <a:uFillTx/>
+                <a:latin typeface="Calibri"/>
+                <a:ea typeface="Calibri"/>
+              </a:rPr>
+              <a:t>Auth, Docker &amp; Deploy  ·  hashing  ·  JWT  ·  roles  ·  Docker  ·  shipping it</a:t>
+            </a:r>
+            <a:endParaRPr lang="en-IN" sz="900" b="0" u="none" strike="noStrike">
+              <a:solidFill>
+                <a:srgbClr val="000000"/>
+              </a:solidFill>
+              <a:effectLst/>
+              <a:uFillTx/>
+              <a:latin typeface="Arial"/>
+            </a:endParaRPr>
+          </a:p>
+        </p:txBody>
+      </p:sp>
+      <p:sp>
+        <p:nvSpPr>
+          <p:cNvPr id="325" name="Text 20"/>
+          <p:cNvSpPr/>
+          <p:nvPr/>
+        </p:nvSpPr>
+        <p:spPr>
+          <a:xfrm>
+            <a:off x="11183040" y="6473880"/>
+            <a:ext cx="456840" cy="228240"/>
+          </a:xfrm>
+          <a:prstGeom prst="rect">
+            <a:avLst/>
+          </a:prstGeom>
+          <a:noFill/>
+          <a:ln w="0">
+            <a:noFill/>
+          </a:ln>
+        </p:spPr>
+        <p:style>
+          <a:lnRef idx="0"/>
+          <a:fillRef idx="0"/>
+          <a:effectRef idx="0"/>
+          <a:fontRef idx="minor"/>
+        </p:style>
+        <p:txBody>
+          <a:bodyPr lIns="0" tIns="0" rIns="0" bIns="0" anchor="ctr">
+            <a:noAutofit/>
+          </a:bodyPr>
+          <a:p>
+            <a:pPr algn="r" defTabSz="914400">
+              <a:lnSpc>
+                <a:spcPct val="100000"/>
+              </a:lnSpc>
+              <a:tabLst>
+                <a:tab pos="0" algn="l"/>
+              </a:tabLst>
+            </a:pPr>
+            <a:r>
+              <a:rPr lang="en-US" sz="900" b="0" u="none" strike="noStrike">
+                <a:solidFill>
+                  <a:srgbClr val="64748B"/>
+                </a:solidFill>
+                <a:effectLst/>
+                <a:uFillTx/>
+                <a:latin typeface="Calibri"/>
+                <a:ea typeface="Calibri"/>
+              </a:rPr>
+              <a:t>23</a:t>
+            </a:r>
+            <a:endParaRPr lang="en-IN" sz="900" b="0" u="none" strike="noStrike">
+              <a:solidFill>
+                <a:srgbClr val="000000"/>
+              </a:solidFill>
+              <a:effectLst/>
+              <a:uFillTx/>
+              <a:latin typeface="Arial"/>
+            </a:endParaRPr>
+          </a:p>
+        </p:txBody>
+      </p:sp>
+    </p:spTree>
+  </p:cSld>
+  <mc:AlternateContent>
+    <mc:Choice Requires="p14">
+      <p:transition spd="slow" p14:dur="2000"/>
+    </mc:Choice>
+    <mc:Fallback>
+      <p:transition spd="slow"/>
+    </mc:Fallback>
+  </mc:AlternateContent>
+</p:sld>
+</file>
+
+<file path=ppt/slides/slide24.xml><?xml version="1.0" encoding="utf-8"?>
+<p:sld xmlns:a="http://schemas.openxmlformats.org/drawingml/2006/main" xmlns:p="http://schemas.openxmlformats.org/presentationml/2006/main" xmlns:r="http://schemas.openxmlformats.org/officeDocument/2006/relationships" xmlns:p14="http://schemas.microsoft.com/office/powerpoint/2010/main" xmlns:p15="http://schemas.microsoft.com/office/powerpoint/2012/main" xmlns:mc="http://schemas.openxmlformats.org/markup-compatibility/2006">
+  <p:cSld>
+    <p:spTree>
+      <p:nvGrpSpPr>
+        <p:cNvPr id="1" name=""/>
+        <p:cNvGrpSpPr/>
+        <p:nvPr/>
+      </p:nvGrpSpPr>
+      <p:grpSpPr>
+        <a:xfrm>
+          <a:off x="0" y="0"/>
+          <a:ext cx="0" cy="0"/>
+          <a:chOff x="0" y="0"/>
+          <a:chExt cx="0" cy="0"/>
+        </a:xfrm>
+      </p:grpSpPr>
+      <p:sp>
+        <p:nvSpPr>
+          <p:cNvPr id="326" name="Text 0"/>
+          <p:cNvSpPr/>
+          <p:nvPr/>
+        </p:nvSpPr>
+        <p:spPr>
+          <a:xfrm>
+            <a:off x="548640" y="457200"/>
+            <a:ext cx="11091240" cy="731160"/>
+          </a:xfrm>
+          <a:prstGeom prst="rect">
+            <a:avLst/>
+          </a:prstGeom>
+          <a:noFill/>
+          <a:ln w="0">
+            <a:noFill/>
+          </a:ln>
+        </p:spPr>
+        <p:style>
+          <a:lnRef idx="0"/>
+          <a:fillRef idx="0"/>
+          <a:effectRef idx="0"/>
+          <a:fontRef idx="minor"/>
+        </p:style>
+        <p:txBody>
+          <a:bodyPr lIns="0" tIns="0" rIns="0" bIns="0" anchor="ctr">
+            <a:noAutofit/>
+          </a:bodyPr>
+          <a:p>
+            <a:pPr defTabSz="914400">
+              <a:lnSpc>
+                <a:spcPct val="100000"/>
+              </a:lnSpc>
+              <a:tabLst>
+                <a:tab pos="0" algn="l"/>
+              </a:tabLst>
+            </a:pPr>
+            <a:r>
+              <a:rPr lang="en-US" sz="3000" b="1" u="none" strike="noStrike">
+                <a:solidFill>
+                  <a:srgbClr val="1E293B"/>
+                </a:solidFill>
+                <a:effectLst/>
+                <a:uFillTx/>
+                <a:latin typeface="Calibri"/>
+                <a:ea typeface="Calibri"/>
+              </a:rPr>
+              <a:t>Week 1 meets Week 2, and it is an anticlimax</a:t>
+            </a:r>
+            <a:endParaRPr lang="en-IN" sz="3000" b="0" u="none" strike="noStrike">
+              <a:solidFill>
+                <a:srgbClr val="000000"/>
+              </a:solidFill>
+              <a:effectLst/>
+              <a:uFillTx/>
+              <a:latin typeface="Arial"/>
+            </a:endParaRPr>
+          </a:p>
+        </p:txBody>
+      </p:sp>
+      <p:sp>
+        <p:nvSpPr>
+          <p:cNvPr id="327" name="Shape 1"/>
+          <p:cNvSpPr/>
+          <p:nvPr/>
+        </p:nvSpPr>
+        <p:spPr>
+          <a:xfrm>
+            <a:off x="548640" y="1554480"/>
+            <a:ext cx="11091240" cy="1737000"/>
+          </a:xfrm>
+          <a:prstGeom prst="roundRect">
+            <a:avLst>
+              <a:gd name="adj" fmla="val 3158"/>
+            </a:avLst>
+          </a:prstGeom>
+          <a:solidFill>
+            <a:srgbClr val="F3F4F6"/>
+          </a:solidFill>
+          <a:ln w="12700">
+            <a:solidFill>
+              <a:srgbClr val="E2E8F0"/>
+            </a:solidFill>
+            <a:round/>
+          </a:ln>
+        </p:spPr>
+        <p:style>
+          <a:lnRef idx="0"/>
+          <a:fillRef idx="0"/>
+          <a:effectRef idx="0"/>
+          <a:fontRef idx="minor"/>
+        </p:style>
+        <p:txBody>
+          <a:bodyPr lIns="90000" tIns="45000" rIns="90000" bIns="45000" anchor="t">
+            <a:noAutofit/>
+          </a:bodyPr>
+          <a:p>
+            <a:endParaRPr lang="en-IN" sz="1800" b="0" u="none" strike="noStrike">
+              <a:solidFill>
+                <a:srgbClr val="000000"/>
+              </a:solidFill>
+              <a:effectLst/>
+              <a:uFillTx/>
+              <a:latin typeface="Arial"/>
+            </a:endParaRPr>
+          </a:p>
+        </p:txBody>
+      </p:sp>
+      <p:sp>
+        <p:nvSpPr>
+          <p:cNvPr id="328" name="Text 2"/>
+          <p:cNvSpPr/>
+          <p:nvPr/>
+        </p:nvSpPr>
+        <p:spPr>
+          <a:xfrm>
+            <a:off x="804600" y="1737360"/>
+            <a:ext cx="10579320" cy="1371240"/>
+          </a:xfrm>
+          <a:prstGeom prst="rect">
+            <a:avLst/>
+          </a:prstGeom>
+          <a:noFill/>
+          <a:ln w="0">
+            <a:noFill/>
+          </a:ln>
+        </p:spPr>
+        <p:style>
+          <a:lnRef idx="0"/>
+          <a:fillRef idx="0"/>
+          <a:effectRef idx="0"/>
+          <a:fontRef idx="minor"/>
+        </p:style>
+        <p:txBody>
+          <a:bodyPr lIns="0" tIns="0" rIns="0" bIns="0" anchor="t">
+            <a:noAutofit/>
+          </a:bodyPr>
+          <a:p>
+            <a:pPr defTabSz="914400">
+              <a:lnSpc>
+                <a:spcPct val="115000"/>
+              </a:lnSpc>
+              <a:tabLst>
+                <a:tab pos="0" algn="l"/>
+              </a:tabLst>
+            </a:pPr>
+            <a:r>
+              <a:rPr lang="en-US" sz="1150" b="0" u="none" strike="noStrike">
+                <a:solidFill>
+                  <a:srgbClr val="1E293B"/>
+                </a:solidFill>
+                <a:effectLst/>
+                <a:uFillTx/>
+                <a:latin typeface="Courier New"/>
+                <a:ea typeface="Courier New"/>
+              </a:rPr>
+              <a:t>@router.post("/ask")</a:t>
+            </a:r>
+            <a:endParaRPr lang="en-IN" sz="1150" b="0" u="none" strike="noStrike">
+              <a:solidFill>
+                <a:srgbClr val="000000"/>
+              </a:solidFill>
+              <a:effectLst/>
+              <a:uFillTx/>
+              <a:latin typeface="Arial"/>
+            </a:endParaRPr>
+          </a:p>
+          <a:p>
+            <a:pPr defTabSz="914400">
+              <a:lnSpc>
+                <a:spcPct val="115000"/>
+              </a:lnSpc>
+              <a:tabLst>
+                <a:tab pos="0" algn="l"/>
+              </a:tabLst>
+            </a:pPr>
+            <a:r>
+              <a:rPr lang="en-US" sz="1150" b="0" u="none" strike="noStrike">
+                <a:solidFill>
+                  <a:srgbClr val="1E293B"/>
+                </a:solidFill>
+                <a:effectLst/>
+                <a:uFillTx/>
+                <a:latin typeface="Courier New"/>
+                <a:ea typeface="Courier New"/>
+              </a:rPr>
+              <a:t>def ask(incoming: AskIn, db: Session = Depends(get_db),</a:t>
+            </a:r>
+            <a:endParaRPr lang="en-IN" sz="1150" b="0" u="none" strike="noStrike">
+              <a:solidFill>
+                <a:srgbClr val="000000"/>
+              </a:solidFill>
+              <a:effectLst/>
+              <a:uFillTx/>
+              <a:latin typeface="Arial"/>
+            </a:endParaRPr>
+          </a:p>
+          <a:p>
+            <a:pPr defTabSz="914400">
+              <a:lnSpc>
+                <a:spcPct val="115000"/>
+              </a:lnSpc>
+              <a:tabLst>
+                <a:tab pos="0" algn="l"/>
+              </a:tabLst>
+            </a:pPr>
+            <a:r>
+              <a:rPr lang="en-US" sz="1150" b="0" u="none" strike="noStrike">
+                <a:solidFill>
+                  <a:srgbClr val="1E293B"/>
+                </a:solidFill>
+                <a:effectLst/>
+                <a:uFillTx/>
+                <a:latin typeface="Courier New"/>
+                <a:ea typeface="Courier New"/>
+              </a:rPr>
+              <a:t>        user: User = Depends(get_current_user)):        # the SAME padlock</a:t>
+            </a:r>
+            <a:endParaRPr lang="en-IN" sz="1150" b="0" u="none" strike="noStrike">
+              <a:solidFill>
+                <a:srgbClr val="000000"/>
+              </a:solidFill>
+              <a:effectLst/>
+              <a:uFillTx/>
+              <a:latin typeface="Arial"/>
+            </a:endParaRPr>
+          </a:p>
+          <a:p>
+            <a:pPr defTabSz="914400">
+              <a:lnSpc>
+                <a:spcPct val="115000"/>
+              </a:lnSpc>
+              <a:tabLst>
+                <a:tab pos="0" algn="l"/>
+              </a:tabLst>
+            </a:pPr>
+            <a:r>
+              <a:rPr lang="en-US" sz="1150" b="0" u="none" strike="noStrike">
+                <a:solidFill>
+                  <a:srgbClr val="1E293B"/>
+                </a:solidFill>
+                <a:effectLst/>
+                <a:uFillTx/>
+                <a:latin typeface="Courier New"/>
+                <a:ea typeface="Courier New"/>
+              </a:rPr>
+              <a:t>    context = "\n".join(f"- {c.code}: {c.title}" for c in db.scalars(select(Course)).all())</a:t>
+            </a:r>
+            <a:endParaRPr lang="en-IN" sz="1150" b="0" u="none" strike="noStrike">
+              <a:solidFill>
+                <a:srgbClr val="000000"/>
+              </a:solidFill>
+              <a:effectLst/>
+              <a:uFillTx/>
+              <a:latin typeface="Arial"/>
+            </a:endParaRPr>
+          </a:p>
+          <a:p>
+            <a:pPr defTabSz="914400">
+              <a:lnSpc>
+                <a:spcPct val="115000"/>
+              </a:lnSpc>
+              <a:tabLst>
+                <a:tab pos="0" algn="l"/>
+              </a:tabLst>
+            </a:pPr>
+            <a:r>
+              <a:rPr lang="en-US" sz="1150" b="0" u="none" strike="noStrike">
+                <a:solidFill>
+                  <a:srgbClr val="1E293B"/>
+                </a:solidFill>
+                <a:effectLst/>
+                <a:uFillTx/>
+                <a:latin typeface="Courier New"/>
+                <a:ea typeface="Courier New"/>
+              </a:rPr>
+              <a:t>    prompt = f"Answer using ONLY this list.\n\n{context}\n\nQuestion: {incoming.question}"</a:t>
+            </a:r>
+            <a:endParaRPr lang="en-IN" sz="1150" b="0" u="none" strike="noStrike">
+              <a:solidFill>
+                <a:srgbClr val="000000"/>
+              </a:solidFill>
+              <a:effectLst/>
+              <a:uFillTx/>
+              <a:latin typeface="Arial"/>
+            </a:endParaRPr>
+          </a:p>
+        </p:txBody>
+      </p:sp>
+      <p:sp>
+        <p:nvSpPr>
+          <p:cNvPr id="329" name="Shape 3"/>
+          <p:cNvSpPr/>
+          <p:nvPr/>
+        </p:nvSpPr>
+        <p:spPr>
+          <a:xfrm>
+            <a:off x="548640" y="3474720"/>
+            <a:ext cx="11091240" cy="529920"/>
+          </a:xfrm>
+          <a:prstGeom prst="roundRect">
+            <a:avLst>
+              <a:gd name="adj" fmla="val 17241"/>
             </a:avLst>
           </a:prstGeom>
           <a:solidFill>
@@ -15204,14 +18977,14 @@
       </p:sp>
       <p:sp>
         <p:nvSpPr>
-          <p:cNvPr id="286" name="Text 4"/>
-          <p:cNvSpPr/>
-          <p:nvPr/>
-        </p:nvSpPr>
-        <p:spPr>
-          <a:xfrm>
-            <a:off x="822960" y="2560320"/>
-            <a:ext cx="3291480" cy="566640"/>
+          <p:cNvPr id="330" name="Text 4"/>
+          <p:cNvSpPr/>
+          <p:nvPr/>
+        </p:nvSpPr>
+        <p:spPr>
+          <a:xfrm>
+            <a:off x="822960" y="3474720"/>
+            <a:ext cx="1645560" cy="529920"/>
           </a:xfrm>
           <a:prstGeom prst="rect">
             <a:avLst/>
@@ -15241,7 +19014,7 @@
               </a:tabLst>
             </a:pPr>
             <a:r>
-              <a:rPr lang="en-US" sz="1450" b="1" u="none" strike="noStrike">
+              <a:rPr lang="en-US" sz="1500" b="1" u="none" strike="noStrike">
                 <a:solidFill>
                   <a:srgbClr val="6366F1"/>
                 </a:solidFill>
@@ -15250,29 +19023,29 @@
                 <a:latin typeface="Calibri"/>
                 <a:ea typeface="Calibri"/>
               </a:rPr>
-              <a:t>A class became an API</a:t>
-            </a:r>
-            <a:endParaRPr lang="en-IN" sz="1450" b="0" u="none" strike="noStrike">
-              <a:solidFill>
-                <a:srgbClr val="000000"/>
-              </a:solidFill>
-              <a:effectLst/>
-              <a:uFillTx/>
-              <a:latin typeface="Arial"/>
-            </a:endParaRPr>
-          </a:p>
-        </p:txBody>
-      </p:sp>
-      <p:sp>
-        <p:nvSpPr>
-          <p:cNvPr id="287" name="Text 5"/>
-          <p:cNvSpPr/>
-          <p:nvPr/>
-        </p:nvSpPr>
-        <p:spPr>
-          <a:xfrm>
-            <a:off x="4206240" y="2560320"/>
-            <a:ext cx="7223400" cy="566640"/>
+              <a:t>Retrieve</a:t>
+            </a:r>
+            <a:endParaRPr lang="en-IN" sz="1500" b="0" u="none" strike="noStrike">
+              <a:solidFill>
+                <a:srgbClr val="000000"/>
+              </a:solidFill>
+              <a:effectLst/>
+              <a:uFillTx/>
+              <a:latin typeface="Arial"/>
+            </a:endParaRPr>
+          </a:p>
+        </p:txBody>
+      </p:sp>
+      <p:sp>
+        <p:nvSpPr>
+          <p:cNvPr id="331" name="Text 5"/>
+          <p:cNvSpPr/>
+          <p:nvPr/>
+        </p:nvSpPr>
+        <p:spPr>
+          <a:xfrm>
+            <a:off x="2560320" y="3474720"/>
+            <a:ext cx="8869320" cy="529920"/>
           </a:xfrm>
           <a:prstGeom prst="rect">
             <a:avLst/>
@@ -15311,7 +19084,7 @@
                 <a:latin typeface="Calibri"/>
                 <a:ea typeface="Calibri"/>
               </a:rPr>
-              <a:t>objects → endpoints → validation that writes itself</a:t>
+              <a:t>from your own database, instead of a vector store</a:t>
             </a:r>
             <a:endParaRPr lang="en-IN" sz="1350" b="0" u="none" strike="noStrike">
               <a:solidFill>
@@ -15326,18 +19099,18 @@
       </p:sp>
       <p:sp>
         <p:nvSpPr>
-          <p:cNvPr id="288" name="Shape 6"/>
-          <p:cNvSpPr/>
-          <p:nvPr/>
-        </p:nvSpPr>
-        <p:spPr>
-          <a:xfrm>
-            <a:off x="548640" y="3218760"/>
-            <a:ext cx="11091240" cy="566640"/>
+          <p:cNvPr id="332" name="Shape 6"/>
+          <p:cNvSpPr/>
+          <p:nvPr/>
+        </p:nvSpPr>
+        <p:spPr>
+          <a:xfrm>
+            <a:off x="548640" y="4078080"/>
+            <a:ext cx="11091240" cy="529920"/>
           </a:xfrm>
           <a:prstGeom prst="roundRect">
             <a:avLst>
-              <a:gd name="adj" fmla="val 16129"/>
+              <a:gd name="adj" fmla="val 17241"/>
             </a:avLst>
           </a:prstGeom>
           <a:solidFill>
@@ -15374,14 +19147,14 @@
       </p:sp>
       <p:sp>
         <p:nvSpPr>
-          <p:cNvPr id="289" name="Text 7"/>
-          <p:cNvSpPr/>
-          <p:nvPr/>
-        </p:nvSpPr>
-        <p:spPr>
-          <a:xfrm>
-            <a:off x="822960" y="3218760"/>
-            <a:ext cx="3291480" cy="566640"/>
+          <p:cNvPr id="333" name="Text 7"/>
+          <p:cNvSpPr/>
+          <p:nvPr/>
+        </p:nvSpPr>
+        <p:spPr>
+          <a:xfrm>
+            <a:off x="822960" y="4078080"/>
+            <a:ext cx="1645560" cy="529920"/>
           </a:xfrm>
           <a:prstGeom prst="rect">
             <a:avLst/>
@@ -15411,38 +19184,38 @@
               </a:tabLst>
             </a:pPr>
             <a:r>
-              <a:rPr lang="en-US" sz="1450" b="1" u="none" strike="noStrike">
-                <a:solidFill>
-                  <a:srgbClr val="6366F1"/>
+              <a:rPr lang="en-US" sz="1500" b="1" u="none" strike="noStrike">
+                <a:solidFill>
+                  <a:srgbClr val="0891B2"/>
                 </a:solidFill>
                 <a:effectLst/>
                 <a:uFillTx/>
                 <a:latin typeface="Calibri"/>
                 <a:ea typeface="Calibri"/>
               </a:rPr>
-              <a:t>The API got a memory</a:t>
-            </a:r>
-            <a:endParaRPr lang="en-IN" sz="1450" b="0" u="none" strike="noStrike">
-              <a:solidFill>
-                <a:srgbClr val="000000"/>
-              </a:solidFill>
-              <a:effectLst/>
-              <a:uFillTx/>
-              <a:latin typeface="Arial"/>
-            </a:endParaRPr>
-          </a:p>
-        </p:txBody>
-      </p:sp>
-      <p:sp>
-        <p:nvSpPr>
-          <p:cNvPr id="290" name="Text 8"/>
-          <p:cNvSpPr/>
-          <p:nvPr/>
-        </p:nvSpPr>
-        <p:spPr>
-          <a:xfrm>
-            <a:off x="4206240" y="3218760"/>
-            <a:ext cx="7223400" cy="566640"/>
+              <a:t>Augment</a:t>
+            </a:r>
+            <a:endParaRPr lang="en-IN" sz="1500" b="0" u="none" strike="noStrike">
+              <a:solidFill>
+                <a:srgbClr val="000000"/>
+              </a:solidFill>
+              <a:effectLst/>
+              <a:uFillTx/>
+              <a:latin typeface="Arial"/>
+            </a:endParaRPr>
+          </a:p>
+        </p:txBody>
+      </p:sp>
+      <p:sp>
+        <p:nvSpPr>
+          <p:cNvPr id="334" name="Text 8"/>
+          <p:cNvSpPr/>
+          <p:nvPr/>
+        </p:nvSpPr>
+        <p:spPr>
+          <a:xfrm>
+            <a:off x="2560320" y="4078080"/>
+            <a:ext cx="8869320" cy="529920"/>
           </a:xfrm>
           <a:prstGeom prst="rect">
             <a:avLst/>
@@ -15481,7 +19254,7 @@
                 <a:latin typeface="Calibri"/>
                 <a:ea typeface="Calibri"/>
               </a:rPr>
-              <a:t>SQL, PostgreSQL, SQLAlchemy — it survives a restart</a:t>
+              <a:t>the context goes into the prompt</a:t>
             </a:r>
             <a:endParaRPr lang="en-IN" sz="1350" b="0" u="none" strike="noStrike">
               <a:solidFill>
@@ -15496,18 +19269,18 @@
       </p:sp>
       <p:sp>
         <p:nvSpPr>
-          <p:cNvPr id="291" name="Shape 9"/>
-          <p:cNvSpPr/>
-          <p:nvPr/>
-        </p:nvSpPr>
-        <p:spPr>
-          <a:xfrm>
-            <a:off x="548640" y="3877200"/>
-            <a:ext cx="11091240" cy="566640"/>
+          <p:cNvPr id="335" name="Shape 9"/>
+          <p:cNvSpPr/>
+          <p:nvPr/>
+        </p:nvSpPr>
+        <p:spPr>
+          <a:xfrm>
+            <a:off x="548640" y="4681800"/>
+            <a:ext cx="11091240" cy="529920"/>
           </a:xfrm>
           <a:prstGeom prst="roundRect">
             <a:avLst>
-              <a:gd name="adj" fmla="val 16129"/>
+              <a:gd name="adj" fmla="val 17241"/>
             </a:avLst>
           </a:prstGeom>
           <a:solidFill>
@@ -15544,14 +19317,14 @@
       </p:sp>
       <p:sp>
         <p:nvSpPr>
-          <p:cNvPr id="292" name="Text 10"/>
-          <p:cNvSpPr/>
-          <p:nvPr/>
-        </p:nvSpPr>
-        <p:spPr>
-          <a:xfrm>
-            <a:off x="822960" y="3877200"/>
-            <a:ext cx="3291480" cy="566640"/>
+          <p:cNvPr id="336" name="Text 10"/>
+          <p:cNvSpPr/>
+          <p:nvPr/>
+        </p:nvSpPr>
+        <p:spPr>
+          <a:xfrm>
+            <a:off x="822960" y="4681800"/>
+            <a:ext cx="1645560" cy="529920"/>
           </a:xfrm>
           <a:prstGeom prst="rect">
             <a:avLst/>
@@ -15581,38 +19354,38 @@
               </a:tabLst>
             </a:pPr>
             <a:r>
-              <a:rPr lang="en-US" sz="1450" b="1" u="none" strike="noStrike">
-                <a:solidFill>
-                  <a:srgbClr val="0891B2"/>
+              <a:rPr lang="en-US" sz="1500" b="1" u="none" strike="noStrike">
+                <a:solidFill>
+                  <a:srgbClr val="15803D"/>
                 </a:solidFill>
                 <a:effectLst/>
                 <a:uFillTx/>
                 <a:latin typeface="Calibri"/>
                 <a:ea typeface="Calibri"/>
               </a:rPr>
-              <a:t>It learned who is asking</a:t>
-            </a:r>
-            <a:endParaRPr lang="en-IN" sz="1450" b="0" u="none" strike="noStrike">
-              <a:solidFill>
-                <a:srgbClr val="000000"/>
-              </a:solidFill>
-              <a:effectLst/>
-              <a:uFillTx/>
-              <a:latin typeface="Arial"/>
-            </a:endParaRPr>
-          </a:p>
-        </p:txBody>
-      </p:sp>
-      <p:sp>
-        <p:nvSpPr>
-          <p:cNvPr id="293" name="Text 11"/>
-          <p:cNvSpPr/>
-          <p:nvPr/>
-        </p:nvSpPr>
-        <p:spPr>
-          <a:xfrm>
-            <a:off x="4206240" y="3877200"/>
-            <a:ext cx="7223400" cy="566640"/>
+              <a:t>Generate</a:t>
+            </a:r>
+            <a:endParaRPr lang="en-IN" sz="1500" b="0" u="none" strike="noStrike">
+              <a:solidFill>
+                <a:srgbClr val="000000"/>
+              </a:solidFill>
+              <a:effectLst/>
+              <a:uFillTx/>
+              <a:latin typeface="Arial"/>
+            </a:endParaRPr>
+          </a:p>
+        </p:txBody>
+      </p:sp>
+      <p:sp>
+        <p:nvSpPr>
+          <p:cNvPr id="337" name="Text 11"/>
+          <p:cNvSpPr/>
+          <p:nvPr/>
+        </p:nvSpPr>
+        <p:spPr>
+          <a:xfrm>
+            <a:off x="2560320" y="4681800"/>
+            <a:ext cx="8869320" cy="529920"/>
           </a:xfrm>
           <a:prstGeom prst="rect">
             <a:avLst/>
@@ -15651,7 +19424,7 @@
                 <a:latin typeface="Calibri"/>
                 <a:ea typeface="Calibri"/>
               </a:rPr>
-              <a:t>hashing, JWT, get_current_user, roles</a:t>
+              <a:t>and the model answers from YOUR data, not its memory</a:t>
             </a:r>
             <a:endParaRPr lang="en-IN" sz="1350" b="0" u="none" strike="noStrike">
               <a:solidFill>
@@ -15666,13 +19439,486 @@
       </p:sp>
       <p:sp>
         <p:nvSpPr>
-          <p:cNvPr id="294" name="Shape 12"/>
-          <p:cNvSpPr/>
-          <p:nvPr/>
-        </p:nvSpPr>
-        <p:spPr>
-          <a:xfrm>
-            <a:off x="548640" y="4535280"/>
+          <p:cNvPr id="338" name="Shape 12"/>
+          <p:cNvSpPr/>
+          <p:nvPr/>
+        </p:nvSpPr>
+        <p:spPr>
+          <a:xfrm>
+            <a:off x="548640" y="5394960"/>
+            <a:ext cx="11091240" cy="731160"/>
+          </a:xfrm>
+          <a:prstGeom prst="roundRect">
+            <a:avLst>
+              <a:gd name="adj" fmla="val 12500"/>
+            </a:avLst>
+          </a:prstGeom>
+          <a:solidFill>
+            <a:srgbClr val="EEF0FF"/>
+          </a:solidFill>
+          <a:ln w="12700">
+            <a:solidFill>
+              <a:srgbClr val="6366F1"/>
+            </a:solidFill>
+            <a:round/>
+          </a:ln>
+        </p:spPr>
+        <p:style>
+          <a:lnRef idx="0"/>
+          <a:fillRef idx="0"/>
+          <a:effectRef idx="0"/>
+          <a:fontRef idx="minor"/>
+        </p:style>
+        <p:txBody>
+          <a:bodyPr lIns="90000" tIns="45000" rIns="90000" bIns="45000" anchor="t">
+            <a:noAutofit/>
+          </a:bodyPr>
+          <a:p>
+            <a:endParaRPr lang="en-IN" sz="1800" b="0" u="none" strike="noStrike">
+              <a:solidFill>
+                <a:srgbClr val="000000"/>
+              </a:solidFill>
+              <a:effectLst/>
+              <a:uFillTx/>
+              <a:latin typeface="Arial"/>
+            </a:endParaRPr>
+          </a:p>
+        </p:txBody>
+      </p:sp>
+      <p:sp>
+        <p:nvSpPr>
+          <p:cNvPr id="339" name="Text 13"/>
+          <p:cNvSpPr/>
+          <p:nvPr/>
+        </p:nvSpPr>
+        <p:spPr>
+          <a:xfrm>
+            <a:off x="868680" y="5394960"/>
+            <a:ext cx="10423800" cy="731160"/>
+          </a:xfrm>
+          <a:prstGeom prst="rect">
+            <a:avLst/>
+          </a:prstGeom>
+          <a:noFill/>
+          <a:ln w="0">
+            <a:noFill/>
+          </a:ln>
+        </p:spPr>
+        <p:style>
+          <a:lnRef idx="0"/>
+          <a:fillRef idx="0"/>
+          <a:effectRef idx="0"/>
+          <a:fontRef idx="minor"/>
+        </p:style>
+        <p:txBody>
+          <a:bodyPr lIns="0" tIns="0" rIns="0" bIns="0" anchor="ctr">
+            <a:noAutofit/>
+          </a:bodyPr>
+          <a:p>
+            <a:pPr defTabSz="914400">
+              <a:lnSpc>
+                <a:spcPct val="100000"/>
+              </a:lnSpc>
+              <a:tabLst>
+                <a:tab pos="0" algn="l"/>
+              </a:tabLst>
+            </a:pPr>
+            <a:r>
+              <a:rPr lang="en-US" sz="1500" b="1" u="none" strike="noStrike">
+                <a:solidFill>
+                  <a:srgbClr val="6366F1"/>
+                </a:solidFill>
+                <a:effectLst/>
+                <a:uFillTx/>
+                <a:latin typeface="Calibri"/>
+                <a:ea typeface="Calibri"/>
+              </a:rPr>
+              <a:t>An AI feature is not a different kind of software.  </a:t>
+            </a:r>
+            <a:r>
+              <a:rPr lang="en-US" sz="1500" b="0" u="none" strike="noStrike">
+                <a:solidFill>
+                  <a:srgbClr val="1E293B"/>
+                </a:solidFill>
+                <a:effectLst/>
+                <a:uFillTx/>
+                <a:latin typeface="Calibri"/>
+                <a:ea typeface="Calibri"/>
+              </a:rPr>
+              <a:t>It is an endpoint that happens to call a model — and the AI part is ten lines of it.</a:t>
+            </a:r>
+            <a:endParaRPr lang="en-IN" sz="1500" b="0" u="none" strike="noStrike">
+              <a:solidFill>
+                <a:srgbClr val="000000"/>
+              </a:solidFill>
+              <a:effectLst/>
+              <a:uFillTx/>
+              <a:latin typeface="Arial"/>
+            </a:endParaRPr>
+          </a:p>
+        </p:txBody>
+      </p:sp>
+      <p:sp>
+        <p:nvSpPr>
+          <p:cNvPr id="340" name="Text 14"/>
+          <p:cNvSpPr/>
+          <p:nvPr/>
+        </p:nvSpPr>
+        <p:spPr>
+          <a:xfrm>
+            <a:off x="548640" y="6473880"/>
+            <a:ext cx="6857640" cy="228240"/>
+          </a:xfrm>
+          <a:prstGeom prst="rect">
+            <a:avLst/>
+          </a:prstGeom>
+          <a:noFill/>
+          <a:ln w="0">
+            <a:noFill/>
+          </a:ln>
+        </p:spPr>
+        <p:style>
+          <a:lnRef idx="0"/>
+          <a:fillRef idx="0"/>
+          <a:effectRef idx="0"/>
+          <a:fontRef idx="minor"/>
+        </p:style>
+        <p:txBody>
+          <a:bodyPr lIns="0" tIns="0" rIns="0" bIns="0" anchor="ctr">
+            <a:noAutofit/>
+          </a:bodyPr>
+          <a:p>
+            <a:pPr defTabSz="914400">
+              <a:lnSpc>
+                <a:spcPct val="100000"/>
+              </a:lnSpc>
+              <a:tabLst>
+                <a:tab pos="0" algn="l"/>
+              </a:tabLst>
+            </a:pPr>
+            <a:r>
+              <a:rPr lang="en-US" sz="900" b="0" u="none" strike="noStrike">
+                <a:solidFill>
+                  <a:srgbClr val="64748B"/>
+                </a:solidFill>
+                <a:effectLst/>
+                <a:uFillTx/>
+                <a:latin typeface="Calibri"/>
+                <a:ea typeface="Calibri"/>
+              </a:rPr>
+              <a:t>Auth, Docker &amp; Deploy  ·  hashing  ·  JWT  ·  roles  ·  Docker  ·  shipping it</a:t>
+            </a:r>
+            <a:endParaRPr lang="en-IN" sz="900" b="0" u="none" strike="noStrike">
+              <a:solidFill>
+                <a:srgbClr val="000000"/>
+              </a:solidFill>
+              <a:effectLst/>
+              <a:uFillTx/>
+              <a:latin typeface="Arial"/>
+            </a:endParaRPr>
+          </a:p>
+        </p:txBody>
+      </p:sp>
+      <p:sp>
+        <p:nvSpPr>
+          <p:cNvPr id="341" name="Text 15"/>
+          <p:cNvSpPr/>
+          <p:nvPr/>
+        </p:nvSpPr>
+        <p:spPr>
+          <a:xfrm>
+            <a:off x="11183040" y="6473880"/>
+            <a:ext cx="456840" cy="228240"/>
+          </a:xfrm>
+          <a:prstGeom prst="rect">
+            <a:avLst/>
+          </a:prstGeom>
+          <a:noFill/>
+          <a:ln w="0">
+            <a:noFill/>
+          </a:ln>
+        </p:spPr>
+        <p:style>
+          <a:lnRef idx="0"/>
+          <a:fillRef idx="0"/>
+          <a:effectRef idx="0"/>
+          <a:fontRef idx="minor"/>
+        </p:style>
+        <p:txBody>
+          <a:bodyPr lIns="0" tIns="0" rIns="0" bIns="0" anchor="ctr">
+            <a:noAutofit/>
+          </a:bodyPr>
+          <a:p>
+            <a:pPr algn="r" defTabSz="914400">
+              <a:lnSpc>
+                <a:spcPct val="100000"/>
+              </a:lnSpc>
+              <a:tabLst>
+                <a:tab pos="0" algn="l"/>
+              </a:tabLst>
+            </a:pPr>
+            <a:r>
+              <a:rPr lang="en-US" sz="900" b="0" u="none" strike="noStrike">
+                <a:solidFill>
+                  <a:srgbClr val="64748B"/>
+                </a:solidFill>
+                <a:effectLst/>
+                <a:uFillTx/>
+                <a:latin typeface="Calibri"/>
+                <a:ea typeface="Calibri"/>
+              </a:rPr>
+              <a:t>24</a:t>
+            </a:r>
+            <a:endParaRPr lang="en-IN" sz="900" b="0" u="none" strike="noStrike">
+              <a:solidFill>
+                <a:srgbClr val="000000"/>
+              </a:solidFill>
+              <a:effectLst/>
+              <a:uFillTx/>
+              <a:latin typeface="Arial"/>
+            </a:endParaRPr>
+          </a:p>
+        </p:txBody>
+      </p:sp>
+    </p:spTree>
+  </p:cSld>
+  <mc:AlternateContent>
+    <mc:Choice Requires="p14">
+      <p:transition spd="slow" p14:dur="2000"/>
+    </mc:Choice>
+    <mc:Fallback>
+      <p:transition spd="slow"/>
+    </mc:Fallback>
+  </mc:AlternateContent>
+</p:sld>
+</file>
+
+<file path=ppt/slides/slide25.xml><?xml version="1.0" encoding="utf-8"?>
+<p:sld xmlns:a="http://schemas.openxmlformats.org/drawingml/2006/main" xmlns:p="http://schemas.openxmlformats.org/presentationml/2006/main" xmlns:r="http://schemas.openxmlformats.org/officeDocument/2006/relationships" xmlns:p14="http://schemas.microsoft.com/office/powerpoint/2010/main" xmlns:p15="http://schemas.microsoft.com/office/powerpoint/2012/main" xmlns:mc="http://schemas.openxmlformats.org/markup-compatibility/2006">
+  <p:cSld>
+    <p:spTree>
+      <p:nvGrpSpPr>
+        <p:cNvPr id="1" name=""/>
+        <p:cNvGrpSpPr/>
+        <p:nvPr/>
+      </p:nvGrpSpPr>
+      <p:grpSpPr>
+        <a:xfrm>
+          <a:off x="0" y="0"/>
+          <a:ext cx="0" cy="0"/>
+          <a:chOff x="0" y="0"/>
+          <a:chExt cx="0" cy="0"/>
+        </a:xfrm>
+      </p:grpSpPr>
+      <p:sp>
+        <p:nvSpPr>
+          <p:cNvPr id="342" name="Text 0"/>
+          <p:cNvSpPr/>
+          <p:nvPr/>
+        </p:nvSpPr>
+        <p:spPr>
+          <a:xfrm>
+            <a:off x="548640" y="457200"/>
+            <a:ext cx="11091240" cy="731160"/>
+          </a:xfrm>
+          <a:prstGeom prst="rect">
+            <a:avLst/>
+          </a:prstGeom>
+          <a:noFill/>
+          <a:ln w="0">
+            <a:noFill/>
+          </a:ln>
+        </p:spPr>
+        <p:style>
+          <a:lnRef idx="0"/>
+          <a:fillRef idx="0"/>
+          <a:effectRef idx="0"/>
+          <a:fontRef idx="minor"/>
+        </p:style>
+        <p:txBody>
+          <a:bodyPr lIns="0" tIns="0" rIns="0" bIns="0" anchor="ctr">
+            <a:noAutofit/>
+          </a:bodyPr>
+          <a:p>
+            <a:pPr defTabSz="914400">
+              <a:lnSpc>
+                <a:spcPct val="100000"/>
+              </a:lnSpc>
+              <a:tabLst>
+                <a:tab pos="0" algn="l"/>
+              </a:tabLst>
+            </a:pPr>
+            <a:r>
+              <a:rPr lang="en-US" sz="3000" b="1" u="none" strike="noStrike">
+                <a:solidFill>
+                  <a:srgbClr val="1E293B"/>
+                </a:solidFill>
+                <a:effectLst/>
+                <a:uFillTx/>
+                <a:latin typeface="Calibri"/>
+                <a:ea typeface="Calibri"/>
+              </a:rPr>
+              <a:t>Where you started, and where you are now</a:t>
+            </a:r>
+            <a:endParaRPr lang="en-IN" sz="3000" b="0" u="none" strike="noStrike">
+              <a:solidFill>
+                <a:srgbClr val="000000"/>
+              </a:solidFill>
+              <a:effectLst/>
+              <a:uFillTx/>
+              <a:latin typeface="Arial"/>
+            </a:endParaRPr>
+          </a:p>
+        </p:txBody>
+      </p:sp>
+      <p:sp>
+        <p:nvSpPr>
+          <p:cNvPr id="343" name="Shape 1"/>
+          <p:cNvSpPr/>
+          <p:nvPr/>
+        </p:nvSpPr>
+        <p:spPr>
+          <a:xfrm>
+            <a:off x="548640" y="1554480"/>
+            <a:ext cx="11091240" cy="776880"/>
+          </a:xfrm>
+          <a:prstGeom prst="roundRect">
+            <a:avLst>
+              <a:gd name="adj" fmla="val 7059"/>
+            </a:avLst>
+          </a:prstGeom>
+          <a:solidFill>
+            <a:srgbClr val="F3F4F6"/>
+          </a:solidFill>
+          <a:ln w="12700">
+            <a:solidFill>
+              <a:srgbClr val="E2E8F0"/>
+            </a:solidFill>
+            <a:round/>
+          </a:ln>
+        </p:spPr>
+        <p:style>
+          <a:lnRef idx="0"/>
+          <a:fillRef idx="0"/>
+          <a:effectRef idx="0"/>
+          <a:fontRef idx="minor"/>
+        </p:style>
+        <p:txBody>
+          <a:bodyPr lIns="90000" tIns="45000" rIns="90000" bIns="45000" anchor="t">
+            <a:noAutofit/>
+          </a:bodyPr>
+          <a:p>
+            <a:endParaRPr lang="en-IN" sz="1800" b="0" u="none" strike="noStrike">
+              <a:solidFill>
+                <a:srgbClr val="000000"/>
+              </a:solidFill>
+              <a:effectLst/>
+              <a:uFillTx/>
+              <a:latin typeface="Arial"/>
+            </a:endParaRPr>
+          </a:p>
+        </p:txBody>
+      </p:sp>
+      <p:sp>
+        <p:nvSpPr>
+          <p:cNvPr id="344" name="Text 2"/>
+          <p:cNvSpPr/>
+          <p:nvPr/>
+        </p:nvSpPr>
+        <p:spPr>
+          <a:xfrm>
+            <a:off x="804600" y="1737360"/>
+            <a:ext cx="10579320" cy="411120"/>
+          </a:xfrm>
+          <a:prstGeom prst="rect">
+            <a:avLst/>
+          </a:prstGeom>
+          <a:noFill/>
+          <a:ln w="0">
+            <a:noFill/>
+          </a:ln>
+        </p:spPr>
+        <p:style>
+          <a:lnRef idx="0"/>
+          <a:fillRef idx="0"/>
+          <a:effectRef idx="0"/>
+          <a:fontRef idx="minor"/>
+        </p:style>
+        <p:txBody>
+          <a:bodyPr lIns="0" tIns="0" rIns="0" bIns="0" anchor="t">
+            <a:noAutofit/>
+          </a:bodyPr>
+          <a:p>
+            <a:pPr defTabSz="914400">
+              <a:lnSpc>
+                <a:spcPct val="115000"/>
+              </a:lnSpc>
+              <a:tabLst>
+                <a:tab pos="0" algn="l"/>
+              </a:tabLst>
+            </a:pPr>
+            <a:r>
+              <a:rPr lang="en-US" sz="1250" b="0" u="none" strike="noStrike">
+                <a:solidFill>
+                  <a:srgbClr val="1E293B"/>
+                </a:solidFill>
+                <a:effectLst/>
+                <a:uFillTx/>
+                <a:latin typeface="Courier New"/>
+                <a:ea typeface="Courier New"/>
+              </a:rPr>
+              <a:t>class Student:                                      https://your-api.onrender.com/docs</a:t>
+            </a:r>
+            <a:endParaRPr lang="en-IN" sz="1250" b="0" u="none" strike="noStrike">
+              <a:solidFill>
+                <a:srgbClr val="000000"/>
+              </a:solidFill>
+              <a:effectLst/>
+              <a:uFillTx/>
+              <a:latin typeface="Arial"/>
+            </a:endParaRPr>
+          </a:p>
+          <a:p>
+            <a:pPr defTabSz="914400">
+              <a:lnSpc>
+                <a:spcPct val="115000"/>
+              </a:lnSpc>
+              <a:tabLst>
+                <a:tab pos="0" algn="l"/>
+              </a:tabLst>
+            </a:pPr>
+            <a:r>
+              <a:rPr lang="en-US" sz="1250" b="0" u="none" strike="noStrike">
+                <a:solidFill>
+                  <a:srgbClr val="1E293B"/>
+                </a:solidFill>
+                <a:effectLst/>
+                <a:uFillTx/>
+                <a:latin typeface="Courier New"/>
+                <a:ea typeface="Courier New"/>
+              </a:rPr>
+              <a:t>    def __init__(self, name): ...          ----&gt;     behind a login, on a real database</a:t>
+            </a:r>
+            <a:endParaRPr lang="en-IN" sz="1250" b="0" u="none" strike="noStrike">
+              <a:solidFill>
+                <a:srgbClr val="000000"/>
+              </a:solidFill>
+              <a:effectLst/>
+              <a:uFillTx/>
+              <a:latin typeface="Arial"/>
+            </a:endParaRPr>
+          </a:p>
+        </p:txBody>
+      </p:sp>
+      <p:sp>
+        <p:nvSpPr>
+          <p:cNvPr id="345" name="Shape 3"/>
+          <p:cNvSpPr/>
+          <p:nvPr/>
+        </p:nvSpPr>
+        <p:spPr>
+          <a:xfrm>
+            <a:off x="548640" y="2560320"/>
             <a:ext cx="11091240" cy="566640"/>
           </a:xfrm>
           <a:prstGeom prst="roundRect">
@@ -15714,7 +19960,517 @@
       </p:sp>
       <p:sp>
         <p:nvSpPr>
-          <p:cNvPr id="295" name="Text 13"/>
+          <p:cNvPr id="346" name="Text 4"/>
+          <p:cNvSpPr/>
+          <p:nvPr/>
+        </p:nvSpPr>
+        <p:spPr>
+          <a:xfrm>
+            <a:off x="822960" y="2560320"/>
+            <a:ext cx="3291480" cy="566640"/>
+          </a:xfrm>
+          <a:prstGeom prst="rect">
+            <a:avLst/>
+          </a:prstGeom>
+          <a:noFill/>
+          <a:ln w="0">
+            <a:noFill/>
+          </a:ln>
+        </p:spPr>
+        <p:style>
+          <a:lnRef idx="0"/>
+          <a:fillRef idx="0"/>
+          <a:effectRef idx="0"/>
+          <a:fontRef idx="minor"/>
+        </p:style>
+        <p:txBody>
+          <a:bodyPr lIns="0" tIns="0" rIns="0" bIns="0" anchor="ctr">
+            <a:noAutofit/>
+          </a:bodyPr>
+          <a:p>
+            <a:pPr defTabSz="914400">
+              <a:lnSpc>
+                <a:spcPct val="100000"/>
+              </a:lnSpc>
+              <a:tabLst>
+                <a:tab pos="0" algn="l"/>
+              </a:tabLst>
+            </a:pPr>
+            <a:r>
+              <a:rPr lang="en-US" sz="1450" b="1" u="none" strike="noStrike">
+                <a:solidFill>
+                  <a:srgbClr val="6366F1"/>
+                </a:solidFill>
+                <a:effectLst/>
+                <a:uFillTx/>
+                <a:latin typeface="Calibri"/>
+                <a:ea typeface="Calibri"/>
+              </a:rPr>
+              <a:t>A class became an API</a:t>
+            </a:r>
+            <a:endParaRPr lang="en-IN" sz="1450" b="0" u="none" strike="noStrike">
+              <a:solidFill>
+                <a:srgbClr val="000000"/>
+              </a:solidFill>
+              <a:effectLst/>
+              <a:uFillTx/>
+              <a:latin typeface="Arial"/>
+            </a:endParaRPr>
+          </a:p>
+        </p:txBody>
+      </p:sp>
+      <p:sp>
+        <p:nvSpPr>
+          <p:cNvPr id="347" name="Text 5"/>
+          <p:cNvSpPr/>
+          <p:nvPr/>
+        </p:nvSpPr>
+        <p:spPr>
+          <a:xfrm>
+            <a:off x="4206240" y="2560320"/>
+            <a:ext cx="7223400" cy="566640"/>
+          </a:xfrm>
+          <a:prstGeom prst="rect">
+            <a:avLst/>
+          </a:prstGeom>
+          <a:noFill/>
+          <a:ln w="0">
+            <a:noFill/>
+          </a:ln>
+        </p:spPr>
+        <p:style>
+          <a:lnRef idx="0"/>
+          <a:fillRef idx="0"/>
+          <a:effectRef idx="0"/>
+          <a:fontRef idx="minor"/>
+        </p:style>
+        <p:txBody>
+          <a:bodyPr lIns="0" tIns="0" rIns="0" bIns="0" anchor="ctr">
+            <a:noAutofit/>
+          </a:bodyPr>
+          <a:p>
+            <a:pPr defTabSz="914400">
+              <a:lnSpc>
+                <a:spcPct val="100000"/>
+              </a:lnSpc>
+              <a:tabLst>
+                <a:tab pos="0" algn="l"/>
+              </a:tabLst>
+            </a:pPr>
+            <a:r>
+              <a:rPr lang="en-US" sz="1350" b="0" u="none" strike="noStrike">
+                <a:solidFill>
+                  <a:srgbClr val="1E293B"/>
+                </a:solidFill>
+                <a:effectLst/>
+                <a:uFillTx/>
+                <a:latin typeface="Calibri"/>
+                <a:ea typeface="Calibri"/>
+              </a:rPr>
+              <a:t>objects → endpoints → validation that writes itself</a:t>
+            </a:r>
+            <a:endParaRPr lang="en-IN" sz="1350" b="0" u="none" strike="noStrike">
+              <a:solidFill>
+                <a:srgbClr val="000000"/>
+              </a:solidFill>
+              <a:effectLst/>
+              <a:uFillTx/>
+              <a:latin typeface="Arial"/>
+            </a:endParaRPr>
+          </a:p>
+        </p:txBody>
+      </p:sp>
+      <p:sp>
+        <p:nvSpPr>
+          <p:cNvPr id="348" name="Shape 6"/>
+          <p:cNvSpPr/>
+          <p:nvPr/>
+        </p:nvSpPr>
+        <p:spPr>
+          <a:xfrm>
+            <a:off x="548640" y="3218760"/>
+            <a:ext cx="11091240" cy="566640"/>
+          </a:xfrm>
+          <a:prstGeom prst="roundRect">
+            <a:avLst>
+              <a:gd name="adj" fmla="val 16129"/>
+            </a:avLst>
+          </a:prstGeom>
+          <a:solidFill>
+            <a:srgbClr val="F8FAFC"/>
+          </a:solidFill>
+          <a:ln w="12700">
+            <a:solidFill>
+              <a:srgbClr val="E2E8F0"/>
+            </a:solidFill>
+            <a:round/>
+          </a:ln>
+        </p:spPr>
+        <p:style>
+          <a:lnRef idx="0"/>
+          <a:fillRef idx="0"/>
+          <a:effectRef idx="0"/>
+          <a:fontRef idx="minor"/>
+        </p:style>
+        <p:txBody>
+          <a:bodyPr lIns="90000" tIns="45000" rIns="90000" bIns="45000" anchor="t">
+            <a:noAutofit/>
+          </a:bodyPr>
+          <a:p>
+            <a:endParaRPr lang="en-IN" sz="1800" b="0" u="none" strike="noStrike">
+              <a:solidFill>
+                <a:srgbClr val="000000"/>
+              </a:solidFill>
+              <a:effectLst/>
+              <a:uFillTx/>
+              <a:latin typeface="Arial"/>
+            </a:endParaRPr>
+          </a:p>
+        </p:txBody>
+      </p:sp>
+      <p:sp>
+        <p:nvSpPr>
+          <p:cNvPr id="349" name="Text 7"/>
+          <p:cNvSpPr/>
+          <p:nvPr/>
+        </p:nvSpPr>
+        <p:spPr>
+          <a:xfrm>
+            <a:off x="822960" y="3218760"/>
+            <a:ext cx="3291480" cy="566640"/>
+          </a:xfrm>
+          <a:prstGeom prst="rect">
+            <a:avLst/>
+          </a:prstGeom>
+          <a:noFill/>
+          <a:ln w="0">
+            <a:noFill/>
+          </a:ln>
+        </p:spPr>
+        <p:style>
+          <a:lnRef idx="0"/>
+          <a:fillRef idx="0"/>
+          <a:effectRef idx="0"/>
+          <a:fontRef idx="minor"/>
+        </p:style>
+        <p:txBody>
+          <a:bodyPr lIns="0" tIns="0" rIns="0" bIns="0" anchor="ctr">
+            <a:noAutofit/>
+          </a:bodyPr>
+          <a:p>
+            <a:pPr defTabSz="914400">
+              <a:lnSpc>
+                <a:spcPct val="100000"/>
+              </a:lnSpc>
+              <a:tabLst>
+                <a:tab pos="0" algn="l"/>
+              </a:tabLst>
+            </a:pPr>
+            <a:r>
+              <a:rPr lang="en-US" sz="1450" b="1" u="none" strike="noStrike">
+                <a:solidFill>
+                  <a:srgbClr val="6366F1"/>
+                </a:solidFill>
+                <a:effectLst/>
+                <a:uFillTx/>
+                <a:latin typeface="Calibri"/>
+                <a:ea typeface="Calibri"/>
+              </a:rPr>
+              <a:t>The API got a memory</a:t>
+            </a:r>
+            <a:endParaRPr lang="en-IN" sz="1450" b="0" u="none" strike="noStrike">
+              <a:solidFill>
+                <a:srgbClr val="000000"/>
+              </a:solidFill>
+              <a:effectLst/>
+              <a:uFillTx/>
+              <a:latin typeface="Arial"/>
+            </a:endParaRPr>
+          </a:p>
+        </p:txBody>
+      </p:sp>
+      <p:sp>
+        <p:nvSpPr>
+          <p:cNvPr id="350" name="Text 8"/>
+          <p:cNvSpPr/>
+          <p:nvPr/>
+        </p:nvSpPr>
+        <p:spPr>
+          <a:xfrm>
+            <a:off x="4206240" y="3218760"/>
+            <a:ext cx="7223400" cy="566640"/>
+          </a:xfrm>
+          <a:prstGeom prst="rect">
+            <a:avLst/>
+          </a:prstGeom>
+          <a:noFill/>
+          <a:ln w="0">
+            <a:noFill/>
+          </a:ln>
+        </p:spPr>
+        <p:style>
+          <a:lnRef idx="0"/>
+          <a:fillRef idx="0"/>
+          <a:effectRef idx="0"/>
+          <a:fontRef idx="minor"/>
+        </p:style>
+        <p:txBody>
+          <a:bodyPr lIns="0" tIns="0" rIns="0" bIns="0" anchor="ctr">
+            <a:noAutofit/>
+          </a:bodyPr>
+          <a:p>
+            <a:pPr defTabSz="914400">
+              <a:lnSpc>
+                <a:spcPct val="100000"/>
+              </a:lnSpc>
+              <a:tabLst>
+                <a:tab pos="0" algn="l"/>
+              </a:tabLst>
+            </a:pPr>
+            <a:r>
+              <a:rPr lang="en-US" sz="1350" b="0" u="none" strike="noStrike">
+                <a:solidFill>
+                  <a:srgbClr val="1E293B"/>
+                </a:solidFill>
+                <a:effectLst/>
+                <a:uFillTx/>
+                <a:latin typeface="Calibri"/>
+                <a:ea typeface="Calibri"/>
+              </a:rPr>
+              <a:t>SQL, PostgreSQL, SQLAlchemy — it survives a restart</a:t>
+            </a:r>
+            <a:endParaRPr lang="en-IN" sz="1350" b="0" u="none" strike="noStrike">
+              <a:solidFill>
+                <a:srgbClr val="000000"/>
+              </a:solidFill>
+              <a:effectLst/>
+              <a:uFillTx/>
+              <a:latin typeface="Arial"/>
+            </a:endParaRPr>
+          </a:p>
+        </p:txBody>
+      </p:sp>
+      <p:sp>
+        <p:nvSpPr>
+          <p:cNvPr id="351" name="Shape 9"/>
+          <p:cNvSpPr/>
+          <p:nvPr/>
+        </p:nvSpPr>
+        <p:spPr>
+          <a:xfrm>
+            <a:off x="548640" y="3877200"/>
+            <a:ext cx="11091240" cy="566640"/>
+          </a:xfrm>
+          <a:prstGeom prst="roundRect">
+            <a:avLst>
+              <a:gd name="adj" fmla="val 16129"/>
+            </a:avLst>
+          </a:prstGeom>
+          <a:solidFill>
+            <a:srgbClr val="F8FAFC"/>
+          </a:solidFill>
+          <a:ln w="12700">
+            <a:solidFill>
+              <a:srgbClr val="E2E8F0"/>
+            </a:solidFill>
+            <a:round/>
+          </a:ln>
+        </p:spPr>
+        <p:style>
+          <a:lnRef idx="0"/>
+          <a:fillRef idx="0"/>
+          <a:effectRef idx="0"/>
+          <a:fontRef idx="minor"/>
+        </p:style>
+        <p:txBody>
+          <a:bodyPr lIns="90000" tIns="45000" rIns="90000" bIns="45000" anchor="t">
+            <a:noAutofit/>
+          </a:bodyPr>
+          <a:p>
+            <a:endParaRPr lang="en-IN" sz="1800" b="0" u="none" strike="noStrike">
+              <a:solidFill>
+                <a:srgbClr val="000000"/>
+              </a:solidFill>
+              <a:effectLst/>
+              <a:uFillTx/>
+              <a:latin typeface="Arial"/>
+            </a:endParaRPr>
+          </a:p>
+        </p:txBody>
+      </p:sp>
+      <p:sp>
+        <p:nvSpPr>
+          <p:cNvPr id="352" name="Text 10"/>
+          <p:cNvSpPr/>
+          <p:nvPr/>
+        </p:nvSpPr>
+        <p:spPr>
+          <a:xfrm>
+            <a:off x="822960" y="3877200"/>
+            <a:ext cx="3291480" cy="566640"/>
+          </a:xfrm>
+          <a:prstGeom prst="rect">
+            <a:avLst/>
+          </a:prstGeom>
+          <a:noFill/>
+          <a:ln w="0">
+            <a:noFill/>
+          </a:ln>
+        </p:spPr>
+        <p:style>
+          <a:lnRef idx="0"/>
+          <a:fillRef idx="0"/>
+          <a:effectRef idx="0"/>
+          <a:fontRef idx="minor"/>
+        </p:style>
+        <p:txBody>
+          <a:bodyPr lIns="0" tIns="0" rIns="0" bIns="0" anchor="ctr">
+            <a:noAutofit/>
+          </a:bodyPr>
+          <a:p>
+            <a:pPr defTabSz="914400">
+              <a:lnSpc>
+                <a:spcPct val="100000"/>
+              </a:lnSpc>
+              <a:tabLst>
+                <a:tab pos="0" algn="l"/>
+              </a:tabLst>
+            </a:pPr>
+            <a:r>
+              <a:rPr lang="en-US" sz="1450" b="1" u="none" strike="noStrike">
+                <a:solidFill>
+                  <a:srgbClr val="0891B2"/>
+                </a:solidFill>
+                <a:effectLst/>
+                <a:uFillTx/>
+                <a:latin typeface="Calibri"/>
+                <a:ea typeface="Calibri"/>
+              </a:rPr>
+              <a:t>It learned who is asking</a:t>
+            </a:r>
+            <a:endParaRPr lang="en-IN" sz="1450" b="0" u="none" strike="noStrike">
+              <a:solidFill>
+                <a:srgbClr val="000000"/>
+              </a:solidFill>
+              <a:effectLst/>
+              <a:uFillTx/>
+              <a:latin typeface="Arial"/>
+            </a:endParaRPr>
+          </a:p>
+        </p:txBody>
+      </p:sp>
+      <p:sp>
+        <p:nvSpPr>
+          <p:cNvPr id="353" name="Text 11"/>
+          <p:cNvSpPr/>
+          <p:nvPr/>
+        </p:nvSpPr>
+        <p:spPr>
+          <a:xfrm>
+            <a:off x="4206240" y="3877200"/>
+            <a:ext cx="7223400" cy="566640"/>
+          </a:xfrm>
+          <a:prstGeom prst="rect">
+            <a:avLst/>
+          </a:prstGeom>
+          <a:noFill/>
+          <a:ln w="0">
+            <a:noFill/>
+          </a:ln>
+        </p:spPr>
+        <p:style>
+          <a:lnRef idx="0"/>
+          <a:fillRef idx="0"/>
+          <a:effectRef idx="0"/>
+          <a:fontRef idx="minor"/>
+        </p:style>
+        <p:txBody>
+          <a:bodyPr lIns="0" tIns="0" rIns="0" bIns="0" anchor="ctr">
+            <a:noAutofit/>
+          </a:bodyPr>
+          <a:p>
+            <a:pPr defTabSz="914400">
+              <a:lnSpc>
+                <a:spcPct val="100000"/>
+              </a:lnSpc>
+              <a:tabLst>
+                <a:tab pos="0" algn="l"/>
+              </a:tabLst>
+            </a:pPr>
+            <a:r>
+              <a:rPr lang="en-US" sz="1350" b="0" u="none" strike="noStrike">
+                <a:solidFill>
+                  <a:srgbClr val="1E293B"/>
+                </a:solidFill>
+                <a:effectLst/>
+                <a:uFillTx/>
+                <a:latin typeface="Calibri"/>
+                <a:ea typeface="Calibri"/>
+              </a:rPr>
+              <a:t>hashing, JWT, get_current_user, roles</a:t>
+            </a:r>
+            <a:endParaRPr lang="en-IN" sz="1350" b="0" u="none" strike="noStrike">
+              <a:solidFill>
+                <a:srgbClr val="000000"/>
+              </a:solidFill>
+              <a:effectLst/>
+              <a:uFillTx/>
+              <a:latin typeface="Arial"/>
+            </a:endParaRPr>
+          </a:p>
+        </p:txBody>
+      </p:sp>
+      <p:sp>
+        <p:nvSpPr>
+          <p:cNvPr id="354" name="Shape 12"/>
+          <p:cNvSpPr/>
+          <p:nvPr/>
+        </p:nvSpPr>
+        <p:spPr>
+          <a:xfrm>
+            <a:off x="548640" y="4535280"/>
+            <a:ext cx="11091240" cy="566640"/>
+          </a:xfrm>
+          <a:prstGeom prst="roundRect">
+            <a:avLst>
+              <a:gd name="adj" fmla="val 16129"/>
+            </a:avLst>
+          </a:prstGeom>
+          <a:solidFill>
+            <a:srgbClr val="F8FAFC"/>
+          </a:solidFill>
+          <a:ln w="12700">
+            <a:solidFill>
+              <a:srgbClr val="E2E8F0"/>
+            </a:solidFill>
+            <a:round/>
+          </a:ln>
+        </p:spPr>
+        <p:style>
+          <a:lnRef idx="0"/>
+          <a:fillRef idx="0"/>
+          <a:effectRef idx="0"/>
+          <a:fontRef idx="minor"/>
+        </p:style>
+        <p:txBody>
+          <a:bodyPr lIns="90000" tIns="45000" rIns="90000" bIns="45000" anchor="t">
+            <a:noAutofit/>
+          </a:bodyPr>
+          <a:p>
+            <a:endParaRPr lang="en-IN" sz="1800" b="0" u="none" strike="noStrike">
+              <a:solidFill>
+                <a:srgbClr val="000000"/>
+              </a:solidFill>
+              <a:effectLst/>
+              <a:uFillTx/>
+              <a:latin typeface="Arial"/>
+            </a:endParaRPr>
+          </a:p>
+        </p:txBody>
+      </p:sp>
+      <p:sp>
+        <p:nvSpPr>
+          <p:cNvPr id="355" name="Text 13"/>
           <p:cNvSpPr/>
           <p:nvPr/>
         </p:nvSpPr>
@@ -15775,7 +20531,7 @@
       </p:sp>
       <p:sp>
         <p:nvSpPr>
-          <p:cNvPr id="296" name="Text 14"/>
+          <p:cNvPr id="356" name="Text 14"/>
           <p:cNvSpPr/>
           <p:nvPr/>
         </p:nvSpPr>
@@ -15836,7 +20592,7 @@
       </p:sp>
       <p:sp>
         <p:nvSpPr>
-          <p:cNvPr id="297" name="Shape 15"/>
+          <p:cNvPr id="357" name="Shape 15"/>
           <p:cNvSpPr/>
           <p:nvPr/>
         </p:nvSpPr>
@@ -15884,7 +20640,7 @@
       </p:sp>
       <p:sp>
         <p:nvSpPr>
-          <p:cNvPr id="298" name="Text 16"/>
+          <p:cNvPr id="358" name="Text 16"/>
           <p:cNvSpPr/>
           <p:nvPr/>
         </p:nvSpPr>
@@ -15945,7 +20701,7 @@
       </p:sp>
       <p:sp>
         <p:nvSpPr>
-          <p:cNvPr id="299" name="Text 17"/>
+          <p:cNvPr id="359" name="Text 17"/>
           <p:cNvSpPr/>
           <p:nvPr/>
         </p:nvSpPr>
@@ -16006,7 +20762,7 @@
       </p:sp>
       <p:sp>
         <p:nvSpPr>
-          <p:cNvPr id="300" name="Shape 18"/>
+          <p:cNvPr id="360" name="Shape 18"/>
           <p:cNvSpPr/>
           <p:nvPr/>
         </p:nvSpPr>
@@ -16054,7 +20810,7 @@
       </p:sp>
       <p:sp>
         <p:nvSpPr>
-          <p:cNvPr id="301" name="Text 19"/>
+          <p:cNvPr id="361" name="Text 19"/>
           <p:cNvSpPr/>
           <p:nvPr/>
         </p:nvSpPr>
@@ -16127,7 +20883,7 @@
       </p:sp>
       <p:sp>
         <p:nvSpPr>
-          <p:cNvPr id="302" name="Text 20"/>
+          <p:cNvPr id="362" name="Text 20"/>
           <p:cNvSpPr/>
           <p:nvPr/>
         </p:nvSpPr>
@@ -16188,7 +20944,7 @@
       </p:sp>
       <p:sp>
         <p:nvSpPr>
-          <p:cNvPr id="303" name="Text 21"/>
+          <p:cNvPr id="363" name="Text 21"/>
           <p:cNvSpPr/>
           <p:nvPr/>
         </p:nvSpPr>
@@ -16234,7 +20990,7 @@
                 <a:latin typeface="Calibri"/>
                 <a:ea typeface="Calibri"/>
               </a:rPr>
-              <a:t>21</a:t>
+              <a:t>25</a:t>
             </a:r>
             <a:endParaRPr lang="en-IN" sz="900" b="0" u="none" strike="noStrike">
               <a:solidFill>
